--- a/docs/ClaimMate_결과보고서.pptx
+++ b/docs/ClaimMate_결과보고서.pptx
@@ -4,6 +4,9 @@
   <p:sldMasterIdLst>
     <p:sldMasterId id="2147483648" r:id="rId1"/>
   </p:sldMasterIdLst>
+  <p:notesMasterIdLst>
+    <p:notesMasterId r:id="rId17"/>
+  </p:notesMasterIdLst>
   <p:sldIdLst>
     <p:sldId id="256" r:id="rId2"/>
     <p:sldId id="257" r:id="rId3"/>
@@ -21,9 +24,6 @@
     <p:sldId id="269" r:id="rId15"/>
     <p:sldId id="270" r:id="rId16"/>
   </p:sldIdLst>
-  <p:notesMasterIdLst>
-    <p:notesMasterId r:id="rId17"/>
-  </p:notesMasterIdLst>
   <p:sldSz cx="18288000" cy="10287000"/>
   <p:notesSz cx="10287000" cy="18288000"/>
   <p:defaultTextStyle>
@@ -118,6 +118,11 @@
       </a:defRPr>
     </a:lvl9pPr>
   </p:defaultTextStyle>
+  <p:extLst>
+    <p:ext uri="{EFAFB233-063F-42B5-8137-9DF3F51BA10A}">
+      <p15:sldGuideLst xmlns:p15="http://schemas.microsoft.com/office/powerpoint/2012/main"/>
+    </p:ext>
+  </p:extLst>
 </p:presentation>
 </file>
 
@@ -143,240 +148,16 @@
           <a:chExt cx="0" cy="0"/>
         </a:xfrm>
       </p:grpSpPr>
-      <p:sp>
-        <p:nvSpPr>
-          <p:cNvPr id="2" name="Header Placeholder 1"/>
-          <p:cNvSpPr>
-            <a:spLocks noGrp="1"/>
-          </p:cNvSpPr>
-          <p:nvPr>
-            <p:ph type="hdr" sz="quarter"/>
-          </p:nvPr>
-        </p:nvSpPr>
-        <p:spPr>
-          <a:xfrm>
-            <a:off x="0" y="0"/>
-            <a:ext cx="2971800" cy="458788"/>
-          </a:xfrm>
-          <a:prstGeom prst="rect">
-            <a:avLst/>
-          </a:prstGeom>
-        </p:spPr>
-        <p:txBody>
-          <a:bodyPr vert="horz" lIns="91440" tIns="45720" rIns="91440" bIns="45720" rtlCol="0"/>
-          <a:lstStyle>
-            <a:lvl1pPr algn="l">
-              <a:defRPr sz="1200"/>
-            </a:lvl1pPr>
-          </a:lstStyle>
-          <a:p>
-            <a:endParaRPr lang="en-US"/>
-          </a:p>
-        </p:txBody>
-      </p:sp>
-      <p:sp>
-        <p:nvSpPr>
-          <p:cNvPr id="3" name="Date Placeholder 2"/>
-          <p:cNvSpPr>
-            <a:spLocks noGrp="1"/>
-          </p:cNvSpPr>
-          <p:nvPr>
-            <p:ph type="dt" idx="1"/>
-          </p:nvPr>
-        </p:nvSpPr>
-        <p:spPr>
-          <a:xfrm>
-            <a:off x="3884613" y="0"/>
-            <a:ext cx="2971800" cy="458788"/>
-          </a:xfrm>
-          <a:prstGeom prst="rect">
-            <a:avLst/>
-          </a:prstGeom>
-        </p:spPr>
-        <p:txBody>
-          <a:bodyPr vert="horz" lIns="91440" tIns="45720" rIns="91440" bIns="45720" rtlCol="0"/>
-          <a:lstStyle>
-            <a:lvl1pPr algn="r">
-              <a:defRPr sz="1200"/>
-            </a:lvl1pPr>
-          </a:lstStyle>
-          <a:p>
-            <a:fld id="{5282F153-3F37-0F45-9E97-73ACFA13230C}" type="datetimeFigureOut">
-              <a:rPr lang="en-US"/>
-              <a:t>7/23/19</a:t>
-            </a:fld>
-            <a:endParaRPr lang="en-US"/>
-          </a:p>
-        </p:txBody>
-      </p:sp>
-      <p:sp>
-        <p:nvSpPr>
-          <p:cNvPr id="4" name="Slide Image Placeholder 3"/>
-          <p:cNvSpPr>
-            <a:spLocks noGrp="1" noRot="1" noChangeAspect="1"/>
-          </p:cNvSpPr>
-          <p:nvPr>
-            <p:ph type="sldImg" idx="2"/>
-          </p:nvPr>
-        </p:nvSpPr>
-        <p:spPr>
-          <a:xfrm>
-            <a:off x="685800" y="1143000"/>
-            <a:ext cx="5486400" cy="3086100"/>
-          </a:xfrm>
-          <a:prstGeom prst="rect">
-            <a:avLst/>
-          </a:prstGeom>
-          <a:noFill/>
-          <a:ln w="12700">
-            <a:solidFill>
-              <a:prstClr val="black"/>
-            </a:solidFill>
-          </a:ln>
-        </p:spPr>
-        <p:txBody>
-          <a:bodyPr vert="horz" lIns="91440" tIns="45720" rIns="91440" bIns="45720" rtlCol="0" anchor="ctr"/>
-          <a:lstStyle/>
-          <a:p>
-            <a:endParaRPr lang="en-US"/>
-          </a:p>
-        </p:txBody>
-      </p:sp>
-      <p:sp>
-        <p:nvSpPr>
-          <p:cNvPr id="5" name="Notes Placeholder 4"/>
-          <p:cNvSpPr>
-            <a:spLocks noGrp="1"/>
-          </p:cNvSpPr>
-          <p:nvPr>
-            <p:ph type="body" sz="quarter" idx="3"/>
-          </p:nvPr>
-        </p:nvSpPr>
-        <p:spPr>
-          <a:xfrm>
-            <a:off x="685800" y="4400550"/>
-            <a:ext cx="5486400" cy="3600450"/>
-          </a:xfrm>
-          <a:prstGeom prst="rect">
-            <a:avLst/>
-          </a:prstGeom>
-        </p:spPr>
-        <p:txBody>
-          <a:bodyPr vert="horz" lIns="91440" tIns="45720" rIns="91440" bIns="45720" rtlCol="0"/>
-          <a:lstStyle/>
-          <a:p>
-            <a:pPr lvl="0"/>
-            <a:r>
-              <a:rPr lang="en-US"/>
-              <a:t>Click to edit Master text styles</a:t>
-            </a:r>
-          </a:p>
-          <a:p>
-            <a:pPr lvl="1"/>
-            <a:r>
-              <a:rPr lang="en-US"/>
-              <a:t>Second level</a:t>
-            </a:r>
-          </a:p>
-          <a:p>
-            <a:pPr lvl="2"/>
-            <a:r>
-              <a:rPr lang="en-US"/>
-              <a:t>Third level</a:t>
-            </a:r>
-          </a:p>
-          <a:p>
-            <a:pPr lvl="3"/>
-            <a:r>
-              <a:rPr lang="en-US"/>
-              <a:t>Fourth level</a:t>
-            </a:r>
-          </a:p>
-          <a:p>
-            <a:pPr lvl="4"/>
-            <a:r>
-              <a:rPr lang="en-US"/>
-              <a:t>Fifth level</a:t>
-            </a:r>
-          </a:p>
-        </p:txBody>
-      </p:sp>
-      <p:sp>
-        <p:nvSpPr>
-          <p:cNvPr id="6" name="Footer Placeholder 5"/>
-          <p:cNvSpPr>
-            <a:spLocks noGrp="1"/>
-          </p:cNvSpPr>
-          <p:nvPr>
-            <p:ph type="ftr" sz="quarter" idx="4"/>
-          </p:nvPr>
-        </p:nvSpPr>
-        <p:spPr>
-          <a:xfrm>
-            <a:off x="0" y="8685213"/>
-            <a:ext cx="2971800" cy="458787"/>
-          </a:xfrm>
-          <a:prstGeom prst="rect">
-            <a:avLst/>
-          </a:prstGeom>
-        </p:spPr>
-        <p:txBody>
-          <a:bodyPr vert="horz" lIns="91440" tIns="45720" rIns="91440" bIns="45720" rtlCol="0" anchor="b"/>
-          <a:lstStyle>
-            <a:lvl1pPr algn="l">
-              <a:defRPr sz="1200"/>
-            </a:lvl1pPr>
-          </a:lstStyle>
-          <a:p>
-            <a:endParaRPr lang="en-US"/>
-          </a:p>
-        </p:txBody>
-      </p:sp>
-      <p:sp>
-        <p:nvSpPr>
-          <p:cNvPr id="7" name="Slide Number Placeholder 6"/>
-          <p:cNvSpPr>
-            <a:spLocks noGrp="1"/>
-          </p:cNvSpPr>
-          <p:nvPr>
-            <p:ph type="sldNum" sz="quarter" idx="5"/>
-          </p:nvPr>
-        </p:nvSpPr>
-        <p:spPr>
-          <a:xfrm>
-            <a:off x="3884613" y="8685213"/>
-            <a:ext cx="2971800" cy="458787"/>
-          </a:xfrm>
-          <a:prstGeom prst="rect">
-            <a:avLst/>
-          </a:prstGeom>
-        </p:spPr>
-        <p:txBody>
-          <a:bodyPr vert="horz" lIns="91440" tIns="45720" rIns="91440" bIns="45720" rtlCol="0" anchor="b"/>
-          <a:lstStyle>
-            <a:lvl1pPr algn="r">
-              <a:defRPr sz="1200"/>
-            </a:lvl1pPr>
-          </a:lstStyle>
-          <a:p>
-            <a:fld id="{CE5E9CC1-C706-0F49-92D6-E571CC5EEA8F}" type="slidenum">
-              <a:rPr lang="en-US"/>
-              <a:t>‹#›</a:t>
-            </a:fld>
-            <a:endParaRPr lang="en-US"/>
-          </a:p>
-        </p:txBody>
-      </p:sp>
     </p:spTree>
     <p:extLst>
       <p:ext uri="{BB962C8B-B14F-4D97-AF65-F5344CB8AC3E}">
-        <p14:creationId xmlns:p14="http://schemas.microsoft.com/office/powerpoint/2010/main" val="1024086991"/>
+        <p14:creationId xmlns:p14="http://schemas.microsoft.com/office/powerpoint/2010/main" val="782561107"/>
       </p:ext>
     </p:extLst>
   </p:cSld>
   <p:clrMap bg1="lt1" tx1="dk1" bg2="lt2" tx2="dk2" accent1="accent1" accent2="accent2" accent3="accent3" accent4="accent4" accent5="accent5" accent6="accent6" hlink="hlink" folHlink="folHlink"/>
   <p:notesStyle>
-    <a:lvl1pPr marL="0" algn="l" defTabSz="914400" rtl="0" eaLnBrk="1" latinLnBrk="0" hangingPunct="1">
+    <a:lvl1pPr marL="0" algn="l" defTabSz="914400" rtl="0" eaLnBrk="1" latinLnBrk="1" hangingPunct="1">
       <a:defRPr sz="1200" kern="1200">
         <a:solidFill>
           <a:schemeClr val="tx1"/>
@@ -386,7 +167,7 @@
         <a:cs typeface="+mn-cs"/>
       </a:defRPr>
     </a:lvl1pPr>
-    <a:lvl2pPr marL="457200" algn="l" defTabSz="914400" rtl="0" eaLnBrk="1" latinLnBrk="0" hangingPunct="1">
+    <a:lvl2pPr marL="457200" algn="l" defTabSz="914400" rtl="0" eaLnBrk="1" latinLnBrk="1" hangingPunct="1">
       <a:defRPr sz="1200" kern="1200">
         <a:solidFill>
           <a:schemeClr val="tx1"/>
@@ -396,7 +177,7 @@
         <a:cs typeface="+mn-cs"/>
       </a:defRPr>
     </a:lvl2pPr>
-    <a:lvl3pPr marL="914400" algn="l" defTabSz="914400" rtl="0" eaLnBrk="1" latinLnBrk="0" hangingPunct="1">
+    <a:lvl3pPr marL="914400" algn="l" defTabSz="914400" rtl="0" eaLnBrk="1" latinLnBrk="1" hangingPunct="1">
       <a:defRPr sz="1200" kern="1200">
         <a:solidFill>
           <a:schemeClr val="tx1"/>
@@ -406,7 +187,7 @@
         <a:cs typeface="+mn-cs"/>
       </a:defRPr>
     </a:lvl3pPr>
-    <a:lvl4pPr marL="1371600" algn="l" defTabSz="914400" rtl="0" eaLnBrk="1" latinLnBrk="0" hangingPunct="1">
+    <a:lvl4pPr marL="1371600" algn="l" defTabSz="914400" rtl="0" eaLnBrk="1" latinLnBrk="1" hangingPunct="1">
       <a:defRPr sz="1200" kern="1200">
         <a:solidFill>
           <a:schemeClr val="tx1"/>
@@ -416,7 +197,7 @@
         <a:cs typeface="+mn-cs"/>
       </a:defRPr>
     </a:lvl4pPr>
-    <a:lvl5pPr marL="1828800" algn="l" defTabSz="914400" rtl="0" eaLnBrk="1" latinLnBrk="0" hangingPunct="1">
+    <a:lvl5pPr marL="1828800" algn="l" defTabSz="914400" rtl="0" eaLnBrk="1" latinLnBrk="1" hangingPunct="1">
       <a:defRPr sz="1200" kern="1200">
         <a:solidFill>
           <a:schemeClr val="tx1"/>
@@ -426,7 +207,7 @@
         <a:cs typeface="+mn-cs"/>
       </a:defRPr>
     </a:lvl5pPr>
-    <a:lvl6pPr marL="2286000" algn="l" defTabSz="914400" rtl="0" eaLnBrk="1" latinLnBrk="0" hangingPunct="1">
+    <a:lvl6pPr marL="2286000" algn="l" defTabSz="914400" rtl="0" eaLnBrk="1" latinLnBrk="1" hangingPunct="1">
       <a:defRPr sz="1200" kern="1200">
         <a:solidFill>
           <a:schemeClr val="tx1"/>
@@ -436,7 +217,7 @@
         <a:cs typeface="+mn-cs"/>
       </a:defRPr>
     </a:lvl6pPr>
-    <a:lvl7pPr marL="2743200" algn="l" defTabSz="914400" rtl="0" eaLnBrk="1" latinLnBrk="0" hangingPunct="1">
+    <a:lvl7pPr marL="2743200" algn="l" defTabSz="914400" rtl="0" eaLnBrk="1" latinLnBrk="1" hangingPunct="1">
       <a:defRPr sz="1200" kern="1200">
         <a:solidFill>
           <a:schemeClr val="tx1"/>
@@ -446,7 +227,7 @@
         <a:cs typeface="+mn-cs"/>
       </a:defRPr>
     </a:lvl7pPr>
-    <a:lvl8pPr marL="3200400" algn="l" defTabSz="914400" rtl="0" eaLnBrk="1" latinLnBrk="0" hangingPunct="1">
+    <a:lvl8pPr marL="3200400" algn="l" defTabSz="914400" rtl="0" eaLnBrk="1" latinLnBrk="1" hangingPunct="1">
       <a:defRPr sz="1200" kern="1200">
         <a:solidFill>
           <a:schemeClr val="tx1"/>
@@ -456,7 +237,7 @@
         <a:cs typeface="+mn-cs"/>
       </a:defRPr>
     </a:lvl8pPr>
-    <a:lvl9pPr marL="3657600" algn="l" defTabSz="914400" rtl="0" eaLnBrk="1" latinLnBrk="0" hangingPunct="1">
+    <a:lvl9pPr marL="3657600" algn="l" defTabSz="914400" rtl="0" eaLnBrk="1" latinLnBrk="1" hangingPunct="1">
       <a:defRPr sz="1200" kern="1200">
         <a:solidFill>
           <a:schemeClr val="tx1"/>
@@ -518,7 +299,6 @@
               <a:rPr lang="en-US" dirty="0"/>
               <a:t>ClaimMate 프로젝트 완료 보고서입니다. 3인 팀으로 4일간 진행했습니다.</a:t>
             </a:r>
-            <a:endParaRPr lang="en-US" dirty="0"/>
           </a:p>
         </p:txBody>
       </p:sp>
@@ -606,7 +386,6 @@
               <a:rPr lang="en-US" dirty="0"/>
               <a:t>공공데이터 표본이 부족해 ML 성공률이 부당하게 낮게 나오는 경우를 법령 근거로 상향 보정합니다. 하향은 하지 않습니다.</a:t>
             </a:r>
-            <a:endParaRPr lang="en-US" dirty="0"/>
           </a:p>
         </p:txBody>
       </p:sp>
@@ -694,7 +473,6 @@
               <a:rPr lang="en-US" dirty="0"/>
               <a:t>분류 성능은 Accuracy와 F1으로, 에이전트 출력은 재현성과 폴백 안정성으로 평가했습니다.</a:t>
             </a:r>
-            <a:endParaRPr lang="en-US" dirty="0"/>
           </a:p>
         </p:txBody>
       </p:sp>
@@ -782,7 +560,6 @@
               <a:rPr lang="en-US" dirty="0"/>
               <a:t>프론트엔드부터 배포까지 사용한 기술을 영역별로 정리했습니다.</a:t>
             </a:r>
-            <a:endParaRPr lang="en-US" dirty="0"/>
           </a:p>
         </p:txBody>
       </p:sp>
@@ -870,7 +647,6 @@
               <a:rPr lang="en-US" dirty="0"/>
               <a:t>실제 서비스 화면입니다. 자유 서술 입력과 금액·일자·품목만으로 분석을 시작합니다.</a:t>
             </a:r>
-            <a:endParaRPr lang="en-US" dirty="0"/>
           </a:p>
         </p:txBody>
       </p:sp>
@@ -958,7 +734,6 @@
               <a:rPr lang="en-US" dirty="0"/>
               <a:t>결과 화면은 성공률 게이지, 인용 법령, 예상 환급 범위, 내용증명 초안으로 구성됩니다.</a:t>
             </a:r>
-            <a:endParaRPr lang="en-US" dirty="0"/>
           </a:p>
         </p:txBody>
       </p:sp>
@@ -1046,7 +821,6 @@
               <a:rPr lang="en-US" dirty="0"/>
               <a:t>한계와 향후 과제, 그리고 팀이 느낀 점으로 마무리합니다.</a:t>
             </a:r>
-            <a:endParaRPr lang="en-US" dirty="0"/>
           </a:p>
         </p:txBody>
       </p:sp>
@@ -1134,7 +908,6 @@
               <a:rPr lang="en-US" dirty="0"/>
               <a:t>소비자는 자기 사안이 구제 대상인지, 얼마를 돌려받을 수 있는지 알기 어렵습니다. ClaimMate는 그 판단을 한 화면에서 제공합니다.</a:t>
             </a:r>
-            <a:endParaRPr lang="en-US" dirty="0"/>
           </a:p>
         </p:txBody>
       </p:sp>
@@ -1222,7 +995,6 @@
               <a:rPr lang="en-US" dirty="0"/>
               <a:t>3인 팀이 풀스택, 데이터/ML, LLM 에이전트로 영역을 나눠 병행 개발했습니다.</a:t>
             </a:r>
-            <a:endParaRPr lang="en-US" dirty="0"/>
           </a:p>
         </p:txBody>
       </p:sp>
@@ -1310,7 +1082,6 @@
               <a:rPr lang="en-US" dirty="0"/>
               <a:t>총 4일 일정입니다. 첫 이틀에 데이터와 모델을, 후반 이틀에 RAG와 Rerank, 문서화를 진행했습니다.</a:t>
             </a:r>
-            <a:endParaRPr lang="en-US" dirty="0"/>
           </a:p>
         </p:txBody>
       </p:sp>
@@ -1398,7 +1169,6 @@
               <a:rPr lang="en-US" dirty="0"/>
               <a:t>5단계 프로세스입니다. 각 단계마다 적용 기술을 함께 표기했습니다.</a:t>
             </a:r>
-            <a:endParaRPr lang="en-US" dirty="0"/>
           </a:p>
         </p:txBody>
       </p:sp>
@@ -1486,7 +1256,6 @@
               <a:rPr lang="en-US" dirty="0"/>
               <a:t>입력에서 리포트까지 4단계입니다. ML은 Python 서버리스 함수, RAG와 LLM은 Node 런타임에서 처리합니다.</a:t>
             </a:r>
-            <a:endParaRPr lang="en-US" dirty="0"/>
           </a:p>
         </p:txBody>
       </p:sp>
@@ -1574,7 +1343,6 @@
               <a:rPr lang="en-US" dirty="0"/>
               <a:t>원본 CSV에는 카테고리 라벨이 없어 키워드 매칭으로 라벨을 부여했고, 표본이 희소한 카테고리는 수작성 사례로 보강했습니다.</a:t>
             </a:r>
-            <a:endParaRPr lang="en-US" dirty="0"/>
           </a:p>
         </p:txBody>
       </p:sp>
@@ -1662,7 +1430,6 @@
               <a:rPr lang="en-US" dirty="0"/>
               <a:t>형태소 분석기 대신 문자 n-gram TF-IDF를 써서 조사 변화에 강건하면서 서버리스에 가볍게 올렸습니다.</a:t>
             </a:r>
-            <a:endParaRPr lang="en-US" dirty="0"/>
           </a:p>
         </p:txBody>
       </p:sp>
@@ -1750,7 +1517,6 @@
               <a:rPr lang="en-US" dirty="0"/>
               <a:t>42개 조항 청크를 미리 임베딩해 두고, 코사인 유사도에 카테고리·키워드 가중치를 더한 하이브리드 검색으로 Top-2를 뽑습니다.</a:t>
             </a:r>
-            <a:endParaRPr lang="en-US" dirty="0"/>
           </a:p>
         </p:txBody>
       </p:sp>
@@ -1823,6 +1589,11 @@
 <file path=ppt/slideMasters/slideMaster1.xml><?xml version="1.0" encoding="utf-8"?>
 <p:sldMaster xmlns:a="http://schemas.openxmlformats.org/drawingml/2006/main" xmlns:r="http://schemas.openxmlformats.org/officeDocument/2006/relationships" xmlns:p="http://schemas.openxmlformats.org/presentationml/2006/main">
   <p:cSld>
+    <p:bg>
+      <p:bgRef idx="1001">
+        <a:schemeClr val="bg1"/>
+      </p:bgRef>
+    </p:bg>
     <p:spTree>
       <p:nvGrpSpPr>
         <p:cNvPr id="1" name=""/>
@@ -2105,6 +1876,7 @@
         <a:solidFill>
           <a:srgbClr val="FFFFFF"/>
         </a:solidFill>
+        <a:effectLst/>
       </p:bgPr>
     </p:bg>
     <p:spTree>
@@ -2166,11 +1938,11 @@
           </a:bodyPr>
           <a:lstStyle/>
           <a:p>
-            <a:pPr algn="l" indent="0" marL="0">
-              <a:buNone/>
-            </a:pPr>
-            <a:r>
-              <a:rPr lang="en-US" sz="1950" b="1" spc="117" kern="0" dirty="0">
+            <a:pPr marL="0" indent="0" algn="l">
+              <a:buNone/>
+            </a:pPr>
+            <a:r>
+              <a:rPr lang="en-US" sz="1950" b="1" kern="0" spc="117" dirty="0">
                 <a:solidFill>
                   <a:srgbClr val="1D3A8F"/>
                 </a:solidFill>
@@ -2207,14 +1979,14 @@
           </a:bodyPr>
           <a:lstStyle/>
           <a:p>
-            <a:pPr algn="l" indent="0" marL="0">
+            <a:pPr marL="0" indent="0" algn="l">
               <a:lnSpc>
                 <a:spcPct val="69136"/>
               </a:lnSpc>
               <a:buNone/>
             </a:pPr>
             <a:r>
-              <a:rPr lang="en-US" sz="8400" b="1" spc="-252" kern="0" dirty="0">
+              <a:rPr lang="en-US" sz="8400" b="1" kern="0" spc="-252" dirty="0">
                 <a:solidFill>
                   <a:srgbClr val="10151F"/>
                 </a:solidFill>
@@ -2251,14 +2023,14 @@
           </a:bodyPr>
           <a:lstStyle/>
           <a:p>
-            <a:pPr algn="l" indent="0" marL="0">
+            <a:pPr marL="0" indent="0" algn="l">
               <a:lnSpc>
                 <a:spcPct val="89375"/>
               </a:lnSpc>
               <a:buNone/>
             </a:pPr>
             <a:r>
-              <a:rPr lang="en-US" sz="3300" b="1" spc="-66" kern="0" dirty="0">
+              <a:rPr lang="en-US" sz="3300" b="1" kern="0" spc="-66" dirty="0">
                 <a:solidFill>
                   <a:srgbClr val="3D4757"/>
                 </a:solidFill>
@@ -2295,7 +2067,7 @@
           </a:bodyPr>
           <a:lstStyle/>
           <a:p>
-            <a:pPr algn="l" indent="0" marL="0">
+            <a:pPr marL="0" indent="0" algn="l">
               <a:lnSpc>
                 <a:spcPct val="110769"/>
               </a:lnSpc>
@@ -2339,11 +2111,11 @@
           </a:bodyPr>
           <a:lstStyle/>
           <a:p>
-            <a:pPr algn="l" indent="0" marL="0">
-              <a:buNone/>
-            </a:pPr>
-            <a:r>
-              <a:rPr lang="en-US" sz="1800" b="1" spc="72" kern="0" dirty="0">
+            <a:pPr marL="0" indent="0" algn="l">
+              <a:buNone/>
+            </a:pPr>
+            <a:r>
+              <a:rPr lang="en-US" sz="1800" b="1" kern="0" spc="72" dirty="0">
                 <a:solidFill>
                   <a:srgbClr val="A8AFBD"/>
                 </a:solidFill>
@@ -2380,7 +2152,7 @@
           </a:bodyPr>
           <a:lstStyle/>
           <a:p>
-            <a:pPr algn="l" indent="0" marL="0">
+            <a:pPr marL="0" indent="0" algn="l">
               <a:buNone/>
             </a:pPr>
             <a:r>
@@ -2421,11 +2193,11 @@
           </a:bodyPr>
           <a:lstStyle/>
           <a:p>
-            <a:pPr algn="l" indent="0" marL="0">
-              <a:buNone/>
-            </a:pPr>
-            <a:r>
-              <a:rPr lang="en-US" sz="1800" b="1" spc="72" kern="0" dirty="0">
+            <a:pPr marL="0" indent="0" algn="l">
+              <a:buNone/>
+            </a:pPr>
+            <a:r>
+              <a:rPr lang="en-US" sz="1800" b="1" kern="0" spc="72" dirty="0">
                 <a:solidFill>
                   <a:srgbClr val="A8AFBD"/>
                 </a:solidFill>
@@ -2462,7 +2234,7 @@
           </a:bodyPr>
           <a:lstStyle/>
           <a:p>
-            <a:pPr algn="l" indent="0" marL="0">
+            <a:pPr marL="0" indent="0" algn="l">
               <a:buNone/>
             </a:pPr>
             <a:r>
@@ -2502,17 +2274,17 @@
       </p:sp>
       <p:pic>
         <p:nvPicPr>
-          <p:cNvPr id="12" name="Image 0" descr="preencoded.png">    </p:cNvPr>
+          <p:cNvPr id="12" name="Image 0" descr="preencoded.png"/>
           <p:cNvPicPr>
             <a:picLocks noChangeAspect="1"/>
           </p:cNvPicPr>
           <p:nvPr/>
         </p:nvPicPr>
         <p:blipFill>
-          <a:blip r:embed="rId1">
+          <a:blip r:embed="rId3">
             <a:extLst>
               <a:ext uri="{96DAC541-7B7A-43D3-8B79-37D633B846F1}">
-                <asvg:svgBlip xmlns:asvg="http://schemas.microsoft.com/office/drawing/2016/SVG/main" r:embed="rId2"/>
+                <asvg:svgBlip xmlns:asvg="http://schemas.microsoft.com/office/drawing/2016/SVG/main" r:embed="rId4"/>
               </a:ext>
             </a:extLst>
           </a:blip>
@@ -2546,6 +2318,7 @@
         <a:solidFill>
           <a:srgbClr val="FFFFFF"/>
         </a:solidFill>
+        <a:effectLst/>
       </p:bgPr>
     </p:bg>
     <p:spTree>
@@ -2627,7 +2400,7 @@
           </a:bodyPr>
           <a:lstStyle/>
           <a:p>
-            <a:pPr algn="l" indent="0" marL="0">
+            <a:pPr marL="0" indent="0" algn="l">
               <a:buNone/>
             </a:pPr>
             <a:r>
@@ -2668,7 +2441,7 @@
           </a:bodyPr>
           <a:lstStyle/>
           <a:p>
-            <a:pPr algn="l" indent="0" marL="0">
+            <a:pPr marL="0" indent="0" algn="l">
               <a:buNone/>
             </a:pPr>
             <a:r>
@@ -2709,7 +2482,7 @@
           </a:bodyPr>
           <a:lstStyle/>
           <a:p>
-            <a:pPr algn="l" indent="0" marL="0">
+            <a:pPr marL="0" indent="0" algn="l">
               <a:buNone/>
             </a:pPr>
             <a:r>
@@ -2729,17 +2502,17 @@
       </p:sp>
       <p:pic>
         <p:nvPicPr>
-          <p:cNvPr id="7" name="Image 0" descr="preencoded.png">    </p:cNvPr>
+          <p:cNvPr id="7" name="Image 0" descr="preencoded.png"/>
           <p:cNvPicPr>
             <a:picLocks noChangeAspect="1"/>
           </p:cNvPicPr>
           <p:nvPr/>
         </p:nvPicPr>
         <p:blipFill>
-          <a:blip r:embed="rId1">
+          <a:blip r:embed="rId3">
             <a:extLst>
               <a:ext uri="{96DAC541-7B7A-43D3-8B79-37D633B846F1}">
-                <asvg:svgBlip xmlns:asvg="http://schemas.microsoft.com/office/drawing/2016/SVG/main" r:embed="rId2"/>
+                <asvg:svgBlip xmlns:asvg="http://schemas.microsoft.com/office/drawing/2016/SVG/main" r:embed="rId4"/>
               </a:ext>
             </a:extLst>
           </a:blip>
@@ -2776,15 +2549,15 @@
         </p:spPr>
         <p:txBody>
           <a:bodyPr wrap="square" lIns="25400" tIns="25400" rIns="25400" bIns="25400" rtlCol="0" anchor="t">
-            <a:normAutofit/>
-          </a:bodyPr>
-          <a:lstStyle/>
-          <a:p>
-            <a:pPr algn="l" indent="0" marL="0">
-              <a:buNone/>
-            </a:pPr>
-            <a:r>
-              <a:rPr lang="en-US" sz="4500" b="1" spc="-90" kern="0" dirty="0">
+            <a:normAutofit lnSpcReduction="10000"/>
+          </a:bodyPr>
+          <a:lstStyle/>
+          <a:p>
+            <a:pPr marL="0" indent="0" algn="l">
+              <a:buNone/>
+            </a:pPr>
+            <a:r>
+              <a:rPr lang="en-US" sz="4500" b="1" kern="0" spc="-90" dirty="0">
                 <a:solidFill>
                   <a:srgbClr val="10151F"/>
                 </a:solidFill>
@@ -2821,7 +2594,7 @@
           </a:bodyPr>
           <a:lstStyle/>
           <a:p>
-            <a:pPr algn="l" indent="0" marL="0">
+            <a:pPr marL="0" indent="0" algn="l">
               <a:lnSpc>
                 <a:spcPct val="102857"/>
               </a:lnSpc>
@@ -2889,11 +2662,11 @@
           </a:bodyPr>
           <a:lstStyle/>
           <a:p>
-            <a:pPr algn="l" indent="0" marL="0">
-              <a:buNone/>
-            </a:pPr>
-            <a:r>
-              <a:rPr lang="en-US" sz="1800" b="1" spc="108" kern="0" dirty="0">
+            <a:pPr marL="0" indent="0" algn="l">
+              <a:buNone/>
+            </a:pPr>
+            <a:r>
+              <a:rPr lang="en-US" sz="1800" b="1" kern="0" spc="108" dirty="0">
                 <a:solidFill>
                   <a:srgbClr val="8F9AAD"/>
                 </a:solidFill>
@@ -2926,15 +2699,15 @@
         </p:spPr>
         <p:txBody>
           <a:bodyPr wrap="square" lIns="25400" tIns="25400" rIns="25400" bIns="25400" rtlCol="0" anchor="t">
-            <a:normAutofit/>
-          </a:bodyPr>
-          <a:lstStyle/>
-          <a:p>
-            <a:pPr algn="l" indent="0" marL="0">
-              <a:buNone/>
-            </a:pPr>
-            <a:r>
-              <a:rPr lang="en-US" sz="3450" b="1" spc="-69" kern="0" dirty="0">
+            <a:normAutofit lnSpcReduction="10000"/>
+          </a:bodyPr>
+          <a:lstStyle/>
+          <a:p>
+            <a:pPr marL="0" indent="0" algn="l">
+              <a:buNone/>
+            </a:pPr>
+            <a:r>
+              <a:rPr lang="en-US" sz="3450" b="1" kern="0" spc="-69" dirty="0">
                 <a:solidFill>
                   <a:srgbClr val="10151F"/>
                 </a:solidFill>
@@ -2971,7 +2744,7 @@
           </a:bodyPr>
           <a:lstStyle/>
           <a:p>
-            <a:pPr algn="l" indent="0" marL="0">
+            <a:pPr marL="0" indent="0" algn="l">
               <a:lnSpc>
                 <a:spcPct val="98864"/>
               </a:lnSpc>
@@ -3039,11 +2812,11 @@
           </a:bodyPr>
           <a:lstStyle/>
           <a:p>
-            <a:pPr algn="l" indent="0" marL="0">
-              <a:buNone/>
-            </a:pPr>
-            <a:r>
-              <a:rPr lang="en-US" sz="1800" b="1" spc="108" kern="0" dirty="0">
+            <a:pPr marL="0" indent="0" algn="l">
+              <a:buNone/>
+            </a:pPr>
+            <a:r>
+              <a:rPr lang="en-US" sz="1800" b="1" kern="0" spc="108" dirty="0">
                 <a:solidFill>
                   <a:srgbClr val="0F9D76"/>
                 </a:solidFill>
@@ -3076,15 +2849,15 @@
         </p:spPr>
         <p:txBody>
           <a:bodyPr wrap="square" lIns="25400" tIns="25400" rIns="25400" bIns="25400" rtlCol="0" anchor="t">
-            <a:normAutofit/>
-          </a:bodyPr>
-          <a:lstStyle/>
-          <a:p>
-            <a:pPr algn="l" indent="0" marL="0">
-              <a:buNone/>
-            </a:pPr>
-            <a:r>
-              <a:rPr lang="en-US" sz="3450" b="1" spc="-69" kern="0" dirty="0">
+            <a:normAutofit lnSpcReduction="10000"/>
+          </a:bodyPr>
+          <a:lstStyle/>
+          <a:p>
+            <a:pPr marL="0" indent="0" algn="l">
+              <a:buNone/>
+            </a:pPr>
+            <a:r>
+              <a:rPr lang="en-US" sz="3450" b="1" kern="0" spc="-69" dirty="0">
                 <a:solidFill>
                   <a:srgbClr val="0F9D76"/>
                 </a:solidFill>
@@ -3121,7 +2894,7 @@
           </a:bodyPr>
           <a:lstStyle/>
           <a:p>
-            <a:pPr algn="l" indent="0" marL="0">
+            <a:pPr marL="0" indent="0" algn="l">
               <a:lnSpc>
                 <a:spcPct val="98864"/>
               </a:lnSpc>
@@ -3187,7 +2960,7 @@
           </a:bodyPr>
           <a:lstStyle/>
           <a:p>
-            <a:pPr algn="l" indent="0" marL="0">
+            <a:pPr marL="0" indent="0" algn="l">
               <a:buNone/>
             </a:pPr>
             <a:r>
@@ -3228,7 +3001,7 @@
           </a:bodyPr>
           <a:lstStyle/>
           <a:p>
-            <a:pPr algn="l" indent="0" marL="0">
+            <a:pPr marL="0" indent="0" algn="l">
               <a:lnSpc>
                 <a:spcPct val="104464"/>
               </a:lnSpc>
@@ -3294,7 +3067,7 @@
           </a:bodyPr>
           <a:lstStyle/>
           <a:p>
-            <a:pPr algn="l" indent="0" marL="0">
+            <a:pPr marL="0" indent="0" algn="l">
               <a:buNone/>
             </a:pPr>
             <a:r>
@@ -3335,7 +3108,7 @@
           </a:bodyPr>
           <a:lstStyle/>
           <a:p>
-            <a:pPr algn="l" indent="0" marL="0">
+            <a:pPr marL="0" indent="0" algn="l">
               <a:lnSpc>
                 <a:spcPct val="104464"/>
               </a:lnSpc>
@@ -3403,7 +3176,7 @@
           </a:bodyPr>
           <a:lstStyle/>
           <a:p>
-            <a:pPr algn="l" indent="0" marL="0">
+            <a:pPr marL="0" indent="0" algn="l">
               <a:buNone/>
             </a:pPr>
             <a:r>
@@ -3466,7 +3239,7 @@
           </a:bodyPr>
           <a:lstStyle/>
           <a:p>
-            <a:pPr algn="ctr" indent="0" marL="0">
+            <a:pPr marL="0" indent="0" algn="ctr">
               <a:buNone/>
             </a:pPr>
             <a:r>
@@ -3507,7 +3280,7 @@
           </a:bodyPr>
           <a:lstStyle/>
           <a:p>
-            <a:pPr algn="l" indent="0" marL="0">
+            <a:pPr marL="0" indent="0" algn="l">
               <a:lnSpc>
                 <a:spcPct val="104464"/>
               </a:lnSpc>
@@ -3573,7 +3346,7 @@
           </a:bodyPr>
           <a:lstStyle/>
           <a:p>
-            <a:pPr algn="ctr" indent="0" marL="0">
+            <a:pPr marL="0" indent="0" algn="ctr">
               <a:buNone/>
             </a:pPr>
             <a:r>
@@ -3614,7 +3387,7 @@
           </a:bodyPr>
           <a:lstStyle/>
           <a:p>
-            <a:pPr algn="l" indent="0" marL="0">
+            <a:pPr marL="0" indent="0" algn="l">
               <a:lnSpc>
                 <a:spcPct val="104464"/>
               </a:lnSpc>
@@ -3680,7 +3453,7 @@
           </a:bodyPr>
           <a:lstStyle/>
           <a:p>
-            <a:pPr algn="ctr" indent="0" marL="0">
+            <a:pPr marL="0" indent="0" algn="ctr">
               <a:buNone/>
             </a:pPr>
             <a:r>
@@ -3721,7 +3494,7 @@
           </a:bodyPr>
           <a:lstStyle/>
           <a:p>
-            <a:pPr algn="l" indent="0" marL="0">
+            <a:pPr marL="0" indent="0" algn="l">
               <a:lnSpc>
                 <a:spcPct val="104464"/>
               </a:lnSpc>
@@ -3758,6 +3531,7 @@
         <a:solidFill>
           <a:srgbClr val="FFFFFF"/>
         </a:solidFill>
+        <a:effectLst/>
       </p:bgPr>
     </p:bg>
     <p:spTree>
@@ -3839,7 +3613,7 @@
           </a:bodyPr>
           <a:lstStyle/>
           <a:p>
-            <a:pPr algn="l" indent="0" marL="0">
+            <a:pPr marL="0" indent="0" algn="l">
               <a:buNone/>
             </a:pPr>
             <a:r>
@@ -3880,7 +3654,7 @@
           </a:bodyPr>
           <a:lstStyle/>
           <a:p>
-            <a:pPr algn="l" indent="0" marL="0">
+            <a:pPr marL="0" indent="0" algn="l">
               <a:buNone/>
             </a:pPr>
             <a:r>
@@ -3921,7 +3695,7 @@
           </a:bodyPr>
           <a:lstStyle/>
           <a:p>
-            <a:pPr algn="l" indent="0" marL="0">
+            <a:pPr marL="0" indent="0" algn="l">
               <a:buNone/>
             </a:pPr>
             <a:r>
@@ -3941,17 +3715,17 @@
       </p:sp>
       <p:pic>
         <p:nvPicPr>
-          <p:cNvPr id="7" name="Image 0" descr="preencoded.png">    </p:cNvPr>
+          <p:cNvPr id="7" name="Image 0" descr="preencoded.png"/>
           <p:cNvPicPr>
             <a:picLocks noChangeAspect="1"/>
           </p:cNvPicPr>
           <p:nvPr/>
         </p:nvPicPr>
         <p:blipFill>
-          <a:blip r:embed="rId1">
+          <a:blip r:embed="rId3">
             <a:extLst>
               <a:ext uri="{96DAC541-7B7A-43D3-8B79-37D633B846F1}">
-                <asvg:svgBlip xmlns:asvg="http://schemas.microsoft.com/office/drawing/2016/SVG/main" r:embed="rId2"/>
+                <asvg:svgBlip xmlns:asvg="http://schemas.microsoft.com/office/drawing/2016/SVG/main" r:embed="rId4"/>
               </a:ext>
             </a:extLst>
           </a:blip>
@@ -3988,15 +3762,15 @@
         </p:spPr>
         <p:txBody>
           <a:bodyPr wrap="square" lIns="25400" tIns="25400" rIns="25400" bIns="25400" rtlCol="0" anchor="t">
-            <a:normAutofit/>
-          </a:bodyPr>
-          <a:lstStyle/>
-          <a:p>
-            <a:pPr algn="l" indent="0" marL="0">
-              <a:buNone/>
-            </a:pPr>
-            <a:r>
-              <a:rPr lang="en-US" sz="4500" b="1" spc="-90" kern="0" dirty="0">
+            <a:normAutofit lnSpcReduction="10000"/>
+          </a:bodyPr>
+          <a:lstStyle/>
+          <a:p>
+            <a:pPr marL="0" indent="0" algn="l">
+              <a:buNone/>
+            </a:pPr>
+            <a:r>
+              <a:rPr lang="en-US" sz="4500" b="1" kern="0" spc="-90" dirty="0">
                 <a:solidFill>
                   <a:srgbClr val="10151F"/>
                 </a:solidFill>
@@ -4033,7 +3807,7 @@
           </a:bodyPr>
           <a:lstStyle/>
           <a:p>
-            <a:pPr algn="l" indent="0" marL="0">
+            <a:pPr marL="0" indent="0" algn="l">
               <a:lnSpc>
                 <a:spcPct val="102857"/>
               </a:lnSpc>
@@ -4101,7 +3875,7 @@
           </a:bodyPr>
           <a:lstStyle/>
           <a:p>
-            <a:pPr algn="l" indent="0" marL="0">
+            <a:pPr marL="0" indent="0" algn="l">
               <a:buNone/>
             </a:pPr>
             <a:r>
@@ -4138,15 +3912,15 @@
         </p:spPr>
         <p:txBody>
           <a:bodyPr wrap="square" lIns="25400" tIns="25400" rIns="25400" bIns="25400" rtlCol="0" anchor="t">
-            <a:normAutofit/>
-          </a:bodyPr>
-          <a:lstStyle/>
-          <a:p>
-            <a:pPr algn="l" indent="0" marL="0">
-              <a:buNone/>
-            </a:pPr>
-            <a:r>
-              <a:rPr lang="en-US" sz="2850" b="1" spc="-57" kern="0" dirty="0">
+            <a:normAutofit lnSpcReduction="10000"/>
+          </a:bodyPr>
+          <a:lstStyle/>
+          <a:p>
+            <a:pPr marL="0" indent="0" algn="l">
+              <a:buNone/>
+            </a:pPr>
+            <a:r>
+              <a:rPr lang="en-US" sz="2850" b="1" kern="0" spc="-57" dirty="0">
                 <a:solidFill>
                   <a:srgbClr val="10151F"/>
                 </a:solidFill>
@@ -4183,7 +3957,7 @@
           </a:bodyPr>
           <a:lstStyle/>
           <a:p>
-            <a:pPr algn="l" indent="0" marL="0">
+            <a:pPr marL="0" indent="0" algn="l">
               <a:lnSpc>
                 <a:spcPct val="102273"/>
               </a:lnSpc>
@@ -4251,7 +4025,7 @@
           </a:bodyPr>
           <a:lstStyle/>
           <a:p>
-            <a:pPr algn="l" indent="0" marL="0">
+            <a:pPr marL="0" indent="0" algn="l">
               <a:buNone/>
             </a:pPr>
             <a:r>
@@ -4288,15 +4062,15 @@
         </p:spPr>
         <p:txBody>
           <a:bodyPr wrap="square" lIns="25400" tIns="25400" rIns="25400" bIns="25400" rtlCol="0" anchor="t">
-            <a:normAutofit/>
-          </a:bodyPr>
-          <a:lstStyle/>
-          <a:p>
-            <a:pPr algn="l" indent="0" marL="0">
-              <a:buNone/>
-            </a:pPr>
-            <a:r>
-              <a:rPr lang="en-US" sz="2850" b="1" spc="-57" kern="0" dirty="0">
+            <a:normAutofit lnSpcReduction="10000"/>
+          </a:bodyPr>
+          <a:lstStyle/>
+          <a:p>
+            <a:pPr marL="0" indent="0" algn="l">
+              <a:buNone/>
+            </a:pPr>
+            <a:r>
+              <a:rPr lang="en-US" sz="2850" b="1" kern="0" spc="-57" dirty="0">
                 <a:solidFill>
                   <a:srgbClr val="1D3A8F"/>
                 </a:solidFill>
@@ -4333,7 +4107,7 @@
           </a:bodyPr>
           <a:lstStyle/>
           <a:p>
-            <a:pPr algn="l" indent="0" marL="0">
+            <a:pPr marL="0" indent="0" algn="l">
               <a:lnSpc>
                 <a:spcPct val="102273"/>
               </a:lnSpc>
@@ -4401,7 +4175,7 @@
           </a:bodyPr>
           <a:lstStyle/>
           <a:p>
-            <a:pPr algn="l" indent="0" marL="0">
+            <a:pPr marL="0" indent="0" algn="l">
               <a:buNone/>
             </a:pPr>
             <a:r>
@@ -4438,15 +4212,15 @@
         </p:spPr>
         <p:txBody>
           <a:bodyPr wrap="square" lIns="25400" tIns="25400" rIns="25400" bIns="25400" rtlCol="0" anchor="t">
-            <a:normAutofit/>
-          </a:bodyPr>
-          <a:lstStyle/>
-          <a:p>
-            <a:pPr algn="l" indent="0" marL="0">
-              <a:buNone/>
-            </a:pPr>
-            <a:r>
-              <a:rPr lang="en-US" sz="2850" b="1" spc="-57" kern="0" dirty="0">
+            <a:normAutofit lnSpcReduction="10000"/>
+          </a:bodyPr>
+          <a:lstStyle/>
+          <a:p>
+            <a:pPr marL="0" indent="0" algn="l">
+              <a:buNone/>
+            </a:pPr>
+            <a:r>
+              <a:rPr lang="en-US" sz="2850" b="1" kern="0" spc="-57" dirty="0">
                 <a:solidFill>
                   <a:srgbClr val="0F9D76"/>
                 </a:solidFill>
@@ -4483,7 +4257,7 @@
           </a:bodyPr>
           <a:lstStyle/>
           <a:p>
-            <a:pPr algn="l" indent="0" marL="0">
+            <a:pPr marL="0" indent="0" algn="l">
               <a:lnSpc>
                 <a:spcPct val="102273"/>
               </a:lnSpc>
@@ -4551,7 +4325,7 @@
           </a:bodyPr>
           <a:lstStyle/>
           <a:p>
-            <a:pPr algn="l" indent="0" marL="0">
+            <a:pPr marL="0" indent="0" algn="l">
               <a:buNone/>
             </a:pPr>
             <a:r>
@@ -4588,15 +4362,15 @@
         </p:spPr>
         <p:txBody>
           <a:bodyPr wrap="square" lIns="25400" tIns="25400" rIns="25400" bIns="25400" rtlCol="0" anchor="t">
-            <a:normAutofit/>
-          </a:bodyPr>
-          <a:lstStyle/>
-          <a:p>
-            <a:pPr algn="l" indent="0" marL="0">
-              <a:buNone/>
-            </a:pPr>
-            <a:r>
-              <a:rPr lang="en-US" sz="2850" b="1" spc="-57" kern="0" dirty="0">
+            <a:normAutofit lnSpcReduction="10000"/>
+          </a:bodyPr>
+          <a:lstStyle/>
+          <a:p>
+            <a:pPr marL="0" indent="0" algn="l">
+              <a:buNone/>
+            </a:pPr>
+            <a:r>
+              <a:rPr lang="en-US" sz="2850" b="1" kern="0" spc="-57" dirty="0">
                 <a:solidFill>
                   <a:srgbClr val="10151F"/>
                 </a:solidFill>
@@ -4633,7 +4407,7 @@
           </a:bodyPr>
           <a:lstStyle/>
           <a:p>
-            <a:pPr algn="l" indent="0" marL="0">
+            <a:pPr marL="0" indent="0" algn="l">
               <a:lnSpc>
                 <a:spcPct val="102273"/>
               </a:lnSpc>
@@ -4699,7 +4473,7 @@
           </a:bodyPr>
           <a:lstStyle/>
           <a:p>
-            <a:pPr algn="l" indent="0" marL="0">
+            <a:pPr marL="0" indent="0" algn="l">
               <a:buNone/>
             </a:pPr>
             <a:r>
@@ -4740,7 +4514,7 @@
           </a:bodyPr>
           <a:lstStyle/>
           <a:p>
-            <a:pPr algn="l" indent="0" marL="0">
+            <a:pPr marL="0" indent="0" algn="l">
               <a:lnSpc>
                 <a:spcPct val="104464"/>
               </a:lnSpc>
@@ -4784,7 +4558,7 @@
           </a:bodyPr>
           <a:lstStyle/>
           <a:p>
-            <a:pPr algn="l" indent="0" marL="0">
+            <a:pPr marL="0" indent="0" algn="l">
               <a:lnSpc>
                 <a:spcPct val="104464"/>
               </a:lnSpc>
@@ -4850,7 +4624,7 @@
           </a:bodyPr>
           <a:lstStyle/>
           <a:p>
-            <a:pPr algn="l" indent="0" marL="0">
+            <a:pPr marL="0" indent="0" algn="l">
               <a:buNone/>
             </a:pPr>
             <a:r>
@@ -4891,7 +4665,7 @@
           </a:bodyPr>
           <a:lstStyle/>
           <a:p>
-            <a:pPr algn="l" indent="0" marL="0">
+            <a:pPr marL="0" indent="0" algn="l">
               <a:lnSpc>
                 <a:spcPct val="104464"/>
               </a:lnSpc>
@@ -4935,7 +4709,7 @@
           </a:bodyPr>
           <a:lstStyle/>
           <a:p>
-            <a:pPr algn="l" indent="0" marL="0">
+            <a:pPr marL="0" indent="0" algn="l">
               <a:lnSpc>
                 <a:spcPct val="104464"/>
               </a:lnSpc>
@@ -4972,6 +4746,7 @@
         <a:solidFill>
           <a:srgbClr val="FFFFFF"/>
         </a:solidFill>
+        <a:effectLst/>
       </p:bgPr>
     </p:bg>
     <p:spTree>
@@ -5053,7 +4828,7 @@
           </a:bodyPr>
           <a:lstStyle/>
           <a:p>
-            <a:pPr algn="l" indent="0" marL="0">
+            <a:pPr marL="0" indent="0" algn="l">
               <a:buNone/>
             </a:pPr>
             <a:r>
@@ -5094,7 +4869,7 @@
           </a:bodyPr>
           <a:lstStyle/>
           <a:p>
-            <a:pPr algn="l" indent="0" marL="0">
+            <a:pPr marL="0" indent="0" algn="l">
               <a:buNone/>
             </a:pPr>
             <a:r>
@@ -5135,7 +4910,7 @@
           </a:bodyPr>
           <a:lstStyle/>
           <a:p>
-            <a:pPr algn="l" indent="0" marL="0">
+            <a:pPr marL="0" indent="0" algn="l">
               <a:buNone/>
             </a:pPr>
             <a:r>
@@ -5155,17 +4930,17 @@
       </p:sp>
       <p:pic>
         <p:nvPicPr>
-          <p:cNvPr id="7" name="Image 0" descr="preencoded.png">    </p:cNvPr>
+          <p:cNvPr id="7" name="Image 0" descr="preencoded.png"/>
           <p:cNvPicPr>
             <a:picLocks noChangeAspect="1"/>
           </p:cNvPicPr>
           <p:nvPr/>
         </p:nvPicPr>
         <p:blipFill>
-          <a:blip r:embed="rId1">
+          <a:blip r:embed="rId3">
             <a:extLst>
               <a:ext uri="{96DAC541-7B7A-43D3-8B79-37D633B846F1}">
-                <asvg:svgBlip xmlns:asvg="http://schemas.microsoft.com/office/drawing/2016/SVG/main" r:embed="rId2"/>
+                <asvg:svgBlip xmlns:asvg="http://schemas.microsoft.com/office/drawing/2016/SVG/main" r:embed="rId4"/>
               </a:ext>
             </a:extLst>
           </a:blip>
@@ -5202,15 +4977,15 @@
         </p:spPr>
         <p:txBody>
           <a:bodyPr wrap="square" lIns="25400" tIns="25400" rIns="25400" bIns="25400" rtlCol="0" anchor="t">
-            <a:normAutofit/>
-          </a:bodyPr>
-          <a:lstStyle/>
-          <a:p>
-            <a:pPr algn="l" indent="0" marL="0">
-              <a:buNone/>
-            </a:pPr>
-            <a:r>
-              <a:rPr lang="en-US" sz="4500" b="1" spc="-90" kern="0" dirty="0">
+            <a:normAutofit lnSpcReduction="10000"/>
+          </a:bodyPr>
+          <a:lstStyle/>
+          <a:p>
+            <a:pPr marL="0" indent="0" algn="l">
+              <a:buNone/>
+            </a:pPr>
+            <a:r>
+              <a:rPr lang="en-US" sz="4500" b="1" kern="0" spc="-90" dirty="0">
                 <a:solidFill>
                   <a:srgbClr val="10151F"/>
                 </a:solidFill>
@@ -5247,7 +5022,7 @@
           </a:bodyPr>
           <a:lstStyle/>
           <a:p>
-            <a:pPr algn="l" indent="0" marL="0">
+            <a:pPr marL="0" indent="0" algn="l">
               <a:lnSpc>
                 <a:spcPct val="102857"/>
               </a:lnSpc>
@@ -5311,7 +5086,7 @@
           </a:bodyPr>
           <a:lstStyle/>
           <a:p>
-            <a:pPr algn="l" indent="0" marL="0">
+            <a:pPr marL="0" indent="0" algn="l">
               <a:buNone/>
             </a:pPr>
             <a:r>
@@ -5352,7 +5127,7 @@
           </a:bodyPr>
           <a:lstStyle/>
           <a:p>
-            <a:pPr algn="l" indent="0" marL="0">
+            <a:pPr marL="0" indent="0" algn="l">
               <a:lnSpc>
                 <a:spcPct val="99836"/>
               </a:lnSpc>
@@ -5416,7 +5191,7 @@
           </a:bodyPr>
           <a:lstStyle/>
           <a:p>
-            <a:pPr algn="l" indent="0" marL="0">
+            <a:pPr marL="0" indent="0" algn="l">
               <a:buNone/>
             </a:pPr>
             <a:r>
@@ -5457,7 +5232,7 @@
           </a:bodyPr>
           <a:lstStyle/>
           <a:p>
-            <a:pPr algn="l" indent="0" marL="0">
+            <a:pPr marL="0" indent="0" algn="l">
               <a:lnSpc>
                 <a:spcPct val="99836"/>
               </a:lnSpc>
@@ -5521,7 +5296,7 @@
           </a:bodyPr>
           <a:lstStyle/>
           <a:p>
-            <a:pPr algn="l" indent="0" marL="0">
+            <a:pPr marL="0" indent="0" algn="l">
               <a:buNone/>
             </a:pPr>
             <a:r>
@@ -5562,7 +5337,7 @@
           </a:bodyPr>
           <a:lstStyle/>
           <a:p>
-            <a:pPr algn="l" indent="0" marL="0">
+            <a:pPr marL="0" indent="0" algn="l">
               <a:lnSpc>
                 <a:spcPct val="99836"/>
               </a:lnSpc>
@@ -5626,7 +5401,7 @@
           </a:bodyPr>
           <a:lstStyle/>
           <a:p>
-            <a:pPr algn="l" indent="0" marL="0">
+            <a:pPr marL="0" indent="0" algn="l">
               <a:buNone/>
             </a:pPr>
             <a:r>
@@ -5667,7 +5442,7 @@
           </a:bodyPr>
           <a:lstStyle/>
           <a:p>
-            <a:pPr algn="l" indent="0" marL="0">
+            <a:pPr marL="0" indent="0" algn="l">
               <a:lnSpc>
                 <a:spcPct val="99836"/>
               </a:lnSpc>
@@ -5731,7 +5506,7 @@
           </a:bodyPr>
           <a:lstStyle/>
           <a:p>
-            <a:pPr algn="l" indent="0" marL="0">
+            <a:pPr marL="0" indent="0" algn="l">
               <a:buNone/>
             </a:pPr>
             <a:r>
@@ -5772,7 +5547,7 @@
           </a:bodyPr>
           <a:lstStyle/>
           <a:p>
-            <a:pPr algn="l" indent="0" marL="0">
+            <a:pPr marL="0" indent="0" algn="l">
               <a:lnSpc>
                 <a:spcPct val="99836"/>
               </a:lnSpc>
@@ -5836,7 +5611,7 @@
           </a:bodyPr>
           <a:lstStyle/>
           <a:p>
-            <a:pPr algn="l" indent="0" marL="0">
+            <a:pPr marL="0" indent="0" algn="l">
               <a:buNone/>
             </a:pPr>
             <a:r>
@@ -5877,7 +5652,7 @@
           </a:bodyPr>
           <a:lstStyle/>
           <a:p>
-            <a:pPr algn="l" indent="0" marL="0">
+            <a:pPr marL="0" indent="0" algn="l">
               <a:lnSpc>
                 <a:spcPct val="99836"/>
               </a:lnSpc>
@@ -5961,7 +5736,7 @@
           </a:bodyPr>
           <a:lstStyle/>
           <a:p>
-            <a:pPr algn="l" indent="0" marL="0">
+            <a:pPr marL="0" indent="0" algn="l">
               <a:buNone/>
             </a:pPr>
             <a:r>
@@ -6002,7 +5777,7 @@
           </a:bodyPr>
           <a:lstStyle/>
           <a:p>
-            <a:pPr algn="l" indent="0" marL="0">
+            <a:pPr marL="0" indent="0" algn="l">
               <a:lnSpc>
                 <a:spcPct val="99836"/>
               </a:lnSpc>
@@ -6039,6 +5814,7 @@
         <a:solidFill>
           <a:srgbClr val="FFFFFF"/>
         </a:solidFill>
+        <a:effectLst/>
       </p:bgPr>
     </p:bg>
     <p:spTree>
@@ -6120,7 +5896,7 @@
           </a:bodyPr>
           <a:lstStyle/>
           <a:p>
-            <a:pPr algn="l" indent="0" marL="0">
+            <a:pPr marL="0" indent="0" algn="l">
               <a:buNone/>
             </a:pPr>
             <a:r>
@@ -6161,7 +5937,7 @@
           </a:bodyPr>
           <a:lstStyle/>
           <a:p>
-            <a:pPr algn="l" indent="0" marL="0">
+            <a:pPr marL="0" indent="0" algn="l">
               <a:buNone/>
             </a:pPr>
             <a:r>
@@ -6202,7 +5978,7 @@
           </a:bodyPr>
           <a:lstStyle/>
           <a:p>
-            <a:pPr algn="l" indent="0" marL="0">
+            <a:pPr marL="0" indent="0" algn="l">
               <a:buNone/>
             </a:pPr>
             <a:r>
@@ -6222,17 +5998,17 @@
       </p:sp>
       <p:pic>
         <p:nvPicPr>
-          <p:cNvPr id="7" name="Image 0" descr="preencoded.png">    </p:cNvPr>
+          <p:cNvPr id="7" name="Image 0" descr="preencoded.png"/>
           <p:cNvPicPr>
             <a:picLocks noChangeAspect="1"/>
           </p:cNvPicPr>
           <p:nvPr/>
         </p:nvPicPr>
         <p:blipFill>
-          <a:blip r:embed="rId1">
+          <a:blip r:embed="rId3">
             <a:extLst>
               <a:ext uri="{96DAC541-7B7A-43D3-8B79-37D633B846F1}">
-                <asvg:svgBlip xmlns:asvg="http://schemas.microsoft.com/office/drawing/2016/SVG/main" r:embed="rId2"/>
+                <asvg:svgBlip xmlns:asvg="http://schemas.microsoft.com/office/drawing/2016/SVG/main" r:embed="rId4"/>
               </a:ext>
             </a:extLst>
           </a:blip>
@@ -6269,15 +6045,15 @@
         </p:spPr>
         <p:txBody>
           <a:bodyPr wrap="square" lIns="25400" tIns="25400" rIns="25400" bIns="25400" rtlCol="0" anchor="t">
-            <a:normAutofit/>
-          </a:bodyPr>
-          <a:lstStyle/>
-          <a:p>
-            <a:pPr algn="l" indent="0" marL="0">
-              <a:buNone/>
-            </a:pPr>
-            <a:r>
-              <a:rPr lang="en-US" sz="4200" b="1" spc="-84" kern="0" dirty="0">
+            <a:normAutofit lnSpcReduction="10000"/>
+          </a:bodyPr>
+          <a:lstStyle/>
+          <a:p>
+            <a:pPr marL="0" indent="0" algn="l">
+              <a:buNone/>
+            </a:pPr>
+            <a:r>
+              <a:rPr lang="en-US" sz="4200" b="1" kern="0" spc="-84" dirty="0">
                 <a:solidFill>
                   <a:srgbClr val="10151F"/>
                 </a:solidFill>
@@ -6314,7 +6090,7 @@
           </a:bodyPr>
           <a:lstStyle/>
           <a:p>
-            <a:pPr algn="l" indent="0" marL="0">
+            <a:pPr marL="0" indent="0" algn="l">
               <a:lnSpc>
                 <a:spcPct val="103846"/>
               </a:lnSpc>
@@ -6380,7 +6156,7 @@
           </a:bodyPr>
           <a:lstStyle/>
           <a:p>
-            <a:pPr algn="ctr" indent="0" marL="0">
+            <a:pPr marL="0" indent="0" algn="ctr">
               <a:buNone/>
             </a:pPr>
             <a:r>
@@ -6421,7 +6197,7 @@
           </a:bodyPr>
           <a:lstStyle/>
           <a:p>
-            <a:pPr algn="l" indent="0" marL="0">
+            <a:pPr marL="0" indent="0" algn="l">
               <a:lnSpc>
                 <a:spcPct val="102966"/>
               </a:lnSpc>
@@ -6487,7 +6263,7 @@
           </a:bodyPr>
           <a:lstStyle/>
           <a:p>
-            <a:pPr algn="ctr" indent="0" marL="0">
+            <a:pPr marL="0" indent="0" algn="ctr">
               <a:buNone/>
             </a:pPr>
             <a:r>
@@ -6528,7 +6304,7 @@
           </a:bodyPr>
           <a:lstStyle/>
           <a:p>
-            <a:pPr algn="l" indent="0" marL="0">
+            <a:pPr marL="0" indent="0" algn="l">
               <a:lnSpc>
                 <a:spcPct val="102966"/>
               </a:lnSpc>
@@ -6594,7 +6370,7 @@
           </a:bodyPr>
           <a:lstStyle/>
           <a:p>
-            <a:pPr algn="ctr" indent="0" marL="0">
+            <a:pPr marL="0" indent="0" algn="ctr">
               <a:buNone/>
             </a:pPr>
             <a:r>
@@ -6635,7 +6411,7 @@
           </a:bodyPr>
           <a:lstStyle/>
           <a:p>
-            <a:pPr algn="l" indent="0" marL="0">
+            <a:pPr marL="0" indent="0" algn="l">
               <a:lnSpc>
                 <a:spcPct val="102966"/>
               </a:lnSpc>
@@ -6679,7 +6455,7 @@
           </a:bodyPr>
           <a:lstStyle/>
           <a:p>
-            <a:pPr algn="l" indent="0" marL="0">
+            <a:pPr marL="0" indent="0" algn="l">
               <a:lnSpc>
                 <a:spcPct val="104464"/>
               </a:lnSpc>
@@ -6724,15 +6500,15 @@
       </p:sp>
       <p:pic>
         <p:nvPicPr>
-          <p:cNvPr id="21" name="Image 1" descr="preencoded.png">    </p:cNvPr>
+          <p:cNvPr id="21" name="Image 1" descr="preencoded.png"/>
           <p:cNvPicPr>
             <a:picLocks noChangeAspect="1"/>
           </p:cNvPicPr>
           <p:nvPr/>
         </p:nvPicPr>
         <p:blipFill>
-          <a:blip r:embed="rId3"/>
-          <a:srcRect l="0" r="0" t="-21037" b="-21037"/>
+          <a:blip r:embed="rId5"/>
+          <a:srcRect t="-21037" b="-21037"/>
           <a:stretch/>
         </p:blipFill>
         <p:spPr>
@@ -6761,6 +6537,7 @@
         <a:solidFill>
           <a:srgbClr val="FFFFFF"/>
         </a:solidFill>
+        <a:effectLst/>
       </p:bgPr>
     </p:bg>
     <p:spTree>
@@ -6842,7 +6619,7 @@
           </a:bodyPr>
           <a:lstStyle/>
           <a:p>
-            <a:pPr algn="l" indent="0" marL="0">
+            <a:pPr marL="0" indent="0" algn="l">
               <a:buNone/>
             </a:pPr>
             <a:r>
@@ -6883,7 +6660,7 @@
           </a:bodyPr>
           <a:lstStyle/>
           <a:p>
-            <a:pPr algn="l" indent="0" marL="0">
+            <a:pPr marL="0" indent="0" algn="l">
               <a:buNone/>
             </a:pPr>
             <a:r>
@@ -6924,7 +6701,7 @@
           </a:bodyPr>
           <a:lstStyle/>
           <a:p>
-            <a:pPr algn="l" indent="0" marL="0">
+            <a:pPr marL="0" indent="0" algn="l">
               <a:buNone/>
             </a:pPr>
             <a:r>
@@ -6944,17 +6721,17 @@
       </p:sp>
       <p:pic>
         <p:nvPicPr>
-          <p:cNvPr id="7" name="Image 0" descr="preencoded.png">    </p:cNvPr>
+          <p:cNvPr id="7" name="Image 0" descr="preencoded.png"/>
           <p:cNvPicPr>
             <a:picLocks noChangeAspect="1"/>
           </p:cNvPicPr>
           <p:nvPr/>
         </p:nvPicPr>
         <p:blipFill>
-          <a:blip r:embed="rId1">
+          <a:blip r:embed="rId3">
             <a:extLst>
               <a:ext uri="{96DAC541-7B7A-43D3-8B79-37D633B846F1}">
-                <asvg:svgBlip xmlns:asvg="http://schemas.microsoft.com/office/drawing/2016/SVG/main" r:embed="rId2"/>
+                <asvg:svgBlip xmlns:asvg="http://schemas.microsoft.com/office/drawing/2016/SVG/main" r:embed="rId4"/>
               </a:ext>
             </a:extLst>
           </a:blip>
@@ -6991,15 +6768,15 @@
         </p:spPr>
         <p:txBody>
           <a:bodyPr wrap="square" lIns="25400" tIns="25400" rIns="25400" bIns="25400" rtlCol="0" anchor="t">
-            <a:normAutofit/>
-          </a:bodyPr>
-          <a:lstStyle/>
-          <a:p>
-            <a:pPr algn="l" indent="0" marL="0">
-              <a:buNone/>
-            </a:pPr>
-            <a:r>
-              <a:rPr lang="en-US" sz="4200" b="1" spc="-84" kern="0" dirty="0">
+            <a:normAutofit lnSpcReduction="10000"/>
+          </a:bodyPr>
+          <a:lstStyle/>
+          <a:p>
+            <a:pPr marL="0" indent="0" algn="l">
+              <a:buNone/>
+            </a:pPr>
+            <a:r>
+              <a:rPr lang="en-US" sz="4200" b="1" kern="0" spc="-84" dirty="0">
                 <a:solidFill>
                   <a:srgbClr val="10151F"/>
                 </a:solidFill>
@@ -7036,7 +6813,7 @@
           </a:bodyPr>
           <a:lstStyle/>
           <a:p>
-            <a:pPr algn="l" indent="0" marL="0">
+            <a:pPr marL="0" indent="0" algn="l">
               <a:lnSpc>
                 <a:spcPct val="103846"/>
               </a:lnSpc>
@@ -7081,15 +6858,15 @@
       </p:sp>
       <p:pic>
         <p:nvPicPr>
-          <p:cNvPr id="11" name="Image 1" descr="preencoded.png">    </p:cNvPr>
+          <p:cNvPr id="11" name="Image 1"/>
           <p:cNvPicPr>
             <a:picLocks noChangeAspect="1"/>
           </p:cNvPicPr>
           <p:nvPr/>
         </p:nvPicPr>
         <p:blipFill>
-          <a:blip r:embed="rId3"/>
-          <a:srcRect l="0" r="0" t="-6699" b="-6699"/>
+          <a:blip r:embed="rId5"/>
+          <a:srcRect l="3049" r="3049"/>
           <a:stretch/>
         </p:blipFill>
         <p:spPr>
@@ -7124,161 +6901,209 @@
           <a:ln/>
         </p:spPr>
       </p:sp>
+      <p:sp>
+        <p:nvSpPr>
+          <p:cNvPr id="14" name="Text 9"/>
+          <p:cNvSpPr/>
+          <p:nvPr/>
+        </p:nvSpPr>
+        <p:spPr>
+          <a:xfrm>
+            <a:off x="11071821" y="7791450"/>
+            <a:ext cx="6451590" cy="809625"/>
+          </a:xfrm>
+          <a:prstGeom prst="rect">
+            <a:avLst/>
+          </a:prstGeom>
+          <a:noFill/>
+          <a:ln/>
+        </p:spPr>
+        <p:txBody>
+          <a:bodyPr wrap="square" lIns="25400" tIns="25400" rIns="25400" bIns="25400" rtlCol="0" anchor="t">
+            <a:normAutofit/>
+          </a:bodyPr>
+          <a:lstStyle/>
+          <a:p>
+            <a:pPr marL="0" indent="0" algn="l">
+              <a:lnSpc>
+                <a:spcPct val="102966"/>
+              </a:lnSpc>
+              <a:buNone/>
+            </a:pPr>
+            <a:r>
+              <a:rPr lang="en-US" sz="2025" dirty="0">
+                <a:solidFill>
+                  <a:srgbClr val="3D4757"/>
+                </a:solidFill>
+                <a:latin typeface="Noto Sans KR" pitchFamily="34" charset="0"/>
+                <a:ea typeface="Noto Sans KR" pitchFamily="34" charset="-122"/>
+                <a:cs typeface="Noto Sans KR" pitchFamily="34" charset="-120"/>
+              </a:rPr>
+              <a:t>게이지 하단 "법령 근거 기반 추정" 배지로 수치의 </a:t>
+            </a:r>
+            <a:r>
+              <a:rPr lang="en-US" sz="2025" dirty="0" err="1">
+                <a:solidFill>
+                  <a:srgbClr val="3D4757"/>
+                </a:solidFill>
+                <a:latin typeface="Noto Sans KR" pitchFamily="34" charset="0"/>
+                <a:ea typeface="Noto Sans KR" pitchFamily="34" charset="-122"/>
+                <a:cs typeface="Noto Sans KR" pitchFamily="34" charset="-120"/>
+              </a:rPr>
+              <a:t>출처를</a:t>
+            </a:r>
+            <a:r>
+              <a:rPr lang="en-US" sz="2025" dirty="0">
+                <a:solidFill>
+                  <a:srgbClr val="3D4757"/>
+                </a:solidFill>
+                <a:latin typeface="Noto Sans KR" pitchFamily="34" charset="0"/>
+                <a:ea typeface="Noto Sans KR" pitchFamily="34" charset="-122"/>
+                <a:cs typeface="Noto Sans KR" pitchFamily="34" charset="-120"/>
+              </a:rPr>
+              <a:t> </a:t>
+            </a:r>
+          </a:p>
+          <a:p>
+            <a:pPr marL="0" indent="0" algn="l">
+              <a:lnSpc>
+                <a:spcPct val="102966"/>
+              </a:lnSpc>
+              <a:buNone/>
+            </a:pPr>
+            <a:r>
+              <a:rPr lang="en-US" sz="2025" dirty="0" err="1">
+                <a:solidFill>
+                  <a:srgbClr val="3D4757"/>
+                </a:solidFill>
+                <a:latin typeface="Noto Sans KR" pitchFamily="34" charset="0"/>
+                <a:ea typeface="Noto Sans KR" pitchFamily="34" charset="-122"/>
+                <a:cs typeface="Noto Sans KR" pitchFamily="34" charset="-120"/>
+              </a:rPr>
+              <a:t>명시</a:t>
+            </a:r>
+            <a:endParaRPr lang="en-US" sz="2025" dirty="0"/>
+          </a:p>
+        </p:txBody>
+      </p:sp>
+      <p:sp>
+        <p:nvSpPr>
+          <p:cNvPr id="15" name="Text 10"/>
+          <p:cNvSpPr/>
+          <p:nvPr/>
+        </p:nvSpPr>
+        <p:spPr>
+          <a:xfrm>
+            <a:off x="11071821" y="8696325"/>
+            <a:ext cx="6890048" cy="423863"/>
+          </a:xfrm>
+          <a:prstGeom prst="rect">
+            <a:avLst/>
+          </a:prstGeom>
+          <a:noFill/>
+          <a:ln/>
+        </p:spPr>
+        <p:txBody>
+          <a:bodyPr wrap="square" lIns="25400" tIns="25400" rIns="25400" bIns="25400" rtlCol="0" anchor="t">
+            <a:normAutofit/>
+          </a:bodyPr>
+          <a:lstStyle/>
+          <a:p>
+            <a:pPr marL="0" indent="0" algn="l">
+              <a:lnSpc>
+                <a:spcPct val="102966"/>
+              </a:lnSpc>
+              <a:buNone/>
+            </a:pPr>
+            <a:r>
+              <a:rPr lang="en-US" sz="2025" dirty="0">
+                <a:solidFill>
+                  <a:srgbClr val="3D4757"/>
+                </a:solidFill>
+                <a:latin typeface="Noto Sans KR" pitchFamily="34" charset="0"/>
+                <a:ea typeface="Noto Sans KR" pitchFamily="34" charset="-122"/>
+                <a:cs typeface="Noto Sans KR" pitchFamily="34" charset="-120"/>
+              </a:rPr>
+              <a:t>인용 조항은 원문 요약과 산정식을 함께 펼쳐 확인 가능</a:t>
+            </a:r>
+            <a:endParaRPr lang="en-US" sz="2025" dirty="0"/>
+          </a:p>
+        </p:txBody>
+      </p:sp>
+      <p:sp>
+        <p:nvSpPr>
+          <p:cNvPr id="16" name="Text 11"/>
+          <p:cNvSpPr/>
+          <p:nvPr/>
+        </p:nvSpPr>
+        <p:spPr>
+          <a:xfrm>
+            <a:off x="11071821" y="9215438"/>
+            <a:ext cx="6890048" cy="423863"/>
+          </a:xfrm>
+          <a:prstGeom prst="rect">
+            <a:avLst/>
+          </a:prstGeom>
+          <a:noFill/>
+          <a:ln/>
+        </p:spPr>
+        <p:txBody>
+          <a:bodyPr wrap="square" lIns="25400" tIns="25400" rIns="25400" bIns="25400" rtlCol="0" anchor="t">
+            <a:normAutofit/>
+          </a:bodyPr>
+          <a:lstStyle/>
+          <a:p>
+            <a:pPr marL="0" indent="0" algn="l">
+              <a:lnSpc>
+                <a:spcPct val="102966"/>
+              </a:lnSpc>
+              <a:buNone/>
+            </a:pPr>
+            <a:r>
+              <a:rPr lang="en-US" sz="2025" dirty="0">
+                <a:solidFill>
+                  <a:srgbClr val="3D4757"/>
+                </a:solidFill>
+                <a:latin typeface="Noto Sans KR" pitchFamily="34" charset="0"/>
+                <a:ea typeface="Noto Sans KR" pitchFamily="34" charset="-122"/>
+                <a:cs typeface="Noto Sans KR" pitchFamily="34" charset="-120"/>
+              </a:rPr>
+              <a:t>내용증명 초안은 모달에서 클립보드 복사로 바로 사용</a:t>
+            </a:r>
+            <a:endParaRPr lang="en-US" sz="2025" dirty="0"/>
+          </a:p>
+        </p:txBody>
+      </p:sp>
       <p:pic>
         <p:nvPicPr>
-          <p:cNvPr id="13" name="Image 2" descr="preencoded.png">    </p:cNvPr>
+          <p:cNvPr id="18" name="그림 17">
+            <a:extLst>
+              <a:ext uri="{FF2B5EF4-FFF2-40B4-BE49-F238E27FC236}">
+                <a16:creationId xmlns:a16="http://schemas.microsoft.com/office/drawing/2014/main" id="{972DC8E0-0D7A-13BB-C8D5-17EEB1C256A9}"/>
+              </a:ext>
+            </a:extLst>
+          </p:cNvPr>
           <p:cNvPicPr>
             <a:picLocks noChangeAspect="1"/>
           </p:cNvPicPr>
           <p:nvPr/>
         </p:nvPicPr>
         <p:blipFill>
-          <a:blip r:embed="rId4"/>
-          <a:srcRect l="0" r="0" t="-9840" b="-9840"/>
-          <a:stretch/>
+          <a:blip r:embed="rId6"/>
+          <a:stretch>
+            <a:fillRect/>
+          </a:stretch>
         </p:blipFill>
         <p:spPr>
           <a:xfrm>
-            <a:off x="11281371" y="3317875"/>
-            <a:ext cx="5844580" cy="4035425"/>
+            <a:off x="11071821" y="3336925"/>
+            <a:ext cx="5959356" cy="4225925"/>
           </a:xfrm>
           <a:prstGeom prst="rect">
             <a:avLst/>
           </a:prstGeom>
         </p:spPr>
       </p:pic>
-      <p:sp>
-        <p:nvSpPr>
-          <p:cNvPr id="14" name="Text 9"/>
-          <p:cNvSpPr/>
-          <p:nvPr/>
-        </p:nvSpPr>
-        <p:spPr>
-          <a:xfrm>
-            <a:off x="11071821" y="7791450"/>
-            <a:ext cx="6451590" cy="809625"/>
-          </a:xfrm>
-          <a:prstGeom prst="rect">
-            <a:avLst/>
-          </a:prstGeom>
-          <a:noFill/>
-          <a:ln/>
-        </p:spPr>
-        <p:txBody>
-          <a:bodyPr wrap="square" lIns="25400" tIns="25400" rIns="25400" bIns="25400" rtlCol="0" anchor="t">
-            <a:normAutofit/>
-          </a:bodyPr>
-          <a:lstStyle/>
-          <a:p>
-            <a:pPr algn="l" indent="0" marL="0">
-              <a:lnSpc>
-                <a:spcPct val="102966"/>
-              </a:lnSpc>
-              <a:buNone/>
-            </a:pPr>
-            <a:r>
-              <a:rPr lang="en-US" sz="2025" dirty="0">
-                <a:solidFill>
-                  <a:srgbClr val="3D4757"/>
-                </a:solidFill>
-                <a:latin typeface="Noto Sans KR" pitchFamily="34" charset="0"/>
-                <a:ea typeface="Noto Sans KR" pitchFamily="34" charset="-122"/>
-                <a:cs typeface="Noto Sans KR" pitchFamily="34" charset="-120"/>
-              </a:rPr>
-              <a:t>게이지 하단 "법령 근거 기반 추정" 배지로 수치의 출처를 명시</a:t>
-            </a:r>
-            <a:endParaRPr lang="en-US" sz="2025" dirty="0"/>
-          </a:p>
-        </p:txBody>
-      </p:sp>
-      <p:sp>
-        <p:nvSpPr>
-          <p:cNvPr id="15" name="Text 10"/>
-          <p:cNvSpPr/>
-          <p:nvPr/>
-        </p:nvSpPr>
-        <p:spPr>
-          <a:xfrm>
-            <a:off x="11071821" y="8696325"/>
-            <a:ext cx="6890048" cy="423863"/>
-          </a:xfrm>
-          <a:prstGeom prst="rect">
-            <a:avLst/>
-          </a:prstGeom>
-          <a:noFill/>
-          <a:ln/>
-        </p:spPr>
-        <p:txBody>
-          <a:bodyPr wrap="square" lIns="25400" tIns="25400" rIns="25400" bIns="25400" rtlCol="0" anchor="t">
-            <a:normAutofit/>
-          </a:bodyPr>
-          <a:lstStyle/>
-          <a:p>
-            <a:pPr algn="l" indent="0" marL="0">
-              <a:lnSpc>
-                <a:spcPct val="102966"/>
-              </a:lnSpc>
-              <a:buNone/>
-            </a:pPr>
-            <a:r>
-              <a:rPr lang="en-US" sz="2025" dirty="0">
-                <a:solidFill>
-                  <a:srgbClr val="3D4757"/>
-                </a:solidFill>
-                <a:latin typeface="Noto Sans KR" pitchFamily="34" charset="0"/>
-                <a:ea typeface="Noto Sans KR" pitchFamily="34" charset="-122"/>
-                <a:cs typeface="Noto Sans KR" pitchFamily="34" charset="-120"/>
-              </a:rPr>
-              <a:t>인용 조항은 원문 요약과 산정식을 함께 펼쳐 확인 가능</a:t>
-            </a:r>
-            <a:endParaRPr lang="en-US" sz="2025" dirty="0"/>
-          </a:p>
-        </p:txBody>
-      </p:sp>
-      <p:sp>
-        <p:nvSpPr>
-          <p:cNvPr id="16" name="Text 11"/>
-          <p:cNvSpPr/>
-          <p:nvPr/>
-        </p:nvSpPr>
-        <p:spPr>
-          <a:xfrm>
-            <a:off x="11071821" y="9215438"/>
-            <a:ext cx="6890048" cy="423863"/>
-          </a:xfrm>
-          <a:prstGeom prst="rect">
-            <a:avLst/>
-          </a:prstGeom>
-          <a:noFill/>
-          <a:ln/>
-        </p:spPr>
-        <p:txBody>
-          <a:bodyPr wrap="square" lIns="25400" tIns="25400" rIns="25400" bIns="25400" rtlCol="0" anchor="t">
-            <a:normAutofit/>
-          </a:bodyPr>
-          <a:lstStyle/>
-          <a:p>
-            <a:pPr algn="l" indent="0" marL="0">
-              <a:lnSpc>
-                <a:spcPct val="102966"/>
-              </a:lnSpc>
-              <a:buNone/>
-            </a:pPr>
-            <a:r>
-              <a:rPr lang="en-US" sz="2025" dirty="0">
-                <a:solidFill>
-                  <a:srgbClr val="3D4757"/>
-                </a:solidFill>
-                <a:latin typeface="Noto Sans KR" pitchFamily="34" charset="0"/>
-                <a:ea typeface="Noto Sans KR" pitchFamily="34" charset="-122"/>
-                <a:cs typeface="Noto Sans KR" pitchFamily="34" charset="-120"/>
-              </a:rPr>
-              <a:t>내용증명 초안은 모달에서 클립보드 복사로 바로 사용</a:t>
-            </a:r>
-            <a:endParaRPr lang="en-US" sz="2025" dirty="0"/>
-          </a:p>
-        </p:txBody>
-      </p:sp>
     </p:spTree>
   </p:cSld>
   <p:clrMapOvr>
@@ -7295,6 +7120,7 @@
         <a:solidFill>
           <a:srgbClr val="FFFFFF"/>
         </a:solidFill>
+        <a:effectLst/>
       </p:bgPr>
     </p:bg>
     <p:spTree>
@@ -7376,7 +7202,7 @@
           </a:bodyPr>
           <a:lstStyle/>
           <a:p>
-            <a:pPr algn="l" indent="0" marL="0">
+            <a:pPr marL="0" indent="0" algn="l">
               <a:buNone/>
             </a:pPr>
             <a:r>
@@ -7417,7 +7243,7 @@
           </a:bodyPr>
           <a:lstStyle/>
           <a:p>
-            <a:pPr algn="l" indent="0" marL="0">
+            <a:pPr marL="0" indent="0" algn="l">
               <a:buNone/>
             </a:pPr>
             <a:r>
@@ -7458,7 +7284,7 @@
           </a:bodyPr>
           <a:lstStyle/>
           <a:p>
-            <a:pPr algn="l" indent="0" marL="0">
+            <a:pPr marL="0" indent="0" algn="l">
               <a:buNone/>
             </a:pPr>
             <a:r>
@@ -7478,17 +7304,17 @@
       </p:sp>
       <p:pic>
         <p:nvPicPr>
-          <p:cNvPr id="7" name="Image 0" descr="preencoded.png">    </p:cNvPr>
+          <p:cNvPr id="7" name="Image 0" descr="preencoded.png"/>
           <p:cNvPicPr>
             <a:picLocks noChangeAspect="1"/>
           </p:cNvPicPr>
           <p:nvPr/>
         </p:nvPicPr>
         <p:blipFill>
-          <a:blip r:embed="rId1">
+          <a:blip r:embed="rId3">
             <a:extLst>
               <a:ext uri="{96DAC541-7B7A-43D3-8B79-37D633B846F1}">
-                <asvg:svgBlip xmlns:asvg="http://schemas.microsoft.com/office/drawing/2016/SVG/main" r:embed="rId2"/>
+                <asvg:svgBlip xmlns:asvg="http://schemas.microsoft.com/office/drawing/2016/SVG/main" r:embed="rId4"/>
               </a:ext>
             </a:extLst>
           </a:blip>
@@ -7525,15 +7351,15 @@
         </p:spPr>
         <p:txBody>
           <a:bodyPr wrap="square" lIns="25400" tIns="25400" rIns="25400" bIns="25400" rtlCol="0" anchor="t">
-            <a:normAutofit/>
-          </a:bodyPr>
-          <a:lstStyle/>
-          <a:p>
-            <a:pPr algn="l" indent="0" marL="0">
-              <a:buNone/>
-            </a:pPr>
-            <a:r>
-              <a:rPr lang="en-US" sz="4500" b="1" spc="-90" kern="0" dirty="0">
+            <a:normAutofit lnSpcReduction="10000"/>
+          </a:bodyPr>
+          <a:lstStyle/>
+          <a:p>
+            <a:pPr marL="0" indent="0" algn="l">
+              <a:buNone/>
+            </a:pPr>
+            <a:r>
+              <a:rPr lang="en-US" sz="4500" b="1" kern="0" spc="-90" dirty="0">
                 <a:solidFill>
                   <a:srgbClr val="10151F"/>
                 </a:solidFill>
@@ -7556,21 +7382,21 @@
         <p:spPr>
           <a:xfrm>
             <a:off x="952500" y="2578100"/>
-            <a:ext cx="18021300" cy="495300"/>
-          </a:xfrm>
-          <a:prstGeom prst="rect">
-            <a:avLst/>
-          </a:prstGeom>
-          <a:noFill/>
-          <a:ln/>
-        </p:spPr>
-        <p:txBody>
-          <a:bodyPr wrap="square" lIns="25400" tIns="25400" rIns="25400" bIns="25400" rtlCol="0" anchor="t">
-            <a:normAutofit/>
-          </a:bodyPr>
-          <a:lstStyle/>
-          <a:p>
-            <a:pPr algn="l" indent="0" marL="0">
+            <a:ext cx="15849600" cy="495300"/>
+          </a:xfrm>
+          <a:prstGeom prst="rect">
+            <a:avLst/>
+          </a:prstGeom>
+          <a:noFill/>
+          <a:ln/>
+        </p:spPr>
+        <p:txBody>
+          <a:bodyPr wrap="square" lIns="25400" tIns="25400" rIns="25400" bIns="25400" rtlCol="0" anchor="t">
+            <a:normAutofit/>
+          </a:bodyPr>
+          <a:lstStyle/>
+          <a:p>
+            <a:pPr marL="0" indent="0" algn="l">
               <a:lnSpc>
                 <a:spcPct val="102857"/>
               </a:lnSpc>
@@ -7593,559 +7419,14 @@
       </p:sp>
       <p:sp>
         <p:nvSpPr>
-          <p:cNvPr id="10" name="Shape 7"/>
-          <p:cNvSpPr/>
-          <p:nvPr/>
-        </p:nvSpPr>
-        <p:spPr>
-          <a:xfrm>
-            <a:off x="952500" y="3454400"/>
-            <a:ext cx="3093641" cy="2157413"/>
-          </a:xfrm>
-          <a:prstGeom prst="roundRect">
-            <a:avLst>
-              <a:gd name="adj" fmla="val 7064"/>
-            </a:avLst>
-          </a:prstGeom>
-          <a:ln w="6350">
-            <a:solidFill>
-              <a:srgbClr val="E6E9F0"/>
-            </a:solidFill>
-            <a:prstDash val="solid"/>
-          </a:ln>
-        </p:spPr>
-      </p:sp>
-      <p:sp>
-        <p:nvSpPr>
-          <p:cNvPr id="11" name="Text 8"/>
-          <p:cNvSpPr/>
-          <p:nvPr/>
-        </p:nvSpPr>
-        <p:spPr>
-          <a:xfrm>
-            <a:off x="1225550" y="3746500"/>
-            <a:ext cx="2802295" cy="425450"/>
-          </a:xfrm>
-          <a:prstGeom prst="rect">
-            <a:avLst/>
-          </a:prstGeom>
-          <a:noFill/>
-          <a:ln/>
-        </p:spPr>
-        <p:txBody>
-          <a:bodyPr wrap="square" lIns="25400" tIns="25400" rIns="25400" bIns="25400" rtlCol="0" anchor="t">
-            <a:normAutofit/>
-          </a:bodyPr>
-          <a:lstStyle/>
-          <a:p>
-            <a:pPr algn="l" indent="0" marL="0">
-              <a:buNone/>
-            </a:pPr>
-            <a:r>
-              <a:rPr lang="en-US" sz="2100" b="1" dirty="0">
-                <a:solidFill>
-                  <a:srgbClr val="10151F"/>
-                </a:solidFill>
-                <a:latin typeface="Noto Sans KR" pitchFamily="34" charset="0"/>
-                <a:ea typeface="Noto Sans KR" pitchFamily="34" charset="-122"/>
-                <a:cs typeface="Noto Sans KR" pitchFamily="34" charset="-120"/>
-              </a:rPr>
-              <a:t>카테고리 힌트 미반영</a:t>
-            </a:r>
-            <a:endParaRPr lang="en-US" sz="2100" dirty="0"/>
-          </a:p>
-        </p:txBody>
-      </p:sp>
-      <p:sp>
-        <p:nvSpPr>
-          <p:cNvPr id="12" name="Text 9"/>
-          <p:cNvSpPr/>
-          <p:nvPr/>
-        </p:nvSpPr>
-        <p:spPr>
-          <a:xfrm>
-            <a:off x="1225550" y="4248150"/>
-            <a:ext cx="2623967" cy="1109663"/>
-          </a:xfrm>
-          <a:prstGeom prst="rect">
-            <a:avLst/>
-          </a:prstGeom>
-          <a:noFill/>
-          <a:ln/>
-        </p:spPr>
-        <p:txBody>
-          <a:bodyPr wrap="square" lIns="25400" tIns="25400" rIns="25400" bIns="25400" rtlCol="0" anchor="t">
-            <a:normAutofit/>
-          </a:bodyPr>
-          <a:lstStyle/>
-          <a:p>
-            <a:pPr algn="l" indent="0" marL="0">
-              <a:lnSpc>
-                <a:spcPct val="102273"/>
-              </a:lnSpc>
-              <a:buNone/>
-            </a:pPr>
-            <a:r>
-              <a:rPr lang="en-US" sz="1875" dirty="0">
-                <a:solidFill>
-                  <a:srgbClr val="5C6675"/>
-                </a:solidFill>
-                <a:latin typeface="Noto Sans KR" pitchFamily="34" charset="0"/>
-                <a:ea typeface="Noto Sans KR" pitchFamily="34" charset="-122"/>
-                <a:cs typeface="Noto Sans KR" pitchFamily="34" charset="-120"/>
-              </a:rPr>
-              <a:t>사용자가 고른 카테고리를 피처 또는 사전 필터로 반영</a:t>
-            </a:r>
-            <a:endParaRPr lang="en-US" sz="1875" dirty="0"/>
-          </a:p>
-        </p:txBody>
-      </p:sp>
-      <p:sp>
-        <p:nvSpPr>
-          <p:cNvPr id="13" name="Shape 10"/>
-          <p:cNvSpPr/>
-          <p:nvPr/>
-        </p:nvSpPr>
-        <p:spPr>
-          <a:xfrm>
-            <a:off x="4274741" y="3454400"/>
-            <a:ext cx="3093740" cy="2157413"/>
-          </a:xfrm>
-          <a:prstGeom prst="roundRect">
-            <a:avLst>
-              <a:gd name="adj" fmla="val 7064"/>
-            </a:avLst>
-          </a:prstGeom>
-          <a:ln w="6350">
-            <a:solidFill>
-              <a:srgbClr val="E6E9F0"/>
-            </a:solidFill>
-            <a:prstDash val="solid"/>
-          </a:ln>
-        </p:spPr>
-      </p:sp>
-      <p:sp>
-        <p:nvSpPr>
-          <p:cNvPr id="14" name="Text 11"/>
-          <p:cNvSpPr/>
-          <p:nvPr/>
-        </p:nvSpPr>
-        <p:spPr>
-          <a:xfrm>
-            <a:off x="4547791" y="3746500"/>
-            <a:ext cx="2802404" cy="425450"/>
-          </a:xfrm>
-          <a:prstGeom prst="rect">
-            <a:avLst/>
-          </a:prstGeom>
-          <a:noFill/>
-          <a:ln/>
-        </p:spPr>
-        <p:txBody>
-          <a:bodyPr wrap="square" lIns="25400" tIns="25400" rIns="25400" bIns="25400" rtlCol="0" anchor="t">
-            <a:normAutofit/>
-          </a:bodyPr>
-          <a:lstStyle/>
-          <a:p>
-            <a:pPr algn="l" indent="0" marL="0">
-              <a:buNone/>
-            </a:pPr>
-            <a:r>
-              <a:rPr lang="en-US" sz="2100" b="1" dirty="0">
-                <a:solidFill>
-                  <a:srgbClr val="10151F"/>
-                </a:solidFill>
-                <a:latin typeface="Noto Sans KR" pitchFamily="34" charset="0"/>
-                <a:ea typeface="Noto Sans KR" pitchFamily="34" charset="-122"/>
-                <a:cs typeface="Noto Sans KR" pitchFamily="34" charset="-120"/>
-              </a:rPr>
-              <a:t>저신뢰도 군집 확장</a:t>
-            </a:r>
-            <a:endParaRPr lang="en-US" sz="2100" dirty="0"/>
-          </a:p>
-        </p:txBody>
-      </p:sp>
-      <p:sp>
-        <p:nvSpPr>
-          <p:cNvPr id="15" name="Text 12"/>
-          <p:cNvSpPr/>
-          <p:nvPr/>
-        </p:nvSpPr>
-        <p:spPr>
-          <a:xfrm>
-            <a:off x="4547791" y="4248150"/>
-            <a:ext cx="2624069" cy="1109663"/>
-          </a:xfrm>
-          <a:prstGeom prst="rect">
-            <a:avLst/>
-          </a:prstGeom>
-          <a:noFill/>
-          <a:ln/>
-        </p:spPr>
-        <p:txBody>
-          <a:bodyPr wrap="square" lIns="25400" tIns="25400" rIns="25400" bIns="25400" rtlCol="0" anchor="t">
-            <a:normAutofit/>
-          </a:bodyPr>
-          <a:lstStyle/>
-          <a:p>
-            <a:pPr algn="l" indent="0" marL="0">
-              <a:lnSpc>
-                <a:spcPct val="102273"/>
-              </a:lnSpc>
-              <a:buNone/>
-            </a:pPr>
-            <a:r>
-              <a:rPr lang="en-US" sz="1875" dirty="0">
-                <a:solidFill>
-                  <a:srgbClr val="5C6675"/>
-                </a:solidFill>
-                <a:latin typeface="Noto Sans KR" pitchFamily="34" charset="0"/>
-                <a:ea typeface="Noto Sans KR" pitchFamily="34" charset="-122"/>
-                <a:cs typeface="Noto Sans KR" pitchFamily="34" charset="-120"/>
-              </a:rPr>
-              <a:t>법령 키워드로 카테고리를 재판단하는 보조 로직 도입</a:t>
-            </a:r>
-            <a:endParaRPr lang="en-US" sz="1875" dirty="0"/>
-          </a:p>
-        </p:txBody>
-      </p:sp>
-      <p:sp>
-        <p:nvSpPr>
-          <p:cNvPr id="16" name="Shape 13"/>
-          <p:cNvSpPr/>
-          <p:nvPr/>
-        </p:nvSpPr>
-        <p:spPr>
-          <a:xfrm>
-            <a:off x="7597080" y="3454400"/>
-            <a:ext cx="3093740" cy="2157413"/>
-          </a:xfrm>
-          <a:prstGeom prst="roundRect">
-            <a:avLst>
-              <a:gd name="adj" fmla="val 7064"/>
-            </a:avLst>
-          </a:prstGeom>
-          <a:ln w="6350">
-            <a:solidFill>
-              <a:srgbClr val="E6E9F0"/>
-            </a:solidFill>
-            <a:prstDash val="solid"/>
-          </a:ln>
-        </p:spPr>
-      </p:sp>
-      <p:sp>
-        <p:nvSpPr>
-          <p:cNvPr id="17" name="Text 14"/>
-          <p:cNvSpPr/>
-          <p:nvPr/>
-        </p:nvSpPr>
-        <p:spPr>
-          <a:xfrm>
-            <a:off x="7870131" y="3746500"/>
-            <a:ext cx="2802404" cy="425450"/>
-          </a:xfrm>
-          <a:prstGeom prst="rect">
-            <a:avLst/>
-          </a:prstGeom>
-          <a:noFill/>
-          <a:ln/>
-        </p:spPr>
-        <p:txBody>
-          <a:bodyPr wrap="square" lIns="25400" tIns="25400" rIns="25400" bIns="25400" rtlCol="0" anchor="t">
-            <a:normAutofit/>
-          </a:bodyPr>
-          <a:lstStyle/>
-          <a:p>
-            <a:pPr algn="l" indent="0" marL="0">
-              <a:buNone/>
-            </a:pPr>
-            <a:r>
-              <a:rPr lang="en-US" sz="2100" b="1" dirty="0">
-                <a:solidFill>
-                  <a:srgbClr val="10151F"/>
-                </a:solidFill>
-                <a:latin typeface="Noto Sans KR" pitchFamily="34" charset="0"/>
-                <a:ea typeface="Noto Sans KR" pitchFamily="34" charset="-122"/>
-                <a:cs typeface="Noto Sans KR" pitchFamily="34" charset="-120"/>
-              </a:rPr>
-              <a:t>다중 조항 인용 편향</a:t>
-            </a:r>
-            <a:endParaRPr lang="en-US" sz="2100" dirty="0"/>
-          </a:p>
-        </p:txBody>
-      </p:sp>
-      <p:sp>
-        <p:nvSpPr>
-          <p:cNvPr id="18" name="Text 15"/>
-          <p:cNvSpPr/>
-          <p:nvPr/>
-        </p:nvSpPr>
-        <p:spPr>
-          <a:xfrm>
-            <a:off x="7870131" y="4248150"/>
-            <a:ext cx="2624069" cy="752475"/>
-          </a:xfrm>
-          <a:prstGeom prst="rect">
-            <a:avLst/>
-          </a:prstGeom>
-          <a:noFill/>
-          <a:ln/>
-        </p:spPr>
-        <p:txBody>
-          <a:bodyPr wrap="square" lIns="25400" tIns="25400" rIns="25400" bIns="25400" rtlCol="0" anchor="t">
-            <a:normAutofit/>
-          </a:bodyPr>
-          <a:lstStyle/>
-          <a:p>
-            <a:pPr algn="l" indent="0" marL="0">
-              <a:lnSpc>
-                <a:spcPct val="102273"/>
-              </a:lnSpc>
-              <a:buNone/>
-            </a:pPr>
-            <a:r>
-              <a:rPr lang="en-US" sz="1875" dirty="0">
-                <a:solidFill>
-                  <a:srgbClr val="5C6675"/>
-                </a:solidFill>
-                <a:latin typeface="Noto Sans KR" pitchFamily="34" charset="0"/>
-                <a:ea typeface="Noto Sans KR" pitchFamily="34" charset="-122"/>
-                <a:cs typeface="Noto Sans KR" pitchFamily="34" charset="-120"/>
-              </a:rPr>
-              <a:t>Top-1만 전달하거나 검색 단계 가중치를 강화</a:t>
-            </a:r>
-            <a:endParaRPr lang="en-US" sz="1875" dirty="0"/>
-          </a:p>
-        </p:txBody>
-      </p:sp>
-      <p:sp>
-        <p:nvSpPr>
-          <p:cNvPr id="19" name="Shape 16"/>
-          <p:cNvSpPr/>
-          <p:nvPr/>
-        </p:nvSpPr>
-        <p:spPr>
-          <a:xfrm>
-            <a:off x="10919421" y="3454400"/>
-            <a:ext cx="3093740" cy="2157413"/>
-          </a:xfrm>
-          <a:prstGeom prst="roundRect">
-            <a:avLst>
-              <a:gd name="adj" fmla="val 7064"/>
-            </a:avLst>
-          </a:prstGeom>
-          <a:ln w="6350">
-            <a:solidFill>
-              <a:srgbClr val="E6E9F0"/>
-            </a:solidFill>
-            <a:prstDash val="solid"/>
-          </a:ln>
-        </p:spPr>
-      </p:sp>
-      <p:sp>
-        <p:nvSpPr>
-          <p:cNvPr id="20" name="Text 17"/>
-          <p:cNvSpPr/>
-          <p:nvPr/>
-        </p:nvSpPr>
-        <p:spPr>
-          <a:xfrm>
-            <a:off x="11192470" y="3746500"/>
-            <a:ext cx="2802404" cy="425450"/>
-          </a:xfrm>
-          <a:prstGeom prst="rect">
-            <a:avLst/>
-          </a:prstGeom>
-          <a:noFill/>
-          <a:ln/>
-        </p:spPr>
-        <p:txBody>
-          <a:bodyPr wrap="square" lIns="25400" tIns="25400" rIns="25400" bIns="25400" rtlCol="0" anchor="t">
-            <a:normAutofit/>
-          </a:bodyPr>
-          <a:lstStyle/>
-          <a:p>
-            <a:pPr algn="l" indent="0" marL="0">
-              <a:buNone/>
-            </a:pPr>
-            <a:r>
-              <a:rPr lang="en-US" sz="2100" b="1" dirty="0">
-                <a:solidFill>
-                  <a:srgbClr val="10151F"/>
-                </a:solidFill>
-                <a:latin typeface="Noto Sans KR" pitchFamily="34" charset="0"/>
-                <a:ea typeface="Noto Sans KR" pitchFamily="34" charset="-122"/>
-                <a:cs typeface="Noto Sans KR" pitchFamily="34" charset="-120"/>
-              </a:rPr>
-              <a:t>지식베이스 정확도</a:t>
-            </a:r>
-            <a:endParaRPr lang="en-US" sz="2100" dirty="0"/>
-          </a:p>
-        </p:txBody>
-      </p:sp>
-      <p:sp>
-        <p:nvSpPr>
-          <p:cNvPr id="21" name="Text 18"/>
-          <p:cNvSpPr/>
-          <p:nvPr/>
-        </p:nvSpPr>
-        <p:spPr>
-          <a:xfrm>
-            <a:off x="11192470" y="4248150"/>
-            <a:ext cx="2624069" cy="1109663"/>
-          </a:xfrm>
-          <a:prstGeom prst="rect">
-            <a:avLst/>
-          </a:prstGeom>
-          <a:noFill/>
-          <a:ln/>
-        </p:spPr>
-        <p:txBody>
-          <a:bodyPr wrap="square" lIns="25400" tIns="25400" rIns="25400" bIns="25400" rtlCol="0" anchor="t">
-            <a:normAutofit/>
-          </a:bodyPr>
-          <a:lstStyle/>
-          <a:p>
-            <a:pPr algn="l" indent="0" marL="0">
-              <a:lnSpc>
-                <a:spcPct val="102273"/>
-              </a:lnSpc>
-              <a:buNone/>
-            </a:pPr>
-            <a:r>
-              <a:rPr lang="en-US" sz="1875" dirty="0">
-                <a:solidFill>
-                  <a:srgbClr val="5C6675"/>
-                </a:solidFill>
-                <a:latin typeface="Noto Sans KR" pitchFamily="34" charset="0"/>
-                <a:ea typeface="Noto Sans KR" pitchFamily="34" charset="-122"/>
-                <a:cs typeface="Noto Sans KR" pitchFamily="34" charset="-120"/>
-              </a:rPr>
-              <a:t>국가법령정보센터 Open API로 원문 대조 · 주기 갱신</a:t>
-            </a:r>
-            <a:endParaRPr lang="en-US" sz="1875" dirty="0"/>
-          </a:p>
-        </p:txBody>
-      </p:sp>
-      <p:sp>
-        <p:nvSpPr>
-          <p:cNvPr id="22" name="Shape 19"/>
-          <p:cNvSpPr/>
-          <p:nvPr/>
-        </p:nvSpPr>
-        <p:spPr>
-          <a:xfrm>
-            <a:off x="14241761" y="3454400"/>
-            <a:ext cx="3093740" cy="2157413"/>
-          </a:xfrm>
-          <a:prstGeom prst="roundRect">
-            <a:avLst>
-              <a:gd name="adj" fmla="val 7064"/>
-            </a:avLst>
-          </a:prstGeom>
-          <a:ln w="6350">
-            <a:solidFill>
-              <a:srgbClr val="E6E9F0"/>
-            </a:solidFill>
-            <a:prstDash val="solid"/>
-          </a:ln>
-        </p:spPr>
-      </p:sp>
-      <p:sp>
-        <p:nvSpPr>
-          <p:cNvPr id="23" name="Text 20"/>
-          <p:cNvSpPr/>
-          <p:nvPr/>
-        </p:nvSpPr>
-        <p:spPr>
-          <a:xfrm>
-            <a:off x="14514811" y="3746500"/>
-            <a:ext cx="2802404" cy="425450"/>
-          </a:xfrm>
-          <a:prstGeom prst="rect">
-            <a:avLst/>
-          </a:prstGeom>
-          <a:noFill/>
-          <a:ln/>
-        </p:spPr>
-        <p:txBody>
-          <a:bodyPr wrap="square" lIns="25400" tIns="25400" rIns="25400" bIns="25400" rtlCol="0" anchor="t">
-            <a:normAutofit/>
-          </a:bodyPr>
-          <a:lstStyle/>
-          <a:p>
-            <a:pPr algn="l" indent="0" marL="0">
-              <a:buNone/>
-            </a:pPr>
-            <a:r>
-              <a:rPr lang="en-US" sz="2100" b="1" dirty="0">
-                <a:solidFill>
-                  <a:srgbClr val="10151F"/>
-                </a:solidFill>
-                <a:latin typeface="Noto Sans KR" pitchFamily="34" charset="0"/>
-                <a:ea typeface="Noto Sans KR" pitchFamily="34" charset="-122"/>
-                <a:cs typeface="Noto Sans KR" pitchFamily="34" charset="-120"/>
-              </a:rPr>
-              <a:t>사례 검색 고도화</a:t>
-            </a:r>
-            <a:endParaRPr lang="en-US" sz="2100" dirty="0"/>
-          </a:p>
-        </p:txBody>
-      </p:sp>
-      <p:sp>
-        <p:nvSpPr>
-          <p:cNvPr id="24" name="Text 21"/>
-          <p:cNvSpPr/>
-          <p:nvPr/>
-        </p:nvSpPr>
-        <p:spPr>
-          <a:xfrm>
-            <a:off x="14514811" y="4248150"/>
-            <a:ext cx="2624069" cy="1109663"/>
-          </a:xfrm>
-          <a:prstGeom prst="rect">
-            <a:avLst/>
-          </a:prstGeom>
-          <a:noFill/>
-          <a:ln/>
-        </p:spPr>
-        <p:txBody>
-          <a:bodyPr wrap="square" lIns="25400" tIns="25400" rIns="25400" bIns="25400" rtlCol="0" anchor="t">
-            <a:normAutofit/>
-          </a:bodyPr>
-          <a:lstStyle/>
-          <a:p>
-            <a:pPr algn="l" indent="0" marL="0">
-              <a:lnSpc>
-                <a:spcPct val="102273"/>
-              </a:lnSpc>
-              <a:buNone/>
-            </a:pPr>
-            <a:r>
-              <a:rPr lang="en-US" sz="1875" dirty="0">
-                <a:solidFill>
-                  <a:srgbClr val="5C6675"/>
-                </a:solidFill>
-                <a:latin typeface="Noto Sans KR" pitchFamily="34" charset="0"/>
-                <a:ea typeface="Noto Sans KR" pitchFamily="34" charset="-122"/>
-                <a:cs typeface="Noto Sans KR" pitchFamily="34" charset="-120"/>
-              </a:rPr>
-              <a:t>TF-IDF 기반 케이스뱅크 검색을 임베딩 기반으로 전환</a:t>
-            </a:r>
-            <a:endParaRPr lang="en-US" sz="1875" dirty="0"/>
-          </a:p>
-        </p:txBody>
-      </p:sp>
-      <p:sp>
-        <p:nvSpPr>
           <p:cNvPr id="25" name="Shape 22"/>
           <p:cNvSpPr/>
           <p:nvPr/>
         </p:nvSpPr>
         <p:spPr>
           <a:xfrm>
-            <a:off x="952500" y="6030913"/>
-            <a:ext cx="5283200" cy="2597150"/>
+            <a:off x="952500" y="3439881"/>
+            <a:ext cx="5283200" cy="5181606"/>
           </a:xfrm>
           <a:prstGeom prst="roundRect">
             <a:avLst>
@@ -8166,7 +7447,7 @@
         </p:nvSpPr>
         <p:spPr>
           <a:xfrm>
-            <a:off x="1276350" y="6373813"/>
+            <a:off x="1276350" y="3601577"/>
             <a:ext cx="5099050" cy="393700"/>
           </a:xfrm>
           <a:prstGeom prst="rect">
@@ -8181,7 +7462,7 @@
           </a:bodyPr>
           <a:lstStyle/>
           <a:p>
-            <a:pPr algn="l" indent="0" marL="0">
+            <a:pPr marL="0" indent="0" algn="l">
               <a:buNone/>
             </a:pPr>
             <a:r>
@@ -8207,39 +7488,138 @@
         </p:nvSpPr>
         <p:spPr>
           <a:xfrm>
-            <a:off x="1276350" y="6862763"/>
-            <a:ext cx="4774565" cy="1238250"/>
-          </a:xfrm>
-          <a:prstGeom prst="rect">
-            <a:avLst/>
-          </a:prstGeom>
-          <a:noFill/>
-          <a:ln/>
-        </p:spPr>
-        <p:txBody>
-          <a:bodyPr wrap="square" lIns="25400" tIns="25400" rIns="25400" bIns="25400" rtlCol="0" anchor="t">
-            <a:normAutofit/>
-          </a:bodyPr>
-          <a:lstStyle/>
-          <a:p>
-            <a:pPr algn="l" indent="0" marL="0">
+            <a:off x="1276350" y="4177610"/>
+            <a:ext cx="4959350" cy="3834272"/>
+          </a:xfrm>
+          <a:prstGeom prst="rect">
+            <a:avLst/>
+          </a:prstGeom>
+          <a:noFill/>
+          <a:ln/>
+        </p:spPr>
+        <p:txBody>
+          <a:bodyPr wrap="square" lIns="25400" tIns="25400" rIns="25400" bIns="25400" rtlCol="0" anchor="t">
+            <a:normAutofit/>
+          </a:bodyPr>
+          <a:lstStyle/>
+          <a:p>
+            <a:pPr>
               <a:lnSpc>
-                <a:spcPct val="103279"/>
+                <a:spcPct val="160000"/>
               </a:lnSpc>
-              <a:buNone/>
-            </a:pPr>
-            <a:r>
-              <a:rPr lang="en-US" sz="2100" dirty="0">
-                <a:solidFill>
-                  <a:srgbClr val="3D4757"/>
-                </a:solidFill>
-                <a:latin typeface="Noto Sans KR" pitchFamily="34" charset="0"/>
-                <a:ea typeface="Noto Sans KR" pitchFamily="34" charset="-122"/>
-                <a:cs typeface="Noto Sans KR" pitchFamily="34" charset="-120"/>
-              </a:rPr>
-              <a:t>서로 다른 두 런타임을 한 배포에 올리는 일은 코드보다 경로 설계 문제였다. 배포 후 즉시 검증하는 습관이 일정을 지켰다.</a:t>
-            </a:r>
-            <a:endParaRPr lang="en-US" sz="2100" dirty="0"/>
+            </a:pPr>
+            <a:r>
+              <a:rPr lang="en-US" altLang="ko-KR" sz="2000" dirty="0">
+                <a:latin typeface="Noto Sans KR" panose="020B0200000000000000" pitchFamily="50" charset="-127"/>
+                <a:ea typeface="Noto Sans KR" panose="020B0200000000000000" pitchFamily="50" charset="-127"/>
+              </a:rPr>
+              <a:t>"</a:t>
+            </a:r>
+            <a:r>
+              <a:rPr lang="ko-KR" altLang="en-US" sz="2000" b="1" dirty="0" err="1">
+                <a:solidFill>
+                  <a:srgbClr val="FF0000"/>
+                </a:solidFill>
+                <a:latin typeface="Noto Sans KR" panose="020B0200000000000000" pitchFamily="50" charset="-127"/>
+                <a:ea typeface="Noto Sans KR" panose="020B0200000000000000" pitchFamily="50" charset="-127"/>
+              </a:rPr>
+              <a:t>프론트엔드</a:t>
+            </a:r>
+            <a:r>
+              <a:rPr lang="en-US" altLang="ko-KR" sz="2000" b="1" dirty="0">
+                <a:solidFill>
+                  <a:srgbClr val="FF0000"/>
+                </a:solidFill>
+                <a:latin typeface="Noto Sans KR" panose="020B0200000000000000" pitchFamily="50" charset="-127"/>
+                <a:ea typeface="Noto Sans KR" panose="020B0200000000000000" pitchFamily="50" charset="-127"/>
+              </a:rPr>
+              <a:t>(Next.js)</a:t>
+            </a:r>
+            <a:r>
+              <a:rPr lang="ko-KR" altLang="en-US" sz="2000" b="1" dirty="0">
+                <a:solidFill>
+                  <a:srgbClr val="FF0000"/>
+                </a:solidFill>
+                <a:latin typeface="Noto Sans KR" panose="020B0200000000000000" pitchFamily="50" charset="-127"/>
+                <a:ea typeface="Noto Sans KR" panose="020B0200000000000000" pitchFamily="50" charset="-127"/>
+              </a:rPr>
+              <a:t>와 </a:t>
+            </a:r>
+            <a:r>
+              <a:rPr lang="en-US" altLang="ko-KR" sz="2000" b="1" dirty="0">
+                <a:solidFill>
+                  <a:srgbClr val="FF0000"/>
+                </a:solidFill>
+                <a:latin typeface="Noto Sans KR" panose="020B0200000000000000" pitchFamily="50" charset="-127"/>
+                <a:ea typeface="Noto Sans KR" panose="020B0200000000000000" pitchFamily="50" charset="-127"/>
+              </a:rPr>
+              <a:t>ML </a:t>
+            </a:r>
+            <a:r>
+              <a:rPr lang="ko-KR" altLang="en-US" sz="2000" b="1" dirty="0">
+                <a:solidFill>
+                  <a:srgbClr val="FF0000"/>
+                </a:solidFill>
+                <a:latin typeface="Noto Sans KR" panose="020B0200000000000000" pitchFamily="50" charset="-127"/>
+                <a:ea typeface="Noto Sans KR" panose="020B0200000000000000" pitchFamily="50" charset="-127"/>
+              </a:rPr>
+              <a:t>서버리스</a:t>
+            </a:r>
+            <a:r>
+              <a:rPr lang="en-US" altLang="ko-KR" sz="2000" b="1" dirty="0">
+                <a:solidFill>
+                  <a:srgbClr val="FF0000"/>
+                </a:solidFill>
+                <a:latin typeface="Noto Sans KR" panose="020B0200000000000000" pitchFamily="50" charset="-127"/>
+                <a:ea typeface="Noto Sans KR" panose="020B0200000000000000" pitchFamily="50" charset="-127"/>
+              </a:rPr>
+              <a:t>(Python)</a:t>
+            </a:r>
+            <a:r>
+              <a:rPr lang="ko-KR" altLang="en-US" sz="2000" dirty="0">
+                <a:latin typeface="Noto Sans KR" panose="020B0200000000000000" pitchFamily="50" charset="-127"/>
+                <a:ea typeface="Noto Sans KR" panose="020B0200000000000000" pitchFamily="50" charset="-127"/>
+              </a:rPr>
+              <a:t>의 충돌 없는 연동을 위해 세밀한 라우팅 경로 설계가 필수적이었습니다</a:t>
+            </a:r>
+            <a:r>
+              <a:rPr lang="en-US" altLang="ko-KR" sz="2000" dirty="0">
+                <a:latin typeface="Noto Sans KR" panose="020B0200000000000000" pitchFamily="50" charset="-127"/>
+                <a:ea typeface="Noto Sans KR" panose="020B0200000000000000" pitchFamily="50" charset="-127"/>
+              </a:rPr>
+              <a:t>. </a:t>
+            </a:r>
+          </a:p>
+          <a:p>
+            <a:pPr>
+              <a:lnSpc>
+                <a:spcPct val="160000"/>
+              </a:lnSpc>
+            </a:pPr>
+            <a:br>
+              <a:rPr lang="en-US" altLang="ko-KR" sz="2000" dirty="0">
+                <a:latin typeface="Noto Sans KR" panose="020B0200000000000000" pitchFamily="50" charset="-127"/>
+                <a:ea typeface="Noto Sans KR" panose="020B0200000000000000" pitchFamily="50" charset="-127"/>
+              </a:rPr>
+            </a:br>
+            <a:r>
+              <a:rPr lang="ko-KR" altLang="en-US" sz="2000" dirty="0">
+                <a:latin typeface="Noto Sans KR" panose="020B0200000000000000" pitchFamily="50" charset="-127"/>
+                <a:ea typeface="Noto Sans KR" panose="020B0200000000000000" pitchFamily="50" charset="-127"/>
+              </a:rPr>
+              <a:t>매 배포 단계마다 즉시 테스트하고 검증하는 루틴을 유지하여 개발 일정을 성공적으로 준수했습니다</a:t>
+            </a:r>
+            <a:r>
+              <a:rPr lang="en-US" altLang="ko-KR" sz="2000" dirty="0">
+                <a:latin typeface="Noto Sans KR" panose="020B0200000000000000" pitchFamily="50" charset="-127"/>
+                <a:ea typeface="Noto Sans KR" panose="020B0200000000000000" pitchFamily="50" charset="-127"/>
+              </a:rPr>
+              <a:t>." </a:t>
+            </a:r>
+            <a:endParaRPr lang="en-US" dirty="0">
+              <a:latin typeface="Noto Sans KR" panose="020B0200000000000000" pitchFamily="50" charset="-127"/>
+              <a:ea typeface="Noto Sans KR" panose="020B0200000000000000" pitchFamily="50" charset="-127"/>
+            </a:endParaRPr>
           </a:p>
         </p:txBody>
       </p:sp>
@@ -8251,8 +7631,8 @@
         </p:nvSpPr>
         <p:spPr>
           <a:xfrm>
-            <a:off x="6502400" y="6030913"/>
-            <a:ext cx="5283200" cy="2597150"/>
+            <a:off x="6502400" y="3439881"/>
+            <a:ext cx="5283200" cy="5181605"/>
           </a:xfrm>
           <a:prstGeom prst="roundRect">
             <a:avLst>
@@ -8273,7 +7653,7 @@
         </p:nvSpPr>
         <p:spPr>
           <a:xfrm>
-            <a:off x="6826250" y="6373813"/>
+            <a:off x="6826250" y="3601577"/>
             <a:ext cx="5099050" cy="393700"/>
           </a:xfrm>
           <a:prstGeom prst="rect">
@@ -8288,7 +7668,7 @@
           </a:bodyPr>
           <a:lstStyle/>
           <a:p>
-            <a:pPr algn="l" indent="0" marL="0">
+            <a:pPr marL="0" indent="0" algn="l">
               <a:buNone/>
             </a:pPr>
             <a:r>
@@ -8314,39 +7694,196 @@
         </p:nvSpPr>
         <p:spPr>
           <a:xfrm>
-            <a:off x="6826250" y="6862763"/>
-            <a:ext cx="4774565" cy="1238250"/>
-          </a:xfrm>
-          <a:prstGeom prst="rect">
-            <a:avLst/>
-          </a:prstGeom>
-          <a:noFill/>
-          <a:ln/>
-        </p:spPr>
-        <p:txBody>
-          <a:bodyPr wrap="square" lIns="25400" tIns="25400" rIns="25400" bIns="25400" rtlCol="0" anchor="t">
-            <a:normAutofit/>
-          </a:bodyPr>
-          <a:lstStyle/>
-          <a:p>
-            <a:pPr algn="l" indent="0" marL="0">
+            <a:off x="6826250" y="4177610"/>
+            <a:ext cx="4774565" cy="3964902"/>
+          </a:xfrm>
+          <a:prstGeom prst="rect">
+            <a:avLst/>
+          </a:prstGeom>
+          <a:noFill/>
+          <a:ln/>
+        </p:spPr>
+        <p:txBody>
+          <a:bodyPr wrap="square" lIns="25400" tIns="25400" rIns="25400" bIns="25400" rtlCol="0" anchor="t">
+            <a:normAutofit lnSpcReduction="10000"/>
+          </a:bodyPr>
+          <a:lstStyle/>
+          <a:p>
+            <a:pPr>
               <a:lnSpc>
-                <a:spcPct val="103279"/>
+                <a:spcPct val="150000"/>
               </a:lnSpc>
-              <a:buNone/>
-            </a:pPr>
-            <a:r>
-              <a:rPr lang="en-US" sz="2100" dirty="0">
-                <a:solidFill>
-                  <a:srgbClr val="3D4757"/>
-                </a:solidFill>
-                <a:latin typeface="Noto Sans KR" pitchFamily="34" charset="0"/>
-                <a:ea typeface="Noto Sans KR" pitchFamily="34" charset="-122"/>
-                <a:cs typeface="Noto Sans KR" pitchFamily="34" charset="-120"/>
-              </a:rPr>
-              <a:t>모델 성능의 상한은 데이터가 정한다는 것을 표본 4건짜리 카테고리에서 체감했다. 전처리 설계가 결국 성능이었다.</a:t>
-            </a:r>
-            <a:endParaRPr lang="en-US" sz="2100" dirty="0"/>
+            </a:pPr>
+            <a:r>
+              <a:rPr lang="en-US" altLang="ko-KR" sz="2000" dirty="0">
+                <a:latin typeface="Noto Sans KR" panose="020B0200000000000000" pitchFamily="50" charset="-127"/>
+                <a:ea typeface="Noto Sans KR" panose="020B0200000000000000" pitchFamily="50" charset="-127"/>
+              </a:rPr>
+              <a:t>"</a:t>
+            </a:r>
+            <a:r>
+              <a:rPr lang="ko-KR" altLang="en-US" sz="2000" dirty="0">
+                <a:latin typeface="Noto Sans KR" panose="020B0200000000000000" pitchFamily="50" charset="-127"/>
+                <a:ea typeface="Noto Sans KR" panose="020B0200000000000000" pitchFamily="50" charset="-127"/>
+              </a:rPr>
+              <a:t>일부 카테고리의 표본 부족</a:t>
+            </a:r>
+            <a:r>
+              <a:rPr lang="en-US" altLang="ko-KR" sz="2000" dirty="0">
+                <a:latin typeface="Noto Sans KR" panose="020B0200000000000000" pitchFamily="50" charset="-127"/>
+                <a:ea typeface="Noto Sans KR" panose="020B0200000000000000" pitchFamily="50" charset="-127"/>
+              </a:rPr>
+              <a:t>(4</a:t>
+            </a:r>
+            <a:r>
+              <a:rPr lang="ko-KR" altLang="en-US" sz="2000" dirty="0">
+                <a:latin typeface="Noto Sans KR" panose="020B0200000000000000" pitchFamily="50" charset="-127"/>
+                <a:ea typeface="Noto Sans KR" panose="020B0200000000000000" pitchFamily="50" charset="-127"/>
+              </a:rPr>
+              <a:t>건</a:t>
+            </a:r>
+            <a:r>
+              <a:rPr lang="en-US" altLang="ko-KR" sz="2000" dirty="0">
+                <a:latin typeface="Noto Sans KR" panose="020B0200000000000000" pitchFamily="50" charset="-127"/>
+                <a:ea typeface="Noto Sans KR" panose="020B0200000000000000" pitchFamily="50" charset="-127"/>
+              </a:rPr>
+              <a:t>)</a:t>
+            </a:r>
+            <a:r>
+              <a:rPr lang="ko-KR" altLang="en-US" sz="2000" dirty="0">
+                <a:latin typeface="Noto Sans KR" panose="020B0200000000000000" pitchFamily="50" charset="-127"/>
+                <a:ea typeface="Noto Sans KR" panose="020B0200000000000000" pitchFamily="50" charset="-127"/>
+              </a:rPr>
+              <a:t>으로 환불 예측 수치가 부정확했던 문제를 </a:t>
+            </a:r>
+            <a:r>
+              <a:rPr lang="en-US" altLang="ko-KR" sz="2000" b="1" dirty="0">
+                <a:solidFill>
+                  <a:srgbClr val="FF0000"/>
+                </a:solidFill>
+                <a:latin typeface="Noto Sans KR" panose="020B0200000000000000" pitchFamily="50" charset="-127"/>
+                <a:ea typeface="Noto Sans KR" panose="020B0200000000000000" pitchFamily="50" charset="-127"/>
+              </a:rPr>
+              <a:t>RAG </a:t>
+            </a:r>
+            <a:r>
+              <a:rPr lang="ko-KR" altLang="en-US" sz="2000" b="1" dirty="0">
+                <a:solidFill>
+                  <a:srgbClr val="FF0000"/>
+                </a:solidFill>
+                <a:latin typeface="Noto Sans KR" panose="020B0200000000000000" pitchFamily="50" charset="-127"/>
+                <a:ea typeface="Noto Sans KR" panose="020B0200000000000000" pitchFamily="50" charset="-127"/>
+              </a:rPr>
+              <a:t>기반 법률 검색과 </a:t>
+            </a:r>
+            <a:r>
+              <a:rPr lang="en-US" altLang="ko-KR" sz="2000" b="1" dirty="0" err="1">
+                <a:solidFill>
+                  <a:srgbClr val="FF0000"/>
+                </a:solidFill>
+                <a:latin typeface="Noto Sans KR" panose="020B0200000000000000" pitchFamily="50" charset="-127"/>
+                <a:ea typeface="Noto Sans KR" panose="020B0200000000000000" pitchFamily="50" charset="-127"/>
+              </a:rPr>
+              <a:t>ReRank</a:t>
+            </a:r>
+            <a:r>
+              <a:rPr lang="en-US" altLang="ko-KR" sz="2000" b="1" dirty="0">
+                <a:solidFill>
+                  <a:srgbClr val="FF0000"/>
+                </a:solidFill>
+                <a:latin typeface="Noto Sans KR" panose="020B0200000000000000" pitchFamily="50" charset="-127"/>
+                <a:ea typeface="Noto Sans KR" panose="020B0200000000000000" pitchFamily="50" charset="-127"/>
+              </a:rPr>
+              <a:t> </a:t>
+            </a:r>
+            <a:r>
+              <a:rPr lang="ko-KR" altLang="en-US" sz="2000" b="1" dirty="0">
+                <a:solidFill>
+                  <a:srgbClr val="FF0000"/>
+                </a:solidFill>
+                <a:latin typeface="Noto Sans KR" panose="020B0200000000000000" pitchFamily="50" charset="-127"/>
+                <a:ea typeface="Noto Sans KR" panose="020B0200000000000000" pitchFamily="50" charset="-127"/>
+              </a:rPr>
+              <a:t>재순위화 </a:t>
+            </a:r>
+            <a:r>
+              <a:rPr lang="ko-KR" altLang="en-US" sz="2000" dirty="0">
+                <a:latin typeface="Noto Sans KR" panose="020B0200000000000000" pitchFamily="50" charset="-127"/>
+                <a:ea typeface="Noto Sans KR" panose="020B0200000000000000" pitchFamily="50" charset="-127"/>
+              </a:rPr>
+              <a:t>파이프라인으로 돌파했습니다</a:t>
+            </a:r>
+            <a:r>
+              <a:rPr lang="en-US" altLang="ko-KR" sz="2000" dirty="0">
+                <a:latin typeface="Noto Sans KR" panose="020B0200000000000000" pitchFamily="50" charset="-127"/>
+                <a:ea typeface="Noto Sans KR" panose="020B0200000000000000" pitchFamily="50" charset="-127"/>
+              </a:rPr>
+              <a:t>. </a:t>
+            </a:r>
+          </a:p>
+          <a:p>
+            <a:pPr>
+              <a:lnSpc>
+                <a:spcPct val="150000"/>
+              </a:lnSpc>
+            </a:pPr>
+            <a:endParaRPr lang="en-US" altLang="ko-KR" sz="2000" dirty="0">
+              <a:latin typeface="Noto Sans KR" panose="020B0200000000000000" pitchFamily="50" charset="-127"/>
+              <a:ea typeface="Noto Sans KR" panose="020B0200000000000000" pitchFamily="50" charset="-127"/>
+            </a:endParaRPr>
+          </a:p>
+          <a:p>
+            <a:pPr>
+              <a:lnSpc>
+                <a:spcPct val="150000"/>
+              </a:lnSpc>
+            </a:pPr>
+            <a:r>
+              <a:rPr lang="ko-KR" altLang="en-US" sz="2000" dirty="0">
+                <a:latin typeface="Noto Sans KR" panose="020B0200000000000000" pitchFamily="50" charset="-127"/>
+                <a:ea typeface="Noto Sans KR" panose="020B0200000000000000" pitchFamily="50" charset="-127"/>
+              </a:rPr>
+              <a:t>구현 난이도가 높아 쉽지 않은 과정이었지만</a:t>
+            </a:r>
+            <a:r>
+              <a:rPr lang="en-US" altLang="ko-KR" sz="2000" dirty="0">
+                <a:latin typeface="Noto Sans KR" panose="020B0200000000000000" pitchFamily="50" charset="-127"/>
+                <a:ea typeface="Noto Sans KR" panose="020B0200000000000000" pitchFamily="50" charset="-127"/>
+              </a:rPr>
+              <a:t>, </a:t>
+            </a:r>
+            <a:r>
+              <a:rPr lang="ko-KR" altLang="en-US" sz="2000" dirty="0">
+                <a:latin typeface="Noto Sans KR" panose="020B0200000000000000" pitchFamily="50" charset="-127"/>
+                <a:ea typeface="Noto Sans KR" panose="020B0200000000000000" pitchFamily="50" charset="-127"/>
+              </a:rPr>
+              <a:t>정교한 데이터 전처리와 검색 설계가 </a:t>
+            </a:r>
+            <a:r>
+              <a:rPr lang="en-US" altLang="ko-KR" sz="2000" dirty="0">
+                <a:latin typeface="Noto Sans KR" panose="020B0200000000000000" pitchFamily="50" charset="-127"/>
+                <a:ea typeface="Noto Sans KR" panose="020B0200000000000000" pitchFamily="50" charset="-127"/>
+              </a:rPr>
+              <a:t>AI</a:t>
+            </a:r>
+            <a:r>
+              <a:rPr lang="ko-KR" altLang="en-US" sz="2000" dirty="0">
+                <a:latin typeface="Noto Sans KR" panose="020B0200000000000000" pitchFamily="50" charset="-127"/>
+                <a:ea typeface="Noto Sans KR" panose="020B0200000000000000" pitchFamily="50" charset="-127"/>
+              </a:rPr>
+              <a:t>의 신뢰성을 완성한다는 것을 깊이 체감했습니다</a:t>
+            </a:r>
+            <a:r>
+              <a:rPr lang="en-US" altLang="ko-KR" sz="2000" dirty="0">
+                <a:latin typeface="Noto Sans KR" panose="020B0200000000000000" pitchFamily="50" charset="-127"/>
+                <a:ea typeface="Noto Sans KR" panose="020B0200000000000000" pitchFamily="50" charset="-127"/>
+              </a:rPr>
+              <a:t>." </a:t>
+            </a:r>
+            <a:endParaRPr lang="en-US" dirty="0">
+              <a:latin typeface="Noto Sans KR" panose="020B0200000000000000" pitchFamily="50" charset="-127"/>
+              <a:ea typeface="Noto Sans KR" panose="020B0200000000000000" pitchFamily="50" charset="-127"/>
+            </a:endParaRPr>
           </a:p>
         </p:txBody>
       </p:sp>
@@ -8358,8 +7895,8 @@
         </p:nvSpPr>
         <p:spPr>
           <a:xfrm>
-            <a:off x="12052300" y="6030913"/>
-            <a:ext cx="5283200" cy="2597150"/>
+            <a:off x="12052300" y="3439882"/>
+            <a:ext cx="5283200" cy="5181604"/>
           </a:xfrm>
           <a:prstGeom prst="roundRect">
             <a:avLst>
@@ -8380,7 +7917,7 @@
         </p:nvSpPr>
         <p:spPr>
           <a:xfrm>
-            <a:off x="12376150" y="6373813"/>
+            <a:off x="12376150" y="3601577"/>
             <a:ext cx="5099050" cy="393700"/>
           </a:xfrm>
           <a:prstGeom prst="rect">
@@ -8395,7 +7932,7 @@
           </a:bodyPr>
           <a:lstStyle/>
           <a:p>
-            <a:pPr algn="l" indent="0" marL="0">
+            <a:pPr marL="0" indent="0" algn="l">
               <a:buNone/>
             </a:pPr>
             <a:r>
@@ -8421,39 +7958,186 @@
         </p:nvSpPr>
         <p:spPr>
           <a:xfrm>
-            <a:off x="12376150" y="6862763"/>
-            <a:ext cx="4774565" cy="1238250"/>
-          </a:xfrm>
-          <a:prstGeom prst="rect">
-            <a:avLst/>
-          </a:prstGeom>
-          <a:noFill/>
-          <a:ln/>
-        </p:spPr>
-        <p:txBody>
-          <a:bodyPr wrap="square" lIns="25400" tIns="25400" rIns="25400" bIns="25400" rtlCol="0" anchor="t">
-            <a:normAutofit/>
-          </a:bodyPr>
-          <a:lstStyle/>
-          <a:p>
-            <a:pPr algn="l" indent="0" marL="0">
+            <a:off x="12376150" y="4177610"/>
+            <a:ext cx="4774565" cy="3964902"/>
+          </a:xfrm>
+          <a:prstGeom prst="rect">
+            <a:avLst/>
+          </a:prstGeom>
+          <a:noFill/>
+          <a:ln/>
+        </p:spPr>
+        <p:txBody>
+          <a:bodyPr wrap="square" lIns="25400" tIns="25400" rIns="25400" bIns="25400" rtlCol="0" anchor="t">
+            <a:normAutofit fontScale="92500"/>
+          </a:bodyPr>
+          <a:lstStyle/>
+          <a:p>
+            <a:pPr>
               <a:lnSpc>
-                <a:spcPct val="103279"/>
+                <a:spcPct val="150000"/>
               </a:lnSpc>
-              <a:buNone/>
-            </a:pPr>
-            <a:r>
-              <a:rPr lang="en-US" sz="2100" dirty="0">
-                <a:solidFill>
-                  <a:srgbClr val="3D4757"/>
-                </a:solidFill>
-                <a:latin typeface="Noto Sans KR" pitchFamily="34" charset="0"/>
-                <a:ea typeface="Noto Sans KR" pitchFamily="34" charset="-122"/>
-                <a:cs typeface="Noto Sans KR" pitchFamily="34" charset="-120"/>
-              </a:rPr>
-              <a:t>LLM에게는 "무엇을 사실로 볼지"를 정해주는 일이 프롬프트의 핵심이었다. 한 문장의 정의가 결과를 바꿨다.</a:t>
-            </a:r>
-            <a:endParaRPr lang="en-US" sz="2100" dirty="0"/>
+            </a:pPr>
+            <a:r>
+              <a:rPr lang="en-US" altLang="ko-KR" sz="2000" dirty="0">
+                <a:latin typeface="Noto Sans KR" panose="020B0200000000000000" pitchFamily="50" charset="-127"/>
+                <a:ea typeface="Noto Sans KR" panose="020B0200000000000000" pitchFamily="50" charset="-127"/>
+              </a:rPr>
+              <a:t>"LLM</a:t>
+            </a:r>
+            <a:r>
+              <a:rPr lang="ko-KR" altLang="en-US" sz="2000" dirty="0">
+                <a:latin typeface="Noto Sans KR" panose="020B0200000000000000" pitchFamily="50" charset="-127"/>
+                <a:ea typeface="Noto Sans KR" panose="020B0200000000000000" pitchFamily="50" charset="-127"/>
+              </a:rPr>
+              <a:t>이 사전 학습된 기억에만 의존해 자의적인 환급 확률을 생성하거나 환각을 일으키지 않도록</a:t>
+            </a:r>
+            <a:r>
+              <a:rPr lang="en-US" altLang="ko-KR" sz="2000" dirty="0">
+                <a:latin typeface="Noto Sans KR" panose="020B0200000000000000" pitchFamily="50" charset="-127"/>
+                <a:ea typeface="Noto Sans KR" panose="020B0200000000000000" pitchFamily="50" charset="-127"/>
+              </a:rPr>
+              <a:t>, RAG</a:t>
+            </a:r>
+            <a:r>
+              <a:rPr lang="ko-KR" altLang="en-US" sz="2000" dirty="0">
+                <a:latin typeface="Noto Sans KR" panose="020B0200000000000000" pitchFamily="50" charset="-127"/>
+                <a:ea typeface="Noto Sans KR" panose="020B0200000000000000" pitchFamily="50" charset="-127"/>
+              </a:rPr>
+              <a:t>로 검색된 실제 고시 법령만을 </a:t>
+            </a:r>
+            <a:r>
+              <a:rPr lang="en-US" altLang="ko-KR" sz="2000" dirty="0">
+                <a:latin typeface="Noto Sans KR" panose="020B0200000000000000" pitchFamily="50" charset="-127"/>
+                <a:ea typeface="Noto Sans KR" panose="020B0200000000000000" pitchFamily="50" charset="-127"/>
+              </a:rPr>
+              <a:t>'</a:t>
+            </a:r>
+            <a:r>
+              <a:rPr lang="ko-KR" altLang="en-US" sz="2000" dirty="0">
+                <a:latin typeface="Noto Sans KR" panose="020B0200000000000000" pitchFamily="50" charset="-127"/>
+                <a:ea typeface="Noto Sans KR" panose="020B0200000000000000" pitchFamily="50" charset="-127"/>
+              </a:rPr>
+              <a:t>절대적 사실</a:t>
+            </a:r>
+            <a:r>
+              <a:rPr lang="en-US" altLang="ko-KR" sz="2000" dirty="0">
+                <a:latin typeface="Noto Sans KR" panose="020B0200000000000000" pitchFamily="50" charset="-127"/>
+                <a:ea typeface="Noto Sans KR" panose="020B0200000000000000" pitchFamily="50" charset="-127"/>
+              </a:rPr>
+              <a:t>(Ground Truth)'</a:t>
+            </a:r>
+            <a:r>
+              <a:rPr lang="ko-KR" altLang="en-US" sz="2000" dirty="0">
+                <a:latin typeface="Noto Sans KR" panose="020B0200000000000000" pitchFamily="50" charset="-127"/>
+                <a:ea typeface="Noto Sans KR" panose="020B0200000000000000" pitchFamily="50" charset="-127"/>
+              </a:rPr>
+              <a:t>로 삼게 하는 </a:t>
+            </a:r>
+            <a:r>
+              <a:rPr lang="ko-KR" altLang="en-US" sz="2000" b="1" dirty="0">
+                <a:solidFill>
+                  <a:srgbClr val="FF0000"/>
+                </a:solidFill>
+                <a:latin typeface="Noto Sans KR" panose="020B0200000000000000" pitchFamily="50" charset="-127"/>
+                <a:ea typeface="Noto Sans KR" panose="020B0200000000000000" pitchFamily="50" charset="-127"/>
+              </a:rPr>
+              <a:t>프롬프트 설계</a:t>
+            </a:r>
+            <a:r>
+              <a:rPr lang="ko-KR" altLang="en-US" sz="2000" dirty="0">
+                <a:latin typeface="Noto Sans KR" panose="020B0200000000000000" pitchFamily="50" charset="-127"/>
+                <a:ea typeface="Noto Sans KR" panose="020B0200000000000000" pitchFamily="50" charset="-127"/>
+              </a:rPr>
+              <a:t>가 핵심</a:t>
+            </a:r>
+            <a:r>
+              <a:rPr lang="ko-KR" altLang="en-US" sz="2000" b="1" dirty="0">
+                <a:solidFill>
+                  <a:srgbClr val="FF0000"/>
+                </a:solidFill>
+                <a:latin typeface="Noto Sans KR" panose="020B0200000000000000" pitchFamily="50" charset="-127"/>
+                <a:ea typeface="Noto Sans KR" panose="020B0200000000000000" pitchFamily="50" charset="-127"/>
+              </a:rPr>
+              <a:t> </a:t>
+            </a:r>
+            <a:r>
+              <a:rPr lang="ko-KR" altLang="en-US" sz="2000" dirty="0">
+                <a:latin typeface="Noto Sans KR" panose="020B0200000000000000" pitchFamily="50" charset="-127"/>
+                <a:ea typeface="Noto Sans KR" panose="020B0200000000000000" pitchFamily="50" charset="-127"/>
+              </a:rPr>
+              <a:t>과제였습니다</a:t>
+            </a:r>
+            <a:r>
+              <a:rPr lang="en-US" altLang="ko-KR" sz="2000" dirty="0">
+                <a:latin typeface="Noto Sans KR" panose="020B0200000000000000" pitchFamily="50" charset="-127"/>
+                <a:ea typeface="Noto Sans KR" panose="020B0200000000000000" pitchFamily="50" charset="-127"/>
+              </a:rPr>
+              <a:t>. </a:t>
+            </a:r>
+            <a:br>
+              <a:rPr lang="en-US" altLang="ko-KR" sz="2000" dirty="0">
+                <a:latin typeface="Noto Sans KR" panose="020B0200000000000000" pitchFamily="50" charset="-127"/>
+                <a:ea typeface="Noto Sans KR" panose="020B0200000000000000" pitchFamily="50" charset="-127"/>
+              </a:rPr>
+            </a:br>
+            <a:endParaRPr lang="en-US" altLang="ko-KR" sz="2000" dirty="0">
+              <a:latin typeface="Noto Sans KR" panose="020B0200000000000000" pitchFamily="50" charset="-127"/>
+              <a:ea typeface="Noto Sans KR" panose="020B0200000000000000" pitchFamily="50" charset="-127"/>
+            </a:endParaRPr>
+          </a:p>
+          <a:p>
+            <a:pPr>
+              <a:lnSpc>
+                <a:spcPct val="150000"/>
+              </a:lnSpc>
+            </a:pPr>
+            <a:r>
+              <a:rPr lang="ko-KR" altLang="en-US" sz="2000" dirty="0">
+                <a:latin typeface="Noto Sans KR" panose="020B0200000000000000" pitchFamily="50" charset="-127"/>
+                <a:ea typeface="Noto Sans KR" panose="020B0200000000000000" pitchFamily="50" charset="-127"/>
+              </a:rPr>
+              <a:t>판단 기준과 규칙을 어떻게 </a:t>
+            </a:r>
+            <a:r>
+              <a:rPr lang="ko-KR" altLang="en-US" sz="2000" dirty="0" err="1">
+                <a:latin typeface="Noto Sans KR" panose="020B0200000000000000" pitchFamily="50" charset="-127"/>
+                <a:ea typeface="Noto Sans KR" panose="020B0200000000000000" pitchFamily="50" charset="-127"/>
+              </a:rPr>
+              <a:t>정의하느냐에</a:t>
+            </a:r>
+            <a:r>
+              <a:rPr lang="ko-KR" altLang="en-US" sz="2000" dirty="0">
+                <a:latin typeface="Noto Sans KR" panose="020B0200000000000000" pitchFamily="50" charset="-127"/>
+                <a:ea typeface="Noto Sans KR" panose="020B0200000000000000" pitchFamily="50" charset="-127"/>
+              </a:rPr>
+              <a:t> 따라 </a:t>
+            </a:r>
+            <a:r>
+              <a:rPr lang="en-US" altLang="ko-KR" sz="2000" dirty="0">
+                <a:latin typeface="Noto Sans KR" panose="020B0200000000000000" pitchFamily="50" charset="-127"/>
+                <a:ea typeface="Noto Sans KR" panose="020B0200000000000000" pitchFamily="50" charset="-127"/>
+              </a:rPr>
+              <a:t>AI </a:t>
+            </a:r>
+            <a:r>
+              <a:rPr lang="ko-KR" altLang="en-US" sz="2000" dirty="0">
+                <a:latin typeface="Noto Sans KR" panose="020B0200000000000000" pitchFamily="50" charset="-127"/>
+                <a:ea typeface="Noto Sans KR" panose="020B0200000000000000" pitchFamily="50" charset="-127"/>
+              </a:rPr>
+              <a:t>응답의 일관성과 신뢰성이 완전히 달라진다는 것을 배웠습니다</a:t>
+            </a:r>
+            <a:r>
+              <a:rPr lang="en-US" altLang="ko-KR" sz="2000" dirty="0">
+                <a:latin typeface="Noto Sans KR" panose="020B0200000000000000" pitchFamily="50" charset="-127"/>
+                <a:ea typeface="Noto Sans KR" panose="020B0200000000000000" pitchFamily="50" charset="-127"/>
+              </a:rPr>
+              <a:t>." </a:t>
+            </a:r>
+            <a:endParaRPr lang="en-US" sz="2000" dirty="0">
+              <a:latin typeface="Noto Sans KR" panose="020B0200000000000000" pitchFamily="50" charset="-127"/>
+              <a:ea typeface="Noto Sans KR" panose="020B0200000000000000" pitchFamily="50" charset="-127"/>
+            </a:endParaRPr>
           </a:p>
         </p:txBody>
       </p:sp>
@@ -8465,7 +8149,7 @@
         </p:nvSpPr>
         <p:spPr>
           <a:xfrm>
-            <a:off x="952500" y="8970963"/>
+            <a:off x="952500" y="8854842"/>
             <a:ext cx="16383000" cy="9525"/>
           </a:xfrm>
           <a:prstGeom prst="rect">
@@ -8500,7 +8184,7 @@
           </a:bodyPr>
           <a:lstStyle/>
           <a:p>
-            <a:pPr algn="l" indent="0" marL="0">
+            <a:pPr marL="0" indent="0" algn="l">
               <a:lnSpc>
                 <a:spcPct val="102273"/>
               </a:lnSpc>
@@ -8537,6 +8221,7 @@
         <a:solidFill>
           <a:srgbClr val="FFFFFF"/>
         </a:solidFill>
+        <a:effectLst/>
       </p:bgPr>
     </p:bg>
     <p:spTree>
@@ -8618,7 +8303,7 @@
           </a:bodyPr>
           <a:lstStyle/>
           <a:p>
-            <a:pPr algn="l" indent="0" marL="0">
+            <a:pPr marL="0" indent="0" algn="l">
               <a:buNone/>
             </a:pPr>
             <a:r>
@@ -8659,7 +8344,7 @@
           </a:bodyPr>
           <a:lstStyle/>
           <a:p>
-            <a:pPr algn="l" indent="0" marL="0">
+            <a:pPr marL="0" indent="0" algn="l">
               <a:buNone/>
             </a:pPr>
             <a:r>
@@ -8700,7 +8385,7 @@
           </a:bodyPr>
           <a:lstStyle/>
           <a:p>
-            <a:pPr algn="l" indent="0" marL="0">
+            <a:pPr marL="0" indent="0" algn="l">
               <a:buNone/>
             </a:pPr>
             <a:r>
@@ -8720,147 +8405,7 @@
       </p:sp>
       <p:pic>
         <p:nvPicPr>
-          <p:cNvPr id="7" name="Image 0" descr="preencoded.png">    </p:cNvPr>
-          <p:cNvPicPr>
-            <a:picLocks noChangeAspect="1"/>
-          </p:cNvPicPr>
-          <p:nvPr/>
-        </p:nvPicPr>
-        <p:blipFill>
-          <a:blip r:embed="rId1">
-            <a:extLst>
-              <a:ext uri="{96DAC541-7B7A-43D3-8B79-37D633B846F1}">
-                <asvg:svgBlip xmlns:asvg="http://schemas.microsoft.com/office/drawing/2016/SVG/main" r:embed="rId2"/>
-              </a:ext>
-            </a:extLst>
-          </a:blip>
-          <a:stretch>
-            <a:fillRect/>
-          </a:stretch>
-        </p:blipFill>
-        <p:spPr>
-          <a:xfrm>
-            <a:off x="16897350" y="533400"/>
-            <a:ext cx="438150" cy="438150"/>
-          </a:xfrm>
-          <a:prstGeom prst="rect">
-            <a:avLst/>
-          </a:prstGeom>
-        </p:spPr>
-      </p:pic>
-      <p:sp>
-        <p:nvSpPr>
-          <p:cNvPr id="8" name="Text 5"/>
-          <p:cNvSpPr/>
-          <p:nvPr/>
-        </p:nvSpPr>
-        <p:spPr>
-          <a:xfrm>
-            <a:off x="952500" y="1701800"/>
-            <a:ext cx="18021300" cy="695325"/>
-          </a:xfrm>
-          <a:prstGeom prst="rect">
-            <a:avLst/>
-          </a:prstGeom>
-          <a:noFill/>
-          <a:ln/>
-        </p:spPr>
-        <p:txBody>
-          <a:bodyPr wrap="square" lIns="25400" tIns="25400" rIns="25400" bIns="25400" rtlCol="0" anchor="t">
-            <a:normAutofit/>
-          </a:bodyPr>
-          <a:lstStyle/>
-          <a:p>
-            <a:pPr algn="l" indent="0" marL="0">
-              <a:lnSpc>
-                <a:spcPct val="79615"/>
-              </a:lnSpc>
-              <a:buNone/>
-            </a:pPr>
-            <a:r>
-              <a:rPr lang="en-US" sz="4500" b="1" spc="-90" kern="0" dirty="0">
-                <a:solidFill>
-                  <a:srgbClr val="10151F"/>
-                </a:solidFill>
-                <a:latin typeface="Noto Sans KR" pitchFamily="34" charset="0"/>
-                <a:ea typeface="Noto Sans KR" pitchFamily="34" charset="-122"/>
-                <a:cs typeface="Noto Sans KR" pitchFamily="34" charset="-120"/>
-              </a:rPr>
-              <a:t>주제 및 추진 배경</a:t>
-            </a:r>
-            <a:endParaRPr lang="en-US" sz="4500" dirty="0"/>
-          </a:p>
-        </p:txBody>
-      </p:sp>
-      <p:sp>
-        <p:nvSpPr>
-          <p:cNvPr id="9" name="Text 6"/>
-          <p:cNvSpPr/>
-          <p:nvPr/>
-        </p:nvSpPr>
-        <p:spPr>
-          <a:xfrm>
-            <a:off x="952500" y="2549525"/>
-            <a:ext cx="12753975" cy="952500"/>
-          </a:xfrm>
-          <a:prstGeom prst="rect">
-            <a:avLst/>
-          </a:prstGeom>
-          <a:noFill/>
-          <a:ln/>
-        </p:spPr>
-        <p:txBody>
-          <a:bodyPr wrap="square" lIns="25400" tIns="25400" rIns="25400" bIns="25400" rtlCol="0" anchor="t">
-            <a:normAutofit/>
-          </a:bodyPr>
-          <a:lstStyle/>
-          <a:p>
-            <a:pPr algn="l" indent="0" marL="0">
-              <a:lnSpc>
-                <a:spcPct val="102857"/>
-              </a:lnSpc>
-              <a:buNone/>
-            </a:pPr>
-            <a:r>
-              <a:rPr lang="en-US" sz="2400" dirty="0">
-                <a:solidFill>
-                  <a:srgbClr val="5C6675"/>
-                </a:solidFill>
-                <a:latin typeface="Noto Sans KR" pitchFamily="34" charset="0"/>
-                <a:ea typeface="Noto Sans KR" pitchFamily="34" charset="-122"/>
-                <a:cs typeface="Noto Sans KR" pitchFamily="34" charset="-120"/>
-              </a:rPr>
-              <a:t>비정형 상담 서술문을 입력받아 분쟁 유형 분류 · 구제 성공 확률 · 법적 근거 · 내용증명 초안까지 한 번에 제공하는 AI 에이전트</a:t>
-            </a:r>
-            <a:endParaRPr lang="en-US" sz="2400" dirty="0"/>
-          </a:p>
-        </p:txBody>
-      </p:sp>
-      <p:sp>
-        <p:nvSpPr>
-          <p:cNvPr id="10" name="Shape 7"/>
-          <p:cNvSpPr/>
-          <p:nvPr/>
-        </p:nvSpPr>
-        <p:spPr>
-          <a:xfrm>
-            <a:off x="952500" y="3997325"/>
-            <a:ext cx="5283200" cy="2628106"/>
-          </a:xfrm>
-          <a:prstGeom prst="roundRect">
-            <a:avLst>
-              <a:gd name="adj" fmla="val 5799"/>
-            </a:avLst>
-          </a:prstGeom>
-          <a:solidFill>
-            <a:srgbClr val="F7F8FB"/>
-          </a:solidFill>
-          <a:ln/>
-        </p:spPr>
-      </p:sp>
-      <p:pic>
-        <p:nvPicPr>
-          <p:cNvPr id="11" name="Image 1" descr="preencoded.png">    </p:cNvPr>
+          <p:cNvPr id="7" name="Image 0" descr="preencoded.png"/>
           <p:cNvPicPr>
             <a:picLocks noChangeAspect="1"/>
           </p:cNvPicPr>
@@ -8880,8 +8425,8 @@
         </p:blipFill>
         <p:spPr>
           <a:xfrm>
-            <a:off x="1276350" y="4340225"/>
-            <a:ext cx="419100" cy="419100"/>
+            <a:off x="16897350" y="533400"/>
+            <a:ext cx="438150" cy="438150"/>
           </a:xfrm>
           <a:prstGeom prst="rect">
             <a:avLst/>
@@ -8890,32 +8435,35 @@
       </p:pic>
       <p:sp>
         <p:nvSpPr>
-          <p:cNvPr id="12" name="Text 8"/>
-          <p:cNvSpPr/>
-          <p:nvPr/>
-        </p:nvSpPr>
-        <p:spPr>
-          <a:xfrm>
-            <a:off x="1276350" y="4930775"/>
-            <a:ext cx="5099050" cy="450850"/>
-          </a:xfrm>
-          <a:prstGeom prst="rect">
-            <a:avLst/>
-          </a:prstGeom>
-          <a:noFill/>
-          <a:ln/>
-        </p:spPr>
-        <p:txBody>
-          <a:bodyPr wrap="square" lIns="25400" tIns="25400" rIns="25400" bIns="25400" rtlCol="0" anchor="t">
-            <a:normAutofit/>
-          </a:bodyPr>
-          <a:lstStyle/>
-          <a:p>
-            <a:pPr algn="l" indent="0" marL="0">
-              <a:buNone/>
-            </a:pPr>
-            <a:r>
-              <a:rPr lang="en-US" sz="2250" b="1" dirty="0">
+          <p:cNvPr id="8" name="Text 5"/>
+          <p:cNvSpPr/>
+          <p:nvPr/>
+        </p:nvSpPr>
+        <p:spPr>
+          <a:xfrm>
+            <a:off x="952500" y="1701800"/>
+            <a:ext cx="18021300" cy="695325"/>
+          </a:xfrm>
+          <a:prstGeom prst="rect">
+            <a:avLst/>
+          </a:prstGeom>
+          <a:noFill/>
+          <a:ln/>
+        </p:spPr>
+        <p:txBody>
+          <a:bodyPr wrap="square" lIns="25400" tIns="25400" rIns="25400" bIns="25400" rtlCol="0" anchor="t">
+            <a:normAutofit/>
+          </a:bodyPr>
+          <a:lstStyle/>
+          <a:p>
+            <a:pPr marL="0" indent="0" algn="l">
+              <a:lnSpc>
+                <a:spcPct val="79615"/>
+              </a:lnSpc>
+              <a:buNone/>
+            </a:pPr>
+            <a:r>
+              <a:rPr lang="en-US" sz="4500" b="1" kern="0" spc="-90" dirty="0">
                 <a:solidFill>
                   <a:srgbClr val="10151F"/>
                 </a:solidFill>
@@ -8923,43 +8471,43 @@
                 <a:ea typeface="Noto Sans KR" pitchFamily="34" charset="-122"/>
                 <a:cs typeface="Noto Sans KR" pitchFamily="34" charset="-120"/>
               </a:rPr>
-              <a:t>상담 내용은 비정형 텍스트</a:t>
-            </a:r>
-            <a:endParaRPr lang="en-US" sz="2250" dirty="0"/>
-          </a:p>
-        </p:txBody>
-      </p:sp>
-      <p:sp>
-        <p:nvSpPr>
-          <p:cNvPr id="13" name="Text 9"/>
-          <p:cNvSpPr/>
-          <p:nvPr/>
-        </p:nvSpPr>
-        <p:spPr>
-          <a:xfrm>
-            <a:off x="1276350" y="5514975"/>
-            <a:ext cx="4774565" cy="805656"/>
-          </a:xfrm>
-          <a:prstGeom prst="rect">
-            <a:avLst/>
-          </a:prstGeom>
-          <a:noFill/>
-          <a:ln/>
-        </p:spPr>
-        <p:txBody>
-          <a:bodyPr wrap="square" lIns="25400" tIns="25400" rIns="25400" bIns="25400" rtlCol="0" anchor="t">
-            <a:normAutofit/>
-          </a:bodyPr>
-          <a:lstStyle/>
-          <a:p>
-            <a:pPr algn="l" indent="0" marL="0">
+              <a:t>주제 및 추진 배경</a:t>
+            </a:r>
+            <a:endParaRPr lang="en-US" sz="4500" dirty="0"/>
+          </a:p>
+        </p:txBody>
+      </p:sp>
+      <p:sp>
+        <p:nvSpPr>
+          <p:cNvPr id="9" name="Text 6"/>
+          <p:cNvSpPr/>
+          <p:nvPr/>
+        </p:nvSpPr>
+        <p:spPr>
+          <a:xfrm>
+            <a:off x="952500" y="2549525"/>
+            <a:ext cx="12753975" cy="952500"/>
+          </a:xfrm>
+          <a:prstGeom prst="rect">
+            <a:avLst/>
+          </a:prstGeom>
+          <a:noFill/>
+          <a:ln/>
+        </p:spPr>
+        <p:txBody>
+          <a:bodyPr wrap="square" lIns="25400" tIns="25400" rIns="25400" bIns="25400" rtlCol="0" anchor="t">
+            <a:normAutofit/>
+          </a:bodyPr>
+          <a:lstStyle/>
+          <a:p>
+            <a:pPr marL="0" indent="0" algn="l">
               <a:lnSpc>
-                <a:spcPct val="107946"/>
+                <a:spcPct val="102857"/>
               </a:lnSpc>
               <a:buNone/>
             </a:pPr>
             <a:r>
-              <a:rPr lang="en-US" sz="1950" dirty="0">
+              <a:rPr lang="en-US" sz="2400" dirty="0">
                 <a:solidFill>
                   <a:srgbClr val="5C6675"/>
                 </a:solidFill>
@@ -8967,21 +8515,21 @@
                 <a:ea typeface="Noto Sans KR" pitchFamily="34" charset="-122"/>
                 <a:cs typeface="Noto Sans KR" pitchFamily="34" charset="-120"/>
               </a:rPr>
-              <a:t>사안마다 서술 방식이 달라 유형 분류와 선례 대조가 사람 손을 거쳐야 했다.</a:t>
-            </a:r>
-            <a:endParaRPr lang="en-US" sz="1950" dirty="0"/>
-          </a:p>
-        </p:txBody>
-      </p:sp>
-      <p:sp>
-        <p:nvSpPr>
-          <p:cNvPr id="14" name="Shape 10"/>
-          <p:cNvSpPr/>
-          <p:nvPr/>
-        </p:nvSpPr>
-        <p:spPr>
-          <a:xfrm>
-            <a:off x="6502400" y="3997325"/>
+              <a:t>비정형 상담 서술문을 입력받아 분쟁 유형 분류 · 구제 성공 확률 · 법적 근거 · 내용증명 초안까지 한 번에 제공하는 AI 에이전트</a:t>
+            </a:r>
+            <a:endParaRPr lang="en-US" sz="2400" dirty="0"/>
+          </a:p>
+        </p:txBody>
+      </p:sp>
+      <p:sp>
+        <p:nvSpPr>
+          <p:cNvPr id="10" name="Shape 7"/>
+          <p:cNvSpPr/>
+          <p:nvPr/>
+        </p:nvSpPr>
+        <p:spPr>
+          <a:xfrm>
+            <a:off x="952500" y="3997325"/>
             <a:ext cx="5283200" cy="2628106"/>
           </a:xfrm>
           <a:prstGeom prst="roundRect">
@@ -8997,7 +8545,7 @@
       </p:sp>
       <p:pic>
         <p:nvPicPr>
-          <p:cNvPr id="15" name="Image 2" descr="preencoded.png">    </p:cNvPr>
+          <p:cNvPr id="11" name="Image 1" descr="preencoded.png"/>
           <p:cNvPicPr>
             <a:picLocks noChangeAspect="1"/>
           </p:cNvPicPr>
@@ -9017,7 +8565,7 @@
         </p:blipFill>
         <p:spPr>
           <a:xfrm>
-            <a:off x="6826250" y="4340225"/>
+            <a:off x="1276350" y="4340225"/>
             <a:ext cx="419100" cy="419100"/>
           </a:xfrm>
           <a:prstGeom prst="rect">
@@ -9027,13 +8575,13 @@
       </p:pic>
       <p:sp>
         <p:nvSpPr>
-          <p:cNvPr id="16" name="Text 11"/>
-          <p:cNvSpPr/>
-          <p:nvPr/>
-        </p:nvSpPr>
-        <p:spPr>
-          <a:xfrm>
-            <a:off x="6826250" y="4930775"/>
+          <p:cNvPr id="12" name="Text 8"/>
+          <p:cNvSpPr/>
+          <p:nvPr/>
+        </p:nvSpPr>
+        <p:spPr>
+          <a:xfrm>
+            <a:off x="1276350" y="4930775"/>
             <a:ext cx="5099050" cy="450850"/>
           </a:xfrm>
           <a:prstGeom prst="rect">
@@ -9048,7 +8596,7 @@
           </a:bodyPr>
           <a:lstStyle/>
           <a:p>
-            <a:pPr algn="l" indent="0" marL="0">
+            <a:pPr marL="0" indent="0" algn="l">
               <a:buNone/>
             </a:pPr>
             <a:r>
@@ -9060,7 +8608,7 @@
                 <a:ea typeface="Noto Sans KR" pitchFamily="34" charset="-122"/>
                 <a:cs typeface="Noto Sans KR" pitchFamily="34" charset="-120"/>
               </a:rPr>
-              <a:t>법령 근거 확인의 장벽</a:t>
+              <a:t>상담 내용은 비정형 텍스트</a:t>
             </a:r>
             <a:endParaRPr lang="en-US" sz="2250" dirty="0"/>
           </a:p>
@@ -9068,13 +8616,13 @@
       </p:sp>
       <p:sp>
         <p:nvSpPr>
-          <p:cNvPr id="17" name="Text 12"/>
-          <p:cNvSpPr/>
-          <p:nvPr/>
-        </p:nvSpPr>
-        <p:spPr>
-          <a:xfrm>
-            <a:off x="6826250" y="5514975"/>
+          <p:cNvPr id="13" name="Text 9"/>
+          <p:cNvSpPr/>
+          <p:nvPr/>
+        </p:nvSpPr>
+        <p:spPr>
+          <a:xfrm>
+            <a:off x="1276350" y="5514975"/>
             <a:ext cx="4774565" cy="805656"/>
           </a:xfrm>
           <a:prstGeom prst="rect">
@@ -9089,7 +8637,7 @@
           </a:bodyPr>
           <a:lstStyle/>
           <a:p>
-            <a:pPr algn="l" indent="0" marL="0">
+            <a:pPr marL="0" indent="0" algn="l">
               <a:lnSpc>
                 <a:spcPct val="107946"/>
               </a:lnSpc>
@@ -9104,7 +8652,7 @@
                 <a:ea typeface="Noto Sans KR" pitchFamily="34" charset="-122"/>
                 <a:cs typeface="Noto Sans KR" pitchFamily="34" charset="-120"/>
               </a:rPr>
-              <a:t>소비자분쟁해결기준의 어느 조항이 자기 사안에 적용되는지 일반 소비자가 찾기 어렵다.</a:t>
+              <a:t>사안마다 서술 방식이 달라 유형 분류와 선례 대조가 사람 손을 거쳐야 했다.</a:t>
             </a:r>
             <a:endParaRPr lang="en-US" sz="1950" dirty="0"/>
           </a:p>
@@ -9112,13 +8660,13 @@
       </p:sp>
       <p:sp>
         <p:nvSpPr>
-          <p:cNvPr id="18" name="Shape 13"/>
-          <p:cNvSpPr/>
-          <p:nvPr/>
-        </p:nvSpPr>
-        <p:spPr>
-          <a:xfrm>
-            <a:off x="12052300" y="3997325"/>
+          <p:cNvPr id="14" name="Shape 10"/>
+          <p:cNvSpPr/>
+          <p:nvPr/>
+        </p:nvSpPr>
+        <p:spPr>
+          <a:xfrm>
+            <a:off x="6502400" y="3997325"/>
             <a:ext cx="5283200" cy="2628106"/>
           </a:xfrm>
           <a:prstGeom prst="roundRect">
@@ -9134,7 +8682,7 @@
       </p:sp>
       <p:pic>
         <p:nvPicPr>
-          <p:cNvPr id="19" name="Image 3" descr="preencoded.png">    </p:cNvPr>
+          <p:cNvPr id="15" name="Image 2" descr="preencoded.png"/>
           <p:cNvPicPr>
             <a:picLocks noChangeAspect="1"/>
           </p:cNvPicPr>
@@ -9154,7 +8702,7 @@
         </p:blipFill>
         <p:spPr>
           <a:xfrm>
-            <a:off x="12376150" y="4340225"/>
+            <a:off x="6826250" y="4340225"/>
             <a:ext cx="419100" cy="419100"/>
           </a:xfrm>
           <a:prstGeom prst="rect">
@@ -9164,13 +8712,13 @@
       </p:pic>
       <p:sp>
         <p:nvSpPr>
-          <p:cNvPr id="20" name="Text 14"/>
-          <p:cNvSpPr/>
-          <p:nvPr/>
-        </p:nvSpPr>
-        <p:spPr>
-          <a:xfrm>
-            <a:off x="12376150" y="4930775"/>
+          <p:cNvPr id="16" name="Text 11"/>
+          <p:cNvSpPr/>
+          <p:nvPr/>
+        </p:nvSpPr>
+        <p:spPr>
+          <a:xfrm>
+            <a:off x="6826250" y="4930775"/>
             <a:ext cx="5099050" cy="450850"/>
           </a:xfrm>
           <a:prstGeom prst="rect">
@@ -9185,7 +8733,7 @@
           </a:bodyPr>
           <a:lstStyle/>
           <a:p>
-            <a:pPr algn="l" indent="0" marL="0">
+            <a:pPr marL="0" indent="0" algn="l">
               <a:buNone/>
             </a:pPr>
             <a:r>
@@ -9197,7 +8745,7 @@
                 <a:ea typeface="Noto Sans KR" pitchFamily="34" charset="-122"/>
                 <a:cs typeface="Noto Sans KR" pitchFamily="34" charset="-120"/>
               </a:rPr>
-              <a:t>대응 문서 작성 부담</a:t>
+              <a:t>법령 근거 확인의 장벽</a:t>
             </a:r>
             <a:endParaRPr lang="en-US" sz="2250" dirty="0"/>
           </a:p>
@@ -9205,13 +8753,13 @@
       </p:sp>
       <p:sp>
         <p:nvSpPr>
-          <p:cNvPr id="21" name="Text 15"/>
-          <p:cNvSpPr/>
-          <p:nvPr/>
-        </p:nvSpPr>
-        <p:spPr>
-          <a:xfrm>
-            <a:off x="12376150" y="5514975"/>
+          <p:cNvPr id="17" name="Text 12"/>
+          <p:cNvSpPr/>
+          <p:nvPr/>
+        </p:nvSpPr>
+        <p:spPr>
+          <a:xfrm>
+            <a:off x="6826250" y="5514975"/>
             <a:ext cx="4774565" cy="805656"/>
           </a:xfrm>
           <a:prstGeom prst="rect">
@@ -9226,7 +8774,7 @@
           </a:bodyPr>
           <a:lstStyle/>
           <a:p>
-            <a:pPr algn="l" indent="0" marL="0">
+            <a:pPr marL="0" indent="0" algn="l">
               <a:lnSpc>
                 <a:spcPct val="107946"/>
               </a:lnSpc>
@@ -9241,6 +8789,143 @@
                 <a:ea typeface="Noto Sans KR" pitchFamily="34" charset="-122"/>
                 <a:cs typeface="Noto Sans KR" pitchFamily="34" charset="-120"/>
               </a:rPr>
+              <a:t>소비자분쟁해결기준의 어느 조항이 자기 사안에 적용되는지 일반 소비자가 찾기 어렵다.</a:t>
+            </a:r>
+            <a:endParaRPr lang="en-US" sz="1950" dirty="0"/>
+          </a:p>
+        </p:txBody>
+      </p:sp>
+      <p:sp>
+        <p:nvSpPr>
+          <p:cNvPr id="18" name="Shape 13"/>
+          <p:cNvSpPr/>
+          <p:nvPr/>
+        </p:nvSpPr>
+        <p:spPr>
+          <a:xfrm>
+            <a:off x="12052300" y="3997325"/>
+            <a:ext cx="5283200" cy="2628106"/>
+          </a:xfrm>
+          <a:prstGeom prst="roundRect">
+            <a:avLst>
+              <a:gd name="adj" fmla="val 5799"/>
+            </a:avLst>
+          </a:prstGeom>
+          <a:solidFill>
+            <a:srgbClr val="F7F8FB"/>
+          </a:solidFill>
+          <a:ln/>
+        </p:spPr>
+      </p:sp>
+      <p:pic>
+        <p:nvPicPr>
+          <p:cNvPr id="19" name="Image 3" descr="preencoded.png"/>
+          <p:cNvPicPr>
+            <a:picLocks noChangeAspect="1"/>
+          </p:cNvPicPr>
+          <p:nvPr/>
+        </p:nvPicPr>
+        <p:blipFill>
+          <a:blip r:embed="rId9">
+            <a:extLst>
+              <a:ext uri="{96DAC541-7B7A-43D3-8B79-37D633B846F1}">
+                <asvg:svgBlip xmlns:asvg="http://schemas.microsoft.com/office/drawing/2016/SVG/main" r:embed="rId10"/>
+              </a:ext>
+            </a:extLst>
+          </a:blip>
+          <a:stretch>
+            <a:fillRect/>
+          </a:stretch>
+        </p:blipFill>
+        <p:spPr>
+          <a:xfrm>
+            <a:off x="12376150" y="4340225"/>
+            <a:ext cx="419100" cy="419100"/>
+          </a:xfrm>
+          <a:prstGeom prst="rect">
+            <a:avLst/>
+          </a:prstGeom>
+        </p:spPr>
+      </p:pic>
+      <p:sp>
+        <p:nvSpPr>
+          <p:cNvPr id="20" name="Text 14"/>
+          <p:cNvSpPr/>
+          <p:nvPr/>
+        </p:nvSpPr>
+        <p:spPr>
+          <a:xfrm>
+            <a:off x="12376150" y="4930775"/>
+            <a:ext cx="5099050" cy="450850"/>
+          </a:xfrm>
+          <a:prstGeom prst="rect">
+            <a:avLst/>
+          </a:prstGeom>
+          <a:noFill/>
+          <a:ln/>
+        </p:spPr>
+        <p:txBody>
+          <a:bodyPr wrap="square" lIns="25400" tIns="25400" rIns="25400" bIns="25400" rtlCol="0" anchor="t">
+            <a:normAutofit/>
+          </a:bodyPr>
+          <a:lstStyle/>
+          <a:p>
+            <a:pPr marL="0" indent="0" algn="l">
+              <a:buNone/>
+            </a:pPr>
+            <a:r>
+              <a:rPr lang="en-US" sz="2250" b="1" dirty="0">
+                <a:solidFill>
+                  <a:srgbClr val="10151F"/>
+                </a:solidFill>
+                <a:latin typeface="Noto Sans KR" pitchFamily="34" charset="0"/>
+                <a:ea typeface="Noto Sans KR" pitchFamily="34" charset="-122"/>
+                <a:cs typeface="Noto Sans KR" pitchFamily="34" charset="-120"/>
+              </a:rPr>
+              <a:t>대응 문서 작성 부담</a:t>
+            </a:r>
+            <a:endParaRPr lang="en-US" sz="2250" dirty="0"/>
+          </a:p>
+        </p:txBody>
+      </p:sp>
+      <p:sp>
+        <p:nvSpPr>
+          <p:cNvPr id="21" name="Text 15"/>
+          <p:cNvSpPr/>
+          <p:nvPr/>
+        </p:nvSpPr>
+        <p:spPr>
+          <a:xfrm>
+            <a:off x="12376150" y="5514975"/>
+            <a:ext cx="4774565" cy="805656"/>
+          </a:xfrm>
+          <a:prstGeom prst="rect">
+            <a:avLst/>
+          </a:prstGeom>
+          <a:noFill/>
+          <a:ln/>
+        </p:spPr>
+        <p:txBody>
+          <a:bodyPr wrap="square" lIns="25400" tIns="25400" rIns="25400" bIns="25400" rtlCol="0" anchor="t">
+            <a:normAutofit/>
+          </a:bodyPr>
+          <a:lstStyle/>
+          <a:p>
+            <a:pPr marL="0" indent="0" algn="l">
+              <a:lnSpc>
+                <a:spcPct val="107946"/>
+              </a:lnSpc>
+              <a:buNone/>
+            </a:pPr>
+            <a:r>
+              <a:rPr lang="en-US" sz="1950" dirty="0">
+                <a:solidFill>
+                  <a:srgbClr val="5C6675"/>
+                </a:solidFill>
+                <a:latin typeface="Noto Sans KR" pitchFamily="34" charset="0"/>
+                <a:ea typeface="Noto Sans KR" pitchFamily="34" charset="-122"/>
+                <a:cs typeface="Noto Sans KR" pitchFamily="34" charset="-120"/>
+              </a:rPr>
               <a:t>환급 요구를 공식화하는 내용증명을 처음 쓰는 소비자에게는 진입장벽이 크다.</a:t>
             </a:r>
             <a:endParaRPr lang="en-US" sz="1950" dirty="0"/>
@@ -9286,15 +8971,15 @@
         </p:spPr>
         <p:txBody>
           <a:bodyPr wrap="square" lIns="25400" tIns="25400" rIns="25400" bIns="25400" rtlCol="0" anchor="t">
-            <a:normAutofit/>
-          </a:bodyPr>
-          <a:lstStyle/>
-          <a:p>
-            <a:pPr algn="l" indent="0" marL="0">
-              <a:buNone/>
-            </a:pPr>
-            <a:r>
-              <a:rPr lang="en-US" sz="3900" b="1" spc="-78" kern="0" dirty="0">
+            <a:normAutofit lnSpcReduction="10000"/>
+          </a:bodyPr>
+          <a:lstStyle/>
+          <a:p>
+            <a:pPr marL="0" indent="0" algn="l">
+              <a:buNone/>
+            </a:pPr>
+            <a:r>
+              <a:rPr lang="en-US" sz="3900" b="1" kern="0" spc="-78" dirty="0">
                 <a:solidFill>
                   <a:srgbClr val="1D3A8F"/>
                 </a:solidFill>
@@ -9331,7 +9016,7 @@
           </a:bodyPr>
           <a:lstStyle/>
           <a:p>
-            <a:pPr algn="l" indent="0" marL="0">
+            <a:pPr marL="0" indent="0" algn="l">
               <a:buNone/>
             </a:pPr>
             <a:r>
@@ -9368,15 +9053,15 @@
         </p:spPr>
         <p:txBody>
           <a:bodyPr wrap="square" lIns="25400" tIns="25400" rIns="25400" bIns="25400" rtlCol="0" anchor="t">
-            <a:normAutofit/>
-          </a:bodyPr>
-          <a:lstStyle/>
-          <a:p>
-            <a:pPr algn="l" indent="0" marL="0">
-              <a:buNone/>
-            </a:pPr>
-            <a:r>
-              <a:rPr lang="en-US" sz="3900" b="1" spc="-78" kern="0" dirty="0">
+            <a:normAutofit lnSpcReduction="10000"/>
+          </a:bodyPr>
+          <a:lstStyle/>
+          <a:p>
+            <a:pPr marL="0" indent="0" algn="l">
+              <a:buNone/>
+            </a:pPr>
+            <a:r>
+              <a:rPr lang="en-US" sz="3900" b="1" kern="0" spc="-78" dirty="0">
                 <a:solidFill>
                   <a:srgbClr val="1D3A8F"/>
                 </a:solidFill>
@@ -9413,7 +9098,7 @@
           </a:bodyPr>
           <a:lstStyle/>
           <a:p>
-            <a:pPr algn="l" indent="0" marL="0">
+            <a:pPr marL="0" indent="0" algn="l">
               <a:buNone/>
             </a:pPr>
             <a:r>
@@ -9450,15 +9135,15 @@
         </p:spPr>
         <p:txBody>
           <a:bodyPr wrap="square" lIns="25400" tIns="25400" rIns="25400" bIns="25400" rtlCol="0" anchor="t">
-            <a:normAutofit/>
-          </a:bodyPr>
-          <a:lstStyle/>
-          <a:p>
-            <a:pPr algn="l" indent="0" marL="0">
-              <a:buNone/>
-            </a:pPr>
-            <a:r>
-              <a:rPr lang="en-US" sz="3900" b="1" spc="-78" kern="0" dirty="0">
+            <a:normAutofit lnSpcReduction="10000"/>
+          </a:bodyPr>
+          <a:lstStyle/>
+          <a:p>
+            <a:pPr marL="0" indent="0" algn="l">
+              <a:buNone/>
+            </a:pPr>
+            <a:r>
+              <a:rPr lang="en-US" sz="3900" b="1" kern="0" spc="-78" dirty="0">
                 <a:solidFill>
                   <a:srgbClr val="1D3A8F"/>
                 </a:solidFill>
@@ -9495,7 +9180,7 @@
           </a:bodyPr>
           <a:lstStyle/>
           <a:p>
-            <a:pPr algn="l" indent="0" marL="0">
+            <a:pPr marL="0" indent="0" algn="l">
               <a:buNone/>
             </a:pPr>
             <a:r>
@@ -9532,15 +9217,15 @@
         </p:spPr>
         <p:txBody>
           <a:bodyPr wrap="square" lIns="25400" tIns="25400" rIns="25400" bIns="25400" rtlCol="0" anchor="t">
-            <a:normAutofit/>
-          </a:bodyPr>
-          <a:lstStyle/>
-          <a:p>
-            <a:pPr algn="l" indent="0" marL="0">
-              <a:buNone/>
-            </a:pPr>
-            <a:r>
-              <a:rPr lang="en-US" sz="3900" b="1" spc="-78" kern="0" dirty="0">
+            <a:normAutofit lnSpcReduction="10000"/>
+          </a:bodyPr>
+          <a:lstStyle/>
+          <a:p>
+            <a:pPr marL="0" indent="0" algn="l">
+              <a:buNone/>
+            </a:pPr>
+            <a:r>
+              <a:rPr lang="en-US" sz="3900" b="1" kern="0" spc="-78" dirty="0">
                 <a:solidFill>
                   <a:srgbClr val="0F9D76"/>
                 </a:solidFill>
@@ -9577,7 +9262,7 @@
           </a:bodyPr>
           <a:lstStyle/>
           <a:p>
-            <a:pPr algn="l" indent="0" marL="0">
+            <a:pPr marL="0" indent="0" algn="l">
               <a:buNone/>
             </a:pPr>
             <a:r>
@@ -9611,6 +9296,7 @@
         <a:solidFill>
           <a:srgbClr val="FFFFFF"/>
         </a:solidFill>
+        <a:effectLst/>
       </p:bgPr>
     </p:bg>
     <p:spTree>
@@ -9692,7 +9378,7 @@
           </a:bodyPr>
           <a:lstStyle/>
           <a:p>
-            <a:pPr algn="l" indent="0" marL="0">
+            <a:pPr marL="0" indent="0" algn="l">
               <a:buNone/>
             </a:pPr>
             <a:r>
@@ -9733,7 +9419,7 @@
           </a:bodyPr>
           <a:lstStyle/>
           <a:p>
-            <a:pPr algn="l" indent="0" marL="0">
+            <a:pPr marL="0" indent="0" algn="l">
               <a:buNone/>
             </a:pPr>
             <a:r>
@@ -9774,7 +9460,7 @@
           </a:bodyPr>
           <a:lstStyle/>
           <a:p>
-            <a:pPr algn="l" indent="0" marL="0">
+            <a:pPr marL="0" indent="0" algn="l">
               <a:buNone/>
             </a:pPr>
             <a:r>
@@ -9794,17 +9480,17 @@
       </p:sp>
       <p:pic>
         <p:nvPicPr>
-          <p:cNvPr id="7" name="Image 0" descr="preencoded.png">    </p:cNvPr>
+          <p:cNvPr id="7" name="Image 0" descr="preencoded.png"/>
           <p:cNvPicPr>
             <a:picLocks noChangeAspect="1"/>
           </p:cNvPicPr>
           <p:nvPr/>
         </p:nvPicPr>
         <p:blipFill>
-          <a:blip r:embed="rId1">
+          <a:blip r:embed="rId3">
             <a:extLst>
               <a:ext uri="{96DAC541-7B7A-43D3-8B79-37D633B846F1}">
-                <asvg:svgBlip xmlns:asvg="http://schemas.microsoft.com/office/drawing/2016/SVG/main" r:embed="rId2"/>
+                <asvg:svgBlip xmlns:asvg="http://schemas.microsoft.com/office/drawing/2016/SVG/main" r:embed="rId4"/>
               </a:ext>
             </a:extLst>
           </a:blip>
@@ -9841,15 +9527,15 @@
         </p:spPr>
         <p:txBody>
           <a:bodyPr wrap="square" lIns="25400" tIns="25400" rIns="25400" bIns="25400" rtlCol="0" anchor="t">
-            <a:normAutofit/>
-          </a:bodyPr>
-          <a:lstStyle/>
-          <a:p>
-            <a:pPr algn="l" indent="0" marL="0">
-              <a:buNone/>
-            </a:pPr>
-            <a:r>
-              <a:rPr lang="en-US" sz="4500" b="1" spc="-90" kern="0" dirty="0">
+            <a:normAutofit lnSpcReduction="10000"/>
+          </a:bodyPr>
+          <a:lstStyle/>
+          <a:p>
+            <a:pPr marL="0" indent="0" algn="l">
+              <a:buNone/>
+            </a:pPr>
+            <a:r>
+              <a:rPr lang="en-US" sz="4500" b="1" kern="0" spc="-90" dirty="0">
                 <a:solidFill>
                   <a:srgbClr val="10151F"/>
                 </a:solidFill>
@@ -9886,7 +9572,7 @@
           </a:bodyPr>
           <a:lstStyle/>
           <a:p>
-            <a:pPr algn="l" indent="0" marL="0">
+            <a:pPr marL="0" indent="0" algn="l">
               <a:lnSpc>
                 <a:spcPct val="102857"/>
               </a:lnSpc>
@@ -9976,7 +9662,7 @@
           </a:bodyPr>
           <a:lstStyle/>
           <a:p>
-            <a:pPr algn="ctr" indent="0" marL="0">
+            <a:pPr marL="0" indent="0" algn="ctr">
               <a:buNone/>
             </a:pPr>
             <a:r>
@@ -10013,15 +9699,15 @@
         </p:spPr>
         <p:txBody>
           <a:bodyPr wrap="square" lIns="25400" tIns="25400" rIns="25400" bIns="25400" rtlCol="0" anchor="t">
-            <a:normAutofit/>
-          </a:bodyPr>
-          <a:lstStyle/>
-          <a:p>
-            <a:pPr algn="l" indent="0" marL="0">
-              <a:buNone/>
-            </a:pPr>
-            <a:r>
-              <a:rPr lang="en-US" sz="2550" b="1" spc="-51" kern="0" dirty="0">
+            <a:normAutofit lnSpcReduction="10000"/>
+          </a:bodyPr>
+          <a:lstStyle/>
+          <a:p>
+            <a:pPr marL="0" indent="0" algn="l">
+              <a:buNone/>
+            </a:pPr>
+            <a:r>
+              <a:rPr lang="en-US" sz="2550" b="1" kern="0" spc="-51" dirty="0">
                 <a:solidFill>
                   <a:srgbClr val="10151F"/>
                 </a:solidFill>
@@ -10058,7 +9744,7 @@
           </a:bodyPr>
           <a:lstStyle/>
           <a:p>
-            <a:pPr algn="l" indent="0" marL="0">
+            <a:pPr marL="0" indent="0" algn="l">
               <a:buNone/>
             </a:pPr>
             <a:r>
@@ -10099,7 +9785,7 @@
           </a:bodyPr>
           <a:lstStyle/>
           <a:p>
-            <a:pPr algn="l" indent="0" marL="0">
+            <a:pPr marL="0" indent="0" algn="l">
               <a:buNone/>
             </a:pPr>
             <a:r>
@@ -10140,7 +9826,7 @@
           </a:bodyPr>
           <a:lstStyle/>
           <a:p>
-            <a:pPr algn="l" indent="0" marL="0">
+            <a:pPr marL="0" indent="0" algn="l">
               <a:lnSpc>
                 <a:spcPct val="104464"/>
               </a:lnSpc>
@@ -10184,7 +9870,7 @@
           </a:bodyPr>
           <a:lstStyle/>
           <a:p>
-            <a:pPr algn="l" indent="0" marL="0">
+            <a:pPr marL="0" indent="0" algn="l">
               <a:lnSpc>
                 <a:spcPct val="104464"/>
               </a:lnSpc>
@@ -10228,7 +9914,7 @@
           </a:bodyPr>
           <a:lstStyle/>
           <a:p>
-            <a:pPr algn="l" indent="0" marL="0">
+            <a:pPr marL="0" indent="0" algn="l">
               <a:lnSpc>
                 <a:spcPct val="104464"/>
               </a:lnSpc>
@@ -10272,7 +9958,7 @@
           </a:bodyPr>
           <a:lstStyle/>
           <a:p>
-            <a:pPr algn="l" indent="0" marL="0">
+            <a:pPr marL="0" indent="0" algn="l">
               <a:lnSpc>
                 <a:spcPct val="104464"/>
               </a:lnSpc>
@@ -10362,7 +10048,7 @@
           </a:bodyPr>
           <a:lstStyle/>
           <a:p>
-            <a:pPr algn="ctr" indent="0" marL="0">
+            <a:pPr marL="0" indent="0" algn="ctr">
               <a:buNone/>
             </a:pPr>
             <a:r>
@@ -10399,15 +10085,15 @@
         </p:spPr>
         <p:txBody>
           <a:bodyPr wrap="square" lIns="25400" tIns="25400" rIns="25400" bIns="25400" rtlCol="0" anchor="t">
-            <a:normAutofit/>
-          </a:bodyPr>
-          <a:lstStyle/>
-          <a:p>
-            <a:pPr algn="l" indent="0" marL="0">
-              <a:buNone/>
-            </a:pPr>
-            <a:r>
-              <a:rPr lang="en-US" sz="2550" b="1" spc="-51" kern="0" dirty="0">
+            <a:normAutofit lnSpcReduction="10000"/>
+          </a:bodyPr>
+          <a:lstStyle/>
+          <a:p>
+            <a:pPr marL="0" indent="0" algn="l">
+              <a:buNone/>
+            </a:pPr>
+            <a:r>
+              <a:rPr lang="en-US" sz="2550" b="1" kern="0" spc="-51" dirty="0">
                 <a:solidFill>
                   <a:srgbClr val="10151F"/>
                 </a:solidFill>
@@ -10444,7 +10130,7 @@
           </a:bodyPr>
           <a:lstStyle/>
           <a:p>
-            <a:pPr algn="l" indent="0" marL="0">
+            <a:pPr marL="0" indent="0" algn="l">
               <a:buNone/>
             </a:pPr>
             <a:r>
@@ -10485,7 +10171,7 @@
           </a:bodyPr>
           <a:lstStyle/>
           <a:p>
-            <a:pPr algn="l" indent="0" marL="0">
+            <a:pPr marL="0" indent="0" algn="l">
               <a:buNone/>
             </a:pPr>
             <a:r>
@@ -10526,7 +10212,7 @@
           </a:bodyPr>
           <a:lstStyle/>
           <a:p>
-            <a:pPr algn="l" indent="0" marL="0">
+            <a:pPr marL="0" indent="0" algn="l">
               <a:lnSpc>
                 <a:spcPct val="104464"/>
               </a:lnSpc>
@@ -10570,7 +10256,7 @@
           </a:bodyPr>
           <a:lstStyle/>
           <a:p>
-            <a:pPr algn="l" indent="0" marL="0">
+            <a:pPr marL="0" indent="0" algn="l">
               <a:lnSpc>
                 <a:spcPct val="104464"/>
               </a:lnSpc>
@@ -10614,7 +10300,7 @@
           </a:bodyPr>
           <a:lstStyle/>
           <a:p>
-            <a:pPr algn="l" indent="0" marL="0">
+            <a:pPr marL="0" indent="0" algn="l">
               <a:lnSpc>
                 <a:spcPct val="104464"/>
               </a:lnSpc>
@@ -10658,7 +10344,7 @@
           </a:bodyPr>
           <a:lstStyle/>
           <a:p>
-            <a:pPr algn="l" indent="0" marL="0">
+            <a:pPr marL="0" indent="0" algn="l">
               <a:lnSpc>
                 <a:spcPct val="104464"/>
               </a:lnSpc>
@@ -10748,7 +10434,7 @@
           </a:bodyPr>
           <a:lstStyle/>
           <a:p>
-            <a:pPr algn="ctr" indent="0" marL="0">
+            <a:pPr marL="0" indent="0" algn="ctr">
               <a:buNone/>
             </a:pPr>
             <a:r>
@@ -10785,15 +10471,15 @@
         </p:spPr>
         <p:txBody>
           <a:bodyPr wrap="square" lIns="25400" tIns="25400" rIns="25400" bIns="25400" rtlCol="0" anchor="t">
-            <a:normAutofit/>
-          </a:bodyPr>
-          <a:lstStyle/>
-          <a:p>
-            <a:pPr algn="l" indent="0" marL="0">
-              <a:buNone/>
-            </a:pPr>
-            <a:r>
-              <a:rPr lang="en-US" sz="2550" b="1" spc="-51" kern="0" dirty="0">
+            <a:normAutofit lnSpcReduction="10000"/>
+          </a:bodyPr>
+          <a:lstStyle/>
+          <a:p>
+            <a:pPr marL="0" indent="0" algn="l">
+              <a:buNone/>
+            </a:pPr>
+            <a:r>
+              <a:rPr lang="en-US" sz="2550" b="1" kern="0" spc="-51" dirty="0">
                 <a:solidFill>
                   <a:srgbClr val="10151F"/>
                 </a:solidFill>
@@ -10830,7 +10516,7 @@
           </a:bodyPr>
           <a:lstStyle/>
           <a:p>
-            <a:pPr algn="l" indent="0" marL="0">
+            <a:pPr marL="0" indent="0" algn="l">
               <a:buNone/>
             </a:pPr>
             <a:r>
@@ -10871,7 +10557,7 @@
           </a:bodyPr>
           <a:lstStyle/>
           <a:p>
-            <a:pPr algn="l" indent="0" marL="0">
+            <a:pPr marL="0" indent="0" algn="l">
               <a:buNone/>
             </a:pPr>
             <a:r>
@@ -10912,7 +10598,7 @@
           </a:bodyPr>
           <a:lstStyle/>
           <a:p>
-            <a:pPr algn="l" indent="0" marL="0">
+            <a:pPr marL="0" indent="0" algn="l">
               <a:lnSpc>
                 <a:spcPct val="104464"/>
               </a:lnSpc>
@@ -10956,7 +10642,7 @@
           </a:bodyPr>
           <a:lstStyle/>
           <a:p>
-            <a:pPr algn="l" indent="0" marL="0">
+            <a:pPr marL="0" indent="0" algn="l">
               <a:lnSpc>
                 <a:spcPct val="104464"/>
               </a:lnSpc>
@@ -11000,7 +10686,7 @@
           </a:bodyPr>
           <a:lstStyle/>
           <a:p>
-            <a:pPr algn="l" indent="0" marL="0">
+            <a:pPr marL="0" indent="0" algn="l">
               <a:lnSpc>
                 <a:spcPct val="104464"/>
               </a:lnSpc>
@@ -11044,7 +10730,7 @@
           </a:bodyPr>
           <a:lstStyle/>
           <a:p>
-            <a:pPr algn="l" indent="0" marL="0">
+            <a:pPr marL="0" indent="0" algn="l">
               <a:lnSpc>
                 <a:spcPct val="104464"/>
               </a:lnSpc>
@@ -11081,6 +10767,7 @@
         <a:solidFill>
           <a:srgbClr val="FFFFFF"/>
         </a:solidFill>
+        <a:effectLst/>
       </p:bgPr>
     </p:bg>
     <p:spTree>
@@ -11162,7 +10849,7 @@
           </a:bodyPr>
           <a:lstStyle/>
           <a:p>
-            <a:pPr algn="l" indent="0" marL="0">
+            <a:pPr marL="0" indent="0" algn="l">
               <a:buNone/>
             </a:pPr>
             <a:r>
@@ -11203,7 +10890,7 @@
           </a:bodyPr>
           <a:lstStyle/>
           <a:p>
-            <a:pPr algn="l" indent="0" marL="0">
+            <a:pPr marL="0" indent="0" algn="l">
               <a:buNone/>
             </a:pPr>
             <a:r>
@@ -11244,7 +10931,7 @@
           </a:bodyPr>
           <a:lstStyle/>
           <a:p>
-            <a:pPr algn="l" indent="0" marL="0">
+            <a:pPr marL="0" indent="0" algn="l">
               <a:buNone/>
             </a:pPr>
             <a:r>
@@ -11264,17 +10951,17 @@
       </p:sp>
       <p:pic>
         <p:nvPicPr>
-          <p:cNvPr id="7" name="Image 0" descr="preencoded.png">    </p:cNvPr>
+          <p:cNvPr id="7" name="Image 0" descr="preencoded.png"/>
           <p:cNvPicPr>
             <a:picLocks noChangeAspect="1"/>
           </p:cNvPicPr>
           <p:nvPr/>
         </p:nvPicPr>
         <p:blipFill>
-          <a:blip r:embed="rId1">
+          <a:blip r:embed="rId3">
             <a:extLst>
               <a:ext uri="{96DAC541-7B7A-43D3-8B79-37D633B846F1}">
-                <asvg:svgBlip xmlns:asvg="http://schemas.microsoft.com/office/drawing/2016/SVG/main" r:embed="rId2"/>
+                <asvg:svgBlip xmlns:asvg="http://schemas.microsoft.com/office/drawing/2016/SVG/main" r:embed="rId4"/>
               </a:ext>
             </a:extLst>
           </a:blip>
@@ -11311,15 +10998,15 @@
         </p:spPr>
         <p:txBody>
           <a:bodyPr wrap="square" lIns="25400" tIns="25400" rIns="25400" bIns="25400" rtlCol="0" anchor="t">
-            <a:normAutofit/>
-          </a:bodyPr>
-          <a:lstStyle/>
-          <a:p>
-            <a:pPr algn="l" indent="0" marL="0">
-              <a:buNone/>
-            </a:pPr>
-            <a:r>
-              <a:rPr lang="en-US" sz="4500" b="1" spc="-90" kern="0" dirty="0">
+            <a:normAutofit lnSpcReduction="10000"/>
+          </a:bodyPr>
+          <a:lstStyle/>
+          <a:p>
+            <a:pPr marL="0" indent="0" algn="l">
+              <a:buNone/>
+            </a:pPr>
+            <a:r>
+              <a:rPr lang="en-US" sz="4500" b="1" kern="0" spc="-90" dirty="0">
                 <a:solidFill>
                   <a:srgbClr val="10151F"/>
                 </a:solidFill>
@@ -11356,7 +11043,7 @@
           </a:bodyPr>
           <a:lstStyle/>
           <a:p>
-            <a:pPr algn="l" indent="0" marL="0">
+            <a:pPr marL="0" indent="0" algn="l">
               <a:lnSpc>
                 <a:spcPct val="102857"/>
               </a:lnSpc>
@@ -11400,7 +11087,7 @@
           </a:bodyPr>
           <a:lstStyle/>
           <a:p>
-            <a:pPr algn="l" indent="0" marL="0">
+            <a:pPr marL="0" indent="0" algn="l">
               <a:buNone/>
             </a:pPr>
             <a:r>
@@ -11441,7 +11128,7 @@
           </a:bodyPr>
           <a:lstStyle/>
           <a:p>
-            <a:pPr algn="l" indent="0" marL="0">
+            <a:pPr marL="0" indent="0" algn="l">
               <a:buNone/>
             </a:pPr>
             <a:r>
@@ -11482,7 +11169,7 @@
           </a:bodyPr>
           <a:lstStyle/>
           <a:p>
-            <a:pPr algn="l" indent="0" marL="0">
+            <a:pPr marL="0" indent="0" algn="l">
               <a:buNone/>
             </a:pPr>
             <a:r>
@@ -11523,7 +11210,7 @@
           </a:bodyPr>
           <a:lstStyle/>
           <a:p>
-            <a:pPr algn="l" indent="0" marL="0">
+            <a:pPr marL="0" indent="0" algn="l">
               <a:buNone/>
             </a:pPr>
             <a:r>
@@ -11564,7 +11251,7 @@
           </a:bodyPr>
           <a:lstStyle/>
           <a:p>
-            <a:pPr algn="l" indent="0" marL="0">
+            <a:pPr marL="0" indent="0" algn="l">
               <a:buNone/>
             </a:pPr>
             <a:r>
@@ -11649,7 +11336,7 @@
           </a:bodyPr>
           <a:lstStyle/>
           <a:p>
-            <a:pPr algn="l" indent="0" marL="0">
+            <a:pPr marL="0" indent="0" algn="l">
               <a:buNone/>
             </a:pPr>
             <a:r>
@@ -11690,7 +11377,7 @@
           </a:bodyPr>
           <a:lstStyle/>
           <a:p>
-            <a:pPr algn="l" indent="0" marL="0">
+            <a:pPr marL="0" indent="0" algn="l">
               <a:buNone/>
             </a:pPr>
             <a:r>
@@ -11775,7 +11462,7 @@
           </a:bodyPr>
           <a:lstStyle/>
           <a:p>
-            <a:pPr algn="l" indent="0" marL="0">
+            <a:pPr marL="0" indent="0" algn="l">
               <a:buNone/>
             </a:pPr>
             <a:r>
@@ -11816,7 +11503,7 @@
           </a:bodyPr>
           <a:lstStyle/>
           <a:p>
-            <a:pPr algn="l" indent="0" marL="0">
+            <a:pPr marL="0" indent="0" algn="l">
               <a:buNone/>
             </a:pPr>
             <a:r>
@@ -11901,7 +11588,7 @@
           </a:bodyPr>
           <a:lstStyle/>
           <a:p>
-            <a:pPr algn="l" indent="0" marL="0">
+            <a:pPr marL="0" indent="0" algn="l">
               <a:buNone/>
             </a:pPr>
             <a:r>
@@ -11942,7 +11629,7 @@
           </a:bodyPr>
           <a:lstStyle/>
           <a:p>
-            <a:pPr algn="l" indent="0" marL="0">
+            <a:pPr marL="0" indent="0" algn="l">
               <a:buNone/>
             </a:pPr>
             <a:r>
@@ -12027,7 +11714,7 @@
           </a:bodyPr>
           <a:lstStyle/>
           <a:p>
-            <a:pPr algn="l" indent="0" marL="0">
+            <a:pPr marL="0" indent="0" algn="l">
               <a:buNone/>
             </a:pPr>
             <a:r>
@@ -12068,7 +11755,7 @@
           </a:bodyPr>
           <a:lstStyle/>
           <a:p>
-            <a:pPr algn="l" indent="0" marL="0">
+            <a:pPr marL="0" indent="0" algn="l">
               <a:buNone/>
             </a:pPr>
             <a:r>
@@ -12153,7 +11840,7 @@
           </a:bodyPr>
           <a:lstStyle/>
           <a:p>
-            <a:pPr algn="l" indent="0" marL="0">
+            <a:pPr marL="0" indent="0" algn="l">
               <a:buNone/>
             </a:pPr>
             <a:r>
@@ -12194,7 +11881,7 @@
           </a:bodyPr>
           <a:lstStyle/>
           <a:p>
-            <a:pPr algn="l" indent="0" marL="0">
+            <a:pPr marL="0" indent="0" algn="l">
               <a:buNone/>
             </a:pPr>
             <a:r>
@@ -12279,7 +11966,7 @@
           </a:bodyPr>
           <a:lstStyle/>
           <a:p>
-            <a:pPr algn="l" indent="0" marL="0">
+            <a:pPr marL="0" indent="0" algn="l">
               <a:buNone/>
             </a:pPr>
             <a:r>
@@ -12320,7 +12007,7 @@
           </a:bodyPr>
           <a:lstStyle/>
           <a:p>
-            <a:pPr algn="l" indent="0" marL="0">
+            <a:pPr marL="0" indent="0" algn="l">
               <a:buNone/>
             </a:pPr>
             <a:r>
@@ -12405,7 +12092,7 @@
           </a:bodyPr>
           <a:lstStyle/>
           <a:p>
-            <a:pPr algn="l" indent="0" marL="0">
+            <a:pPr marL="0" indent="0" algn="l">
               <a:buNone/>
             </a:pPr>
             <a:r>
@@ -12446,7 +12133,7 @@
           </a:bodyPr>
           <a:lstStyle/>
           <a:p>
-            <a:pPr algn="l" indent="0" marL="0">
+            <a:pPr marL="0" indent="0" algn="l">
               <a:buNone/>
             </a:pPr>
             <a:r>
@@ -12531,7 +12218,7 @@
           </a:bodyPr>
           <a:lstStyle/>
           <a:p>
-            <a:pPr algn="l" indent="0" marL="0">
+            <a:pPr marL="0" indent="0" algn="l">
               <a:buNone/>
             </a:pPr>
             <a:r>
@@ -12565,6 +12252,7 @@
         <a:solidFill>
           <a:srgbClr val="FFFFFF"/>
         </a:solidFill>
+        <a:effectLst/>
       </p:bgPr>
     </p:bg>
     <p:spTree>
@@ -12646,7 +12334,7 @@
           </a:bodyPr>
           <a:lstStyle/>
           <a:p>
-            <a:pPr algn="l" indent="0" marL="0">
+            <a:pPr marL="0" indent="0" algn="l">
               <a:buNone/>
             </a:pPr>
             <a:r>
@@ -12687,7 +12375,7 @@
           </a:bodyPr>
           <a:lstStyle/>
           <a:p>
-            <a:pPr algn="l" indent="0" marL="0">
+            <a:pPr marL="0" indent="0" algn="l">
               <a:buNone/>
             </a:pPr>
             <a:r>
@@ -12728,7 +12416,7 @@
           </a:bodyPr>
           <a:lstStyle/>
           <a:p>
-            <a:pPr algn="l" indent="0" marL="0">
+            <a:pPr marL="0" indent="0" algn="l">
               <a:buNone/>
             </a:pPr>
             <a:r>
@@ -12748,337 +12436,7 @@
       </p:sp>
       <p:pic>
         <p:nvPicPr>
-          <p:cNvPr id="7" name="Image 0" descr="preencoded.png">    </p:cNvPr>
-          <p:cNvPicPr>
-            <a:picLocks noChangeAspect="1"/>
-          </p:cNvPicPr>
-          <p:nvPr/>
-        </p:nvPicPr>
-        <p:blipFill>
-          <a:blip r:embed="rId1">
-            <a:extLst>
-              <a:ext uri="{96DAC541-7B7A-43D3-8B79-37D633B846F1}">
-                <asvg:svgBlip xmlns:asvg="http://schemas.microsoft.com/office/drawing/2016/SVG/main" r:embed="rId2"/>
-              </a:ext>
-            </a:extLst>
-          </a:blip>
-          <a:stretch>
-            <a:fillRect/>
-          </a:stretch>
-        </p:blipFill>
-        <p:spPr>
-          <a:xfrm>
-            <a:off x="16897350" y="533400"/>
-            <a:ext cx="438150" cy="438150"/>
-          </a:xfrm>
-          <a:prstGeom prst="rect">
-            <a:avLst/>
-          </a:prstGeom>
-        </p:spPr>
-      </p:pic>
-      <p:sp>
-        <p:nvSpPr>
-          <p:cNvPr id="8" name="Text 5"/>
-          <p:cNvSpPr/>
-          <p:nvPr/>
-        </p:nvSpPr>
-        <p:spPr>
-          <a:xfrm>
-            <a:off x="952500" y="1701800"/>
-            <a:ext cx="18021300" cy="723900"/>
-          </a:xfrm>
-          <a:prstGeom prst="rect">
-            <a:avLst/>
-          </a:prstGeom>
-          <a:noFill/>
-          <a:ln/>
-        </p:spPr>
-        <p:txBody>
-          <a:bodyPr wrap="square" lIns="25400" tIns="25400" rIns="25400" bIns="25400" rtlCol="0" anchor="t">
-            <a:normAutofit/>
-          </a:bodyPr>
-          <a:lstStyle/>
-          <a:p>
-            <a:pPr algn="l" indent="0" marL="0">
-              <a:buNone/>
-            </a:pPr>
-            <a:r>
-              <a:rPr lang="en-US" sz="4500" b="1" spc="-90" kern="0" dirty="0">
-                <a:solidFill>
-                  <a:srgbClr val="10151F"/>
-                </a:solidFill>
-                <a:latin typeface="Noto Sans KR" pitchFamily="34" charset="0"/>
-                <a:ea typeface="Noto Sans KR" pitchFamily="34" charset="-122"/>
-                <a:cs typeface="Noto Sans KR" pitchFamily="34" charset="-120"/>
-              </a:rPr>
-              <a:t>프로젝트 방법론과 적용 기술</a:t>
-            </a:r>
-            <a:endParaRPr lang="en-US" sz="4500" dirty="0"/>
-          </a:p>
-        </p:txBody>
-      </p:sp>
-      <p:sp>
-        <p:nvSpPr>
-          <p:cNvPr id="9" name="Text 6"/>
-          <p:cNvSpPr/>
-          <p:nvPr/>
-        </p:nvSpPr>
-        <p:spPr>
-          <a:xfrm>
-            <a:off x="952500" y="2578100"/>
-            <a:ext cx="18021300" cy="495300"/>
-          </a:xfrm>
-          <a:prstGeom prst="rect">
-            <a:avLst/>
-          </a:prstGeom>
-          <a:noFill/>
-          <a:ln/>
-        </p:spPr>
-        <p:txBody>
-          <a:bodyPr wrap="square" lIns="25400" tIns="25400" rIns="25400" bIns="25400" rtlCol="0" anchor="t">
-            <a:normAutofit/>
-          </a:bodyPr>
-          <a:lstStyle/>
-          <a:p>
-            <a:pPr algn="l" indent="0" marL="0">
-              <a:lnSpc>
-                <a:spcPct val="102857"/>
-              </a:lnSpc>
-              <a:buNone/>
-            </a:pPr>
-            <a:r>
-              <a:rPr lang="en-US" sz="2400" dirty="0">
-                <a:solidFill>
-                  <a:srgbClr val="5C6675"/>
-                </a:solidFill>
-                <a:latin typeface="Noto Sans KR" pitchFamily="34" charset="0"/>
-                <a:ea typeface="Noto Sans KR" pitchFamily="34" charset="-122"/>
-                <a:cs typeface="Noto Sans KR" pitchFamily="34" charset="-120"/>
-              </a:rPr>
-              <a:t>단계별 산출물을 즉시 배포·검증하고 다음 단계로 넘기는 반복형(iterative) 진행</a:t>
-            </a:r>
-            <a:endParaRPr lang="en-US" sz="2400" dirty="0"/>
-          </a:p>
-        </p:txBody>
-      </p:sp>
-      <p:sp>
-        <p:nvSpPr>
-          <p:cNvPr id="10" name="Shape 7"/>
-          <p:cNvSpPr/>
-          <p:nvPr/>
-        </p:nvSpPr>
-        <p:spPr>
-          <a:xfrm>
-            <a:off x="952500" y="3530600"/>
-            <a:ext cx="2693591" cy="3654425"/>
-          </a:xfrm>
-          <a:prstGeom prst="roundRect">
-            <a:avLst>
-              <a:gd name="adj" fmla="val 5658"/>
-            </a:avLst>
-          </a:prstGeom>
-          <a:solidFill>
-            <a:srgbClr val="F7F8FB"/>
-          </a:solidFill>
-          <a:ln/>
-        </p:spPr>
-      </p:sp>
-      <p:sp>
-        <p:nvSpPr>
-          <p:cNvPr id="11" name="Shape 8"/>
-          <p:cNvSpPr/>
-          <p:nvPr/>
-        </p:nvSpPr>
-        <p:spPr>
-          <a:xfrm>
-            <a:off x="952500" y="3530600"/>
-            <a:ext cx="2693591" cy="38100"/>
-          </a:xfrm>
-          <a:prstGeom prst="rect">
-            <a:avLst/>
-          </a:prstGeom>
-          <a:solidFill>
-            <a:srgbClr val="0F9D76"/>
-          </a:solidFill>
-          <a:ln/>
-        </p:spPr>
-      </p:sp>
-      <p:sp>
-        <p:nvSpPr>
-          <p:cNvPr id="12" name="Text 9"/>
-          <p:cNvSpPr/>
-          <p:nvPr/>
-        </p:nvSpPr>
-        <p:spPr>
-          <a:xfrm>
-            <a:off x="1200150" y="3873500"/>
-            <a:ext cx="2418120" cy="311150"/>
-          </a:xfrm>
-          <a:prstGeom prst="rect">
-            <a:avLst/>
-          </a:prstGeom>
-          <a:noFill/>
-          <a:ln/>
-        </p:spPr>
-        <p:txBody>
-          <a:bodyPr wrap="square" lIns="25400" tIns="25400" rIns="25400" bIns="25400" rtlCol="0" anchor="t">
-            <a:normAutofit/>
-          </a:bodyPr>
-          <a:lstStyle/>
-          <a:p>
-            <a:pPr algn="l" indent="0" marL="0">
-              <a:buNone/>
-            </a:pPr>
-            <a:r>
-              <a:rPr lang="en-US" sz="1800" b="1" spc="108" kern="0" dirty="0">
-                <a:solidFill>
-                  <a:srgbClr val="0F9D76"/>
-                </a:solidFill>
-                <a:latin typeface="Noto Sans KR" pitchFamily="34" charset="0"/>
-                <a:ea typeface="Noto Sans KR" pitchFamily="34" charset="-122"/>
-                <a:cs typeface="Noto Sans KR" pitchFamily="34" charset="-120"/>
-              </a:rPr>
-              <a:t>STEP 01</a:t>
-            </a:r>
-            <a:endParaRPr lang="en-US" sz="1800" dirty="0"/>
-          </a:p>
-        </p:txBody>
-      </p:sp>
-      <p:sp>
-        <p:nvSpPr>
-          <p:cNvPr id="13" name="Text 10"/>
-          <p:cNvSpPr/>
-          <p:nvPr/>
-        </p:nvSpPr>
-        <p:spPr>
-          <a:xfrm>
-            <a:off x="1200150" y="4337050"/>
-            <a:ext cx="2418120" cy="419100"/>
-          </a:xfrm>
-          <a:prstGeom prst="rect">
-            <a:avLst/>
-          </a:prstGeom>
-          <a:noFill/>
-          <a:ln/>
-        </p:spPr>
-        <p:txBody>
-          <a:bodyPr wrap="square" lIns="25400" tIns="25400" rIns="25400" bIns="25400" rtlCol="0" anchor="t">
-            <a:normAutofit/>
-          </a:bodyPr>
-          <a:lstStyle/>
-          <a:p>
-            <a:pPr algn="l" indent="0" marL="0">
-              <a:lnSpc>
-                <a:spcPct val="85714"/>
-              </a:lnSpc>
-              <a:buNone/>
-            </a:pPr>
-            <a:r>
-              <a:rPr lang="en-US" sz="2400" b="1" dirty="0">
-                <a:solidFill>
-                  <a:srgbClr val="10151F"/>
-                </a:solidFill>
-                <a:latin typeface="Noto Sans KR" pitchFamily="34" charset="0"/>
-                <a:ea typeface="Noto Sans KR" pitchFamily="34" charset="-122"/>
-                <a:cs typeface="Noto Sans KR" pitchFamily="34" charset="-120"/>
-              </a:rPr>
-              <a:t>데이터 수집</a:t>
-            </a:r>
-            <a:endParaRPr lang="en-US" sz="2400" dirty="0"/>
-          </a:p>
-        </p:txBody>
-      </p:sp>
-      <p:sp>
-        <p:nvSpPr>
-          <p:cNvPr id="14" name="Text 11"/>
-          <p:cNvSpPr/>
-          <p:nvPr/>
-        </p:nvSpPr>
-        <p:spPr>
-          <a:xfrm>
-            <a:off x="1200150" y="4908550"/>
-            <a:ext cx="2274491" cy="1109663"/>
-          </a:xfrm>
-          <a:prstGeom prst="rect">
-            <a:avLst/>
-          </a:prstGeom>
-          <a:noFill/>
-          <a:ln/>
-        </p:spPr>
-        <p:txBody>
-          <a:bodyPr wrap="square" lIns="25400" tIns="25400" rIns="25400" bIns="25400" rtlCol="0" anchor="t">
-            <a:normAutofit/>
-          </a:bodyPr>
-          <a:lstStyle/>
-          <a:p>
-            <a:pPr algn="l" indent="0" marL="0">
-              <a:lnSpc>
-                <a:spcPct val="102273"/>
-              </a:lnSpc>
-              <a:buNone/>
-            </a:pPr>
-            <a:r>
-              <a:rPr lang="en-US" sz="1875" dirty="0">
-                <a:solidFill>
-                  <a:srgbClr val="5C6675"/>
-                </a:solidFill>
-                <a:latin typeface="Noto Sans KR" pitchFamily="34" charset="0"/>
-                <a:ea typeface="Noto Sans KR" pitchFamily="34" charset="-122"/>
-                <a:cs typeface="Noto Sans KR" pitchFamily="34" charset="-120"/>
-              </a:rPr>
-              <a:t>공정위 모범상담 사례 CSV 565건 확보 · EDA</a:t>
-            </a:r>
-            <a:endParaRPr lang="en-US" sz="1875" dirty="0"/>
-          </a:p>
-        </p:txBody>
-      </p:sp>
-      <p:sp>
-        <p:nvSpPr>
-          <p:cNvPr id="15" name="Text 12"/>
-          <p:cNvSpPr/>
-          <p:nvPr/>
-        </p:nvSpPr>
-        <p:spPr>
-          <a:xfrm>
-            <a:off x="1200150" y="6170613"/>
-            <a:ext cx="2418120" cy="381000"/>
-          </a:xfrm>
-          <a:prstGeom prst="rect">
-            <a:avLst/>
-          </a:prstGeom>
-          <a:noFill/>
-          <a:ln/>
-        </p:spPr>
-        <p:txBody>
-          <a:bodyPr wrap="square" lIns="25400" tIns="25400" rIns="25400" bIns="25400" rtlCol="0" anchor="t">
-            <a:normAutofit/>
-          </a:bodyPr>
-          <a:lstStyle/>
-          <a:p>
-            <a:pPr algn="l" indent="0" marL="0">
-              <a:lnSpc>
-                <a:spcPct val="103846"/>
-              </a:lnSpc>
-              <a:buNone/>
-            </a:pPr>
-            <a:r>
-              <a:rPr lang="en-US" sz="1800" b="1" dirty="0">
-                <a:solidFill>
-                  <a:srgbClr val="3D4757"/>
-                </a:solidFill>
-                <a:latin typeface="Noto Sans KR" pitchFamily="34" charset="0"/>
-                <a:ea typeface="Noto Sans KR" pitchFamily="34" charset="-122"/>
-                <a:cs typeface="Noto Sans KR" pitchFamily="34" charset="-120"/>
-              </a:rPr>
-              <a:t>Pandas · NumPy</a:t>
-            </a:r>
-            <a:endParaRPr lang="en-US" sz="1800" dirty="0"/>
-          </a:p>
-        </p:txBody>
-      </p:sp>
-      <p:pic>
-        <p:nvPicPr>
-          <p:cNvPr id="16" name="Image 1" descr="preencoded.png">    </p:cNvPr>
+          <p:cNvPr id="7" name="Image 0" descr="preencoded.png"/>
           <p:cNvPicPr>
             <a:picLocks noChangeAspect="1"/>
           </p:cNvPicPr>
@@ -13098,8 +12456,8 @@
         </p:blipFill>
         <p:spPr>
           <a:xfrm>
-            <a:off x="3865166" y="5214938"/>
-            <a:ext cx="285750" cy="285750"/>
+            <a:off x="16897350" y="533400"/>
+            <a:ext cx="438150" cy="438150"/>
           </a:xfrm>
           <a:prstGeom prst="rect">
             <a:avLst/>
@@ -13108,18 +12466,103 @@
       </p:pic>
       <p:sp>
         <p:nvSpPr>
-          <p:cNvPr id="17" name="Shape 13"/>
-          <p:cNvSpPr/>
-          <p:nvPr/>
-        </p:nvSpPr>
-        <p:spPr>
-          <a:xfrm>
-            <a:off x="4369991" y="3530600"/>
-            <a:ext cx="2713038" cy="3654425"/>
+          <p:cNvPr id="8" name="Text 5"/>
+          <p:cNvSpPr/>
+          <p:nvPr/>
+        </p:nvSpPr>
+        <p:spPr>
+          <a:xfrm>
+            <a:off x="952500" y="1701800"/>
+            <a:ext cx="18021300" cy="723900"/>
+          </a:xfrm>
+          <a:prstGeom prst="rect">
+            <a:avLst/>
+          </a:prstGeom>
+          <a:noFill/>
+          <a:ln/>
+        </p:spPr>
+        <p:txBody>
+          <a:bodyPr wrap="square" lIns="25400" tIns="25400" rIns="25400" bIns="25400" rtlCol="0" anchor="t">
+            <a:normAutofit lnSpcReduction="10000"/>
+          </a:bodyPr>
+          <a:lstStyle/>
+          <a:p>
+            <a:pPr marL="0" indent="0" algn="l">
+              <a:buNone/>
+            </a:pPr>
+            <a:r>
+              <a:rPr lang="en-US" sz="4500" b="1" kern="0" spc="-90" dirty="0">
+                <a:solidFill>
+                  <a:srgbClr val="10151F"/>
+                </a:solidFill>
+                <a:latin typeface="Noto Sans KR" pitchFamily="34" charset="0"/>
+                <a:ea typeface="Noto Sans KR" pitchFamily="34" charset="-122"/>
+                <a:cs typeface="Noto Sans KR" pitchFamily="34" charset="-120"/>
+              </a:rPr>
+              <a:t>프로젝트 방법론과 적용 기술</a:t>
+            </a:r>
+            <a:endParaRPr lang="en-US" sz="4500" dirty="0"/>
+          </a:p>
+        </p:txBody>
+      </p:sp>
+      <p:sp>
+        <p:nvSpPr>
+          <p:cNvPr id="9" name="Text 6"/>
+          <p:cNvSpPr/>
+          <p:nvPr/>
+        </p:nvSpPr>
+        <p:spPr>
+          <a:xfrm>
+            <a:off x="952500" y="2578100"/>
+            <a:ext cx="18021300" cy="495300"/>
+          </a:xfrm>
+          <a:prstGeom prst="rect">
+            <a:avLst/>
+          </a:prstGeom>
+          <a:noFill/>
+          <a:ln/>
+        </p:spPr>
+        <p:txBody>
+          <a:bodyPr wrap="square" lIns="25400" tIns="25400" rIns="25400" bIns="25400" rtlCol="0" anchor="t">
+            <a:normAutofit/>
+          </a:bodyPr>
+          <a:lstStyle/>
+          <a:p>
+            <a:pPr marL="0" indent="0" algn="l">
+              <a:lnSpc>
+                <a:spcPct val="102857"/>
+              </a:lnSpc>
+              <a:buNone/>
+            </a:pPr>
+            <a:r>
+              <a:rPr lang="en-US" sz="2400" dirty="0">
+                <a:solidFill>
+                  <a:srgbClr val="5C6675"/>
+                </a:solidFill>
+                <a:latin typeface="Noto Sans KR" pitchFamily="34" charset="0"/>
+                <a:ea typeface="Noto Sans KR" pitchFamily="34" charset="-122"/>
+                <a:cs typeface="Noto Sans KR" pitchFamily="34" charset="-120"/>
+              </a:rPr>
+              <a:t>단계별 산출물을 즉시 배포·검증하고 다음 단계로 넘기는 반복형(iterative) 진행</a:t>
+            </a:r>
+            <a:endParaRPr lang="en-US" sz="2400" dirty="0"/>
+          </a:p>
+        </p:txBody>
+      </p:sp>
+      <p:sp>
+        <p:nvSpPr>
+          <p:cNvPr id="10" name="Shape 7"/>
+          <p:cNvSpPr/>
+          <p:nvPr/>
+        </p:nvSpPr>
+        <p:spPr>
+          <a:xfrm>
+            <a:off x="952500" y="3530600"/>
+            <a:ext cx="2693591" cy="3654425"/>
           </a:xfrm>
           <a:prstGeom prst="roundRect">
             <a:avLst>
-              <a:gd name="adj" fmla="val 5617"/>
+              <a:gd name="adj" fmla="val 5658"/>
             </a:avLst>
           </a:prstGeom>
           <a:solidFill>
@@ -13130,14 +12573,14 @@
       </p:sp>
       <p:sp>
         <p:nvSpPr>
-          <p:cNvPr id="18" name="Shape 14"/>
-          <p:cNvSpPr/>
-          <p:nvPr/>
-        </p:nvSpPr>
-        <p:spPr>
-          <a:xfrm>
-            <a:off x="4369991" y="3530600"/>
-            <a:ext cx="2713038" cy="38100"/>
+          <p:cNvPr id="11" name="Shape 8"/>
+          <p:cNvSpPr/>
+          <p:nvPr/>
+        </p:nvSpPr>
+        <p:spPr>
+          <a:xfrm>
+            <a:off x="952500" y="3530600"/>
+            <a:ext cx="2693591" cy="38100"/>
           </a:xfrm>
           <a:prstGeom prst="rect">
             <a:avLst/>
@@ -13150,32 +12593,32 @@
       </p:sp>
       <p:sp>
         <p:nvSpPr>
-          <p:cNvPr id="19" name="Text 15"/>
-          <p:cNvSpPr/>
-          <p:nvPr/>
-        </p:nvSpPr>
-        <p:spPr>
-          <a:xfrm>
-            <a:off x="4617641" y="3873500"/>
-            <a:ext cx="2439511" cy="311150"/>
-          </a:xfrm>
-          <a:prstGeom prst="rect">
-            <a:avLst/>
-          </a:prstGeom>
-          <a:noFill/>
-          <a:ln/>
-        </p:spPr>
-        <p:txBody>
-          <a:bodyPr wrap="square" lIns="25400" tIns="25400" rIns="25400" bIns="25400" rtlCol="0" anchor="t">
-            <a:normAutofit/>
-          </a:bodyPr>
-          <a:lstStyle/>
-          <a:p>
-            <a:pPr algn="l" indent="0" marL="0">
-              <a:buNone/>
-            </a:pPr>
-            <a:r>
-              <a:rPr lang="en-US" sz="1800" b="1" spc="108" kern="0" dirty="0">
+          <p:cNvPr id="12" name="Text 9"/>
+          <p:cNvSpPr/>
+          <p:nvPr/>
+        </p:nvSpPr>
+        <p:spPr>
+          <a:xfrm>
+            <a:off x="1200150" y="3873500"/>
+            <a:ext cx="2418120" cy="311150"/>
+          </a:xfrm>
+          <a:prstGeom prst="rect">
+            <a:avLst/>
+          </a:prstGeom>
+          <a:noFill/>
+          <a:ln/>
+        </p:spPr>
+        <p:txBody>
+          <a:bodyPr wrap="square" lIns="25400" tIns="25400" rIns="25400" bIns="25400" rtlCol="0" anchor="t">
+            <a:normAutofit lnSpcReduction="10000"/>
+          </a:bodyPr>
+          <a:lstStyle/>
+          <a:p>
+            <a:pPr marL="0" indent="0" algn="l">
+              <a:buNone/>
+            </a:pPr>
+            <a:r>
+              <a:rPr lang="en-US" sz="1800" b="1" kern="0" spc="108" dirty="0">
                 <a:solidFill>
                   <a:srgbClr val="0F9D76"/>
                 </a:solidFill>
@@ -13183,7 +12626,7 @@
                 <a:ea typeface="Noto Sans KR" pitchFamily="34" charset="-122"/>
                 <a:cs typeface="Noto Sans KR" pitchFamily="34" charset="-120"/>
               </a:rPr>
-              <a:t>STEP 02</a:t>
+              <a:t>STEP 01</a:t>
             </a:r>
             <a:endParaRPr lang="en-US" sz="1800" dirty="0"/>
           </a:p>
@@ -13191,28 +12634,28 @@
       </p:sp>
       <p:sp>
         <p:nvSpPr>
-          <p:cNvPr id="20" name="Text 16"/>
-          <p:cNvSpPr/>
-          <p:nvPr/>
-        </p:nvSpPr>
-        <p:spPr>
-          <a:xfrm>
-            <a:off x="4617641" y="4337050"/>
-            <a:ext cx="2439511" cy="419100"/>
-          </a:xfrm>
-          <a:prstGeom prst="rect">
-            <a:avLst/>
-          </a:prstGeom>
-          <a:noFill/>
-          <a:ln/>
-        </p:spPr>
-        <p:txBody>
-          <a:bodyPr wrap="square" lIns="25400" tIns="25400" rIns="25400" bIns="25400" rtlCol="0" anchor="t">
-            <a:normAutofit/>
-          </a:bodyPr>
-          <a:lstStyle/>
-          <a:p>
-            <a:pPr algn="l" indent="0" marL="0">
+          <p:cNvPr id="13" name="Text 10"/>
+          <p:cNvSpPr/>
+          <p:nvPr/>
+        </p:nvSpPr>
+        <p:spPr>
+          <a:xfrm>
+            <a:off x="1200150" y="4337050"/>
+            <a:ext cx="2418120" cy="419100"/>
+          </a:xfrm>
+          <a:prstGeom prst="rect">
+            <a:avLst/>
+          </a:prstGeom>
+          <a:noFill/>
+          <a:ln/>
+        </p:spPr>
+        <p:txBody>
+          <a:bodyPr wrap="square" lIns="25400" tIns="25400" rIns="25400" bIns="25400" rtlCol="0" anchor="t">
+            <a:normAutofit/>
+          </a:bodyPr>
+          <a:lstStyle/>
+          <a:p>
+            <a:pPr marL="0" indent="0" algn="l">
               <a:lnSpc>
                 <a:spcPct val="85714"/>
               </a:lnSpc>
@@ -13227,7 +12670,7 @@
                 <a:ea typeface="Noto Sans KR" pitchFamily="34" charset="-122"/>
                 <a:cs typeface="Noto Sans KR" pitchFamily="34" charset="-120"/>
               </a:rPr>
-              <a:t>전처리 · 라벨링</a:t>
+              <a:t>데이터 수집</a:t>
             </a:r>
             <a:endParaRPr lang="en-US" sz="2400" dirty="0"/>
           </a:p>
@@ -13235,28 +12678,28 @@
       </p:sp>
       <p:sp>
         <p:nvSpPr>
-          <p:cNvPr id="21" name="Text 17"/>
-          <p:cNvSpPr/>
-          <p:nvPr/>
-        </p:nvSpPr>
-        <p:spPr>
-          <a:xfrm>
-            <a:off x="4617641" y="4908550"/>
-            <a:ext cx="2293938" cy="1109663"/>
-          </a:xfrm>
-          <a:prstGeom prst="rect">
-            <a:avLst/>
-          </a:prstGeom>
-          <a:noFill/>
-          <a:ln/>
-        </p:spPr>
-        <p:txBody>
-          <a:bodyPr wrap="square" lIns="25400" tIns="25400" rIns="25400" bIns="25400" rtlCol="0" anchor="t">
-            <a:normAutofit/>
-          </a:bodyPr>
-          <a:lstStyle/>
-          <a:p>
-            <a:pPr algn="l" indent="0" marL="0">
+          <p:cNvPr id="14" name="Text 11"/>
+          <p:cNvSpPr/>
+          <p:nvPr/>
+        </p:nvSpPr>
+        <p:spPr>
+          <a:xfrm>
+            <a:off x="1200150" y="4908550"/>
+            <a:ext cx="2274491" cy="1109663"/>
+          </a:xfrm>
+          <a:prstGeom prst="rect">
+            <a:avLst/>
+          </a:prstGeom>
+          <a:noFill/>
+          <a:ln/>
+        </p:spPr>
+        <p:txBody>
+          <a:bodyPr wrap="square" lIns="25400" tIns="25400" rIns="25400" bIns="25400" rtlCol="0" anchor="t">
+            <a:normAutofit/>
+          </a:bodyPr>
+          <a:lstStyle/>
+          <a:p>
+            <a:pPr marL="0" indent="0" algn="l">
               <a:lnSpc>
                 <a:spcPct val="102273"/>
               </a:lnSpc>
@@ -13271,7 +12714,7 @@
                 <a:ea typeface="Noto Sans KR" pitchFamily="34" charset="-122"/>
                 <a:cs typeface="Noto Sans KR" pitchFamily="34" charset="-120"/>
               </a:rPr>
-              <a:t>PII 마스킹 · 노이즈 제거 · 14개 카테고리 배정</a:t>
+              <a:t>공정위 모범상담 사례 CSV 565건 확보 · EDA</a:t>
             </a:r>
             <a:endParaRPr lang="en-US" sz="1875" dirty="0"/>
           </a:p>
@@ -13279,28 +12722,28 @@
       </p:sp>
       <p:sp>
         <p:nvSpPr>
-          <p:cNvPr id="22" name="Text 18"/>
-          <p:cNvSpPr/>
-          <p:nvPr/>
-        </p:nvSpPr>
-        <p:spPr>
-          <a:xfrm>
-            <a:off x="4617641" y="6170613"/>
-            <a:ext cx="2293938" cy="723900"/>
-          </a:xfrm>
-          <a:prstGeom prst="rect">
-            <a:avLst/>
-          </a:prstGeom>
-          <a:noFill/>
-          <a:ln/>
-        </p:spPr>
-        <p:txBody>
-          <a:bodyPr wrap="square" lIns="25400" tIns="25400" rIns="25400" bIns="25400" rtlCol="0" anchor="t">
-            <a:normAutofit/>
-          </a:bodyPr>
-          <a:lstStyle/>
-          <a:p>
-            <a:pPr algn="l" indent="0" marL="0">
+          <p:cNvPr id="15" name="Text 12"/>
+          <p:cNvSpPr/>
+          <p:nvPr/>
+        </p:nvSpPr>
+        <p:spPr>
+          <a:xfrm>
+            <a:off x="1200150" y="6170613"/>
+            <a:ext cx="2418120" cy="381000"/>
+          </a:xfrm>
+          <a:prstGeom prst="rect">
+            <a:avLst/>
+          </a:prstGeom>
+          <a:noFill/>
+          <a:ln/>
+        </p:spPr>
+        <p:txBody>
+          <a:bodyPr wrap="square" lIns="25400" tIns="25400" rIns="25400" bIns="25400" rtlCol="0" anchor="t">
+            <a:normAutofit/>
+          </a:bodyPr>
+          <a:lstStyle/>
+          <a:p>
+            <a:pPr marL="0" indent="0" algn="l">
               <a:lnSpc>
                 <a:spcPct val="103846"/>
               </a:lnSpc>
@@ -13315,7 +12758,7 @@
                 <a:ea typeface="Noto Sans KR" pitchFamily="34" charset="-122"/>
                 <a:cs typeface="Noto Sans KR" pitchFamily="34" charset="-120"/>
               </a:rPr>
-              <a:t>cleaner.py · build_case_bank.py</a:t>
+              <a:t>Pandas · NumPy</a:t>
             </a:r>
             <a:endParaRPr lang="en-US" sz="1800" dirty="0"/>
           </a:p>
@@ -13323,7 +12766,7 @@
       </p:sp>
       <p:pic>
         <p:nvPicPr>
-          <p:cNvPr id="23" name="Image 2" descr="preencoded.png">    </p:cNvPr>
+          <p:cNvPr id="16" name="Image 1" descr="preencoded.png"/>
           <p:cNvPicPr>
             <a:picLocks noChangeAspect="1"/>
           </p:cNvPicPr>
@@ -13343,6 +12786,251 @@
         </p:blipFill>
         <p:spPr>
           <a:xfrm>
+            <a:off x="3865166" y="5214938"/>
+            <a:ext cx="285750" cy="285750"/>
+          </a:xfrm>
+          <a:prstGeom prst="rect">
+            <a:avLst/>
+          </a:prstGeom>
+        </p:spPr>
+      </p:pic>
+      <p:sp>
+        <p:nvSpPr>
+          <p:cNvPr id="17" name="Shape 13"/>
+          <p:cNvSpPr/>
+          <p:nvPr/>
+        </p:nvSpPr>
+        <p:spPr>
+          <a:xfrm>
+            <a:off x="4369991" y="3530600"/>
+            <a:ext cx="2713038" cy="3654425"/>
+          </a:xfrm>
+          <a:prstGeom prst="roundRect">
+            <a:avLst>
+              <a:gd name="adj" fmla="val 5617"/>
+            </a:avLst>
+          </a:prstGeom>
+          <a:solidFill>
+            <a:srgbClr val="F7F8FB"/>
+          </a:solidFill>
+          <a:ln/>
+        </p:spPr>
+      </p:sp>
+      <p:sp>
+        <p:nvSpPr>
+          <p:cNvPr id="18" name="Shape 14"/>
+          <p:cNvSpPr/>
+          <p:nvPr/>
+        </p:nvSpPr>
+        <p:spPr>
+          <a:xfrm>
+            <a:off x="4369991" y="3530600"/>
+            <a:ext cx="2713038" cy="38100"/>
+          </a:xfrm>
+          <a:prstGeom prst="rect">
+            <a:avLst/>
+          </a:prstGeom>
+          <a:solidFill>
+            <a:srgbClr val="0F9D76"/>
+          </a:solidFill>
+          <a:ln/>
+        </p:spPr>
+      </p:sp>
+      <p:sp>
+        <p:nvSpPr>
+          <p:cNvPr id="19" name="Text 15"/>
+          <p:cNvSpPr/>
+          <p:nvPr/>
+        </p:nvSpPr>
+        <p:spPr>
+          <a:xfrm>
+            <a:off x="4617641" y="3873500"/>
+            <a:ext cx="2439511" cy="311150"/>
+          </a:xfrm>
+          <a:prstGeom prst="rect">
+            <a:avLst/>
+          </a:prstGeom>
+          <a:noFill/>
+          <a:ln/>
+        </p:spPr>
+        <p:txBody>
+          <a:bodyPr wrap="square" lIns="25400" tIns="25400" rIns="25400" bIns="25400" rtlCol="0" anchor="t">
+            <a:normAutofit lnSpcReduction="10000"/>
+          </a:bodyPr>
+          <a:lstStyle/>
+          <a:p>
+            <a:pPr marL="0" indent="0" algn="l">
+              <a:buNone/>
+            </a:pPr>
+            <a:r>
+              <a:rPr lang="en-US" sz="1800" b="1" kern="0" spc="108" dirty="0">
+                <a:solidFill>
+                  <a:srgbClr val="0F9D76"/>
+                </a:solidFill>
+                <a:latin typeface="Noto Sans KR" pitchFamily="34" charset="0"/>
+                <a:ea typeface="Noto Sans KR" pitchFamily="34" charset="-122"/>
+                <a:cs typeface="Noto Sans KR" pitchFamily="34" charset="-120"/>
+              </a:rPr>
+              <a:t>STEP 02</a:t>
+            </a:r>
+            <a:endParaRPr lang="en-US" sz="1800" dirty="0"/>
+          </a:p>
+        </p:txBody>
+      </p:sp>
+      <p:sp>
+        <p:nvSpPr>
+          <p:cNvPr id="20" name="Text 16"/>
+          <p:cNvSpPr/>
+          <p:nvPr/>
+        </p:nvSpPr>
+        <p:spPr>
+          <a:xfrm>
+            <a:off x="4617641" y="4337050"/>
+            <a:ext cx="2439511" cy="419100"/>
+          </a:xfrm>
+          <a:prstGeom prst="rect">
+            <a:avLst/>
+          </a:prstGeom>
+          <a:noFill/>
+          <a:ln/>
+        </p:spPr>
+        <p:txBody>
+          <a:bodyPr wrap="square" lIns="25400" tIns="25400" rIns="25400" bIns="25400" rtlCol="0" anchor="t">
+            <a:normAutofit/>
+          </a:bodyPr>
+          <a:lstStyle/>
+          <a:p>
+            <a:pPr marL="0" indent="0" algn="l">
+              <a:lnSpc>
+                <a:spcPct val="85714"/>
+              </a:lnSpc>
+              <a:buNone/>
+            </a:pPr>
+            <a:r>
+              <a:rPr lang="en-US" sz="2400" b="1" dirty="0">
+                <a:solidFill>
+                  <a:srgbClr val="10151F"/>
+                </a:solidFill>
+                <a:latin typeface="Noto Sans KR" pitchFamily="34" charset="0"/>
+                <a:ea typeface="Noto Sans KR" pitchFamily="34" charset="-122"/>
+                <a:cs typeface="Noto Sans KR" pitchFamily="34" charset="-120"/>
+              </a:rPr>
+              <a:t>전처리 · 라벨링</a:t>
+            </a:r>
+            <a:endParaRPr lang="en-US" sz="2400" dirty="0"/>
+          </a:p>
+        </p:txBody>
+      </p:sp>
+      <p:sp>
+        <p:nvSpPr>
+          <p:cNvPr id="21" name="Text 17"/>
+          <p:cNvSpPr/>
+          <p:nvPr/>
+        </p:nvSpPr>
+        <p:spPr>
+          <a:xfrm>
+            <a:off x="4617641" y="4908550"/>
+            <a:ext cx="2293938" cy="1109663"/>
+          </a:xfrm>
+          <a:prstGeom prst="rect">
+            <a:avLst/>
+          </a:prstGeom>
+          <a:noFill/>
+          <a:ln/>
+        </p:spPr>
+        <p:txBody>
+          <a:bodyPr wrap="square" lIns="25400" tIns="25400" rIns="25400" bIns="25400" rtlCol="0" anchor="t">
+            <a:normAutofit/>
+          </a:bodyPr>
+          <a:lstStyle/>
+          <a:p>
+            <a:pPr marL="0" indent="0" algn="l">
+              <a:lnSpc>
+                <a:spcPct val="102273"/>
+              </a:lnSpc>
+              <a:buNone/>
+            </a:pPr>
+            <a:r>
+              <a:rPr lang="en-US" sz="1875" dirty="0">
+                <a:solidFill>
+                  <a:srgbClr val="5C6675"/>
+                </a:solidFill>
+                <a:latin typeface="Noto Sans KR" pitchFamily="34" charset="0"/>
+                <a:ea typeface="Noto Sans KR" pitchFamily="34" charset="-122"/>
+                <a:cs typeface="Noto Sans KR" pitchFamily="34" charset="-120"/>
+              </a:rPr>
+              <a:t>PII 마스킹 · 노이즈 제거 · 14개 카테고리 배정</a:t>
+            </a:r>
+            <a:endParaRPr lang="en-US" sz="1875" dirty="0"/>
+          </a:p>
+        </p:txBody>
+      </p:sp>
+      <p:sp>
+        <p:nvSpPr>
+          <p:cNvPr id="22" name="Text 18"/>
+          <p:cNvSpPr/>
+          <p:nvPr/>
+        </p:nvSpPr>
+        <p:spPr>
+          <a:xfrm>
+            <a:off x="4617641" y="6170613"/>
+            <a:ext cx="2293938" cy="723900"/>
+          </a:xfrm>
+          <a:prstGeom prst="rect">
+            <a:avLst/>
+          </a:prstGeom>
+          <a:noFill/>
+          <a:ln/>
+        </p:spPr>
+        <p:txBody>
+          <a:bodyPr wrap="square" lIns="25400" tIns="25400" rIns="25400" bIns="25400" rtlCol="0" anchor="t">
+            <a:normAutofit fontScale="92500"/>
+          </a:bodyPr>
+          <a:lstStyle/>
+          <a:p>
+            <a:pPr marL="0" indent="0" algn="l">
+              <a:lnSpc>
+                <a:spcPct val="103846"/>
+              </a:lnSpc>
+              <a:buNone/>
+            </a:pPr>
+            <a:r>
+              <a:rPr lang="en-US" sz="1800" b="1" dirty="0">
+                <a:solidFill>
+                  <a:srgbClr val="3D4757"/>
+                </a:solidFill>
+                <a:latin typeface="Noto Sans KR" pitchFamily="34" charset="0"/>
+                <a:ea typeface="Noto Sans KR" pitchFamily="34" charset="-122"/>
+                <a:cs typeface="Noto Sans KR" pitchFamily="34" charset="-120"/>
+              </a:rPr>
+              <a:t>cleaner.py · build_case_bank.py</a:t>
+            </a:r>
+            <a:endParaRPr lang="en-US" sz="1800" dirty="0"/>
+          </a:p>
+        </p:txBody>
+      </p:sp>
+      <p:pic>
+        <p:nvPicPr>
+          <p:cNvPr id="23" name="Image 2" descr="preencoded.png"/>
+          <p:cNvPicPr>
+            <a:picLocks noChangeAspect="1"/>
+          </p:cNvPicPr>
+          <p:nvPr/>
+        </p:nvPicPr>
+        <p:blipFill>
+          <a:blip r:embed="rId5">
+            <a:extLst>
+              <a:ext uri="{96DAC541-7B7A-43D3-8B79-37D633B846F1}">
+                <asvg:svgBlip xmlns:asvg="http://schemas.microsoft.com/office/drawing/2016/SVG/main" r:embed="rId7"/>
+              </a:ext>
+            </a:extLst>
+          </a:blip>
+          <a:stretch>
+            <a:fillRect/>
+          </a:stretch>
+        </p:blipFill>
+        <p:spPr>
+          <a:xfrm>
             <a:off x="7302103" y="5214938"/>
             <a:ext cx="285750" cy="285750"/>
           </a:xfrm>
@@ -13412,15 +13100,15 @@
         </p:spPr>
         <p:txBody>
           <a:bodyPr wrap="square" lIns="25400" tIns="25400" rIns="25400" bIns="25400" rtlCol="0" anchor="t">
-            <a:normAutofit/>
-          </a:bodyPr>
-          <a:lstStyle/>
-          <a:p>
-            <a:pPr algn="l" indent="0" marL="0">
-              <a:buNone/>
-            </a:pPr>
-            <a:r>
-              <a:rPr lang="en-US" sz="1800" b="1" spc="108" kern="0" dirty="0">
+            <a:normAutofit lnSpcReduction="10000"/>
+          </a:bodyPr>
+          <a:lstStyle/>
+          <a:p>
+            <a:pPr marL="0" indent="0" algn="l">
+              <a:buNone/>
+            </a:pPr>
+            <a:r>
+              <a:rPr lang="en-US" sz="1800" b="1" kern="0" spc="108" dirty="0">
                 <a:solidFill>
                   <a:srgbClr val="1D3A8F"/>
                 </a:solidFill>
@@ -13457,7 +13145,7 @@
           </a:bodyPr>
           <a:lstStyle/>
           <a:p>
-            <a:pPr algn="l" indent="0" marL="0">
+            <a:pPr marL="0" indent="0" algn="l">
               <a:lnSpc>
                 <a:spcPct val="85714"/>
               </a:lnSpc>
@@ -13501,7 +13189,7 @@
           </a:bodyPr>
           <a:lstStyle/>
           <a:p>
-            <a:pPr algn="l" indent="0" marL="0">
+            <a:pPr marL="0" indent="0" algn="l">
               <a:lnSpc>
                 <a:spcPct val="102273"/>
               </a:lnSpc>
@@ -13545,7 +13233,7 @@
           </a:bodyPr>
           <a:lstStyle/>
           <a:p>
-            <a:pPr algn="l" indent="0" marL="0">
+            <a:pPr marL="0" indent="0" algn="l">
               <a:lnSpc>
                 <a:spcPct val="103846"/>
               </a:lnSpc>
@@ -13568,14 +13256,14 @@
       </p:sp>
       <p:pic>
         <p:nvPicPr>
-          <p:cNvPr id="30" name="Image 3" descr="preencoded.png">    </p:cNvPr>
+          <p:cNvPr id="30" name="Image 3" descr="preencoded.png"/>
           <p:cNvPicPr>
             <a:picLocks noChangeAspect="1"/>
           </p:cNvPicPr>
           <p:nvPr/>
         </p:nvPicPr>
         <p:blipFill>
-          <a:blip r:embed="rId7">
+          <a:blip r:embed="rId5">
             <a:extLst>
               <a:ext uri="{96DAC541-7B7A-43D3-8B79-37D633B846F1}">
                 <asvg:svgBlip xmlns:asvg="http://schemas.microsoft.com/office/drawing/2016/SVG/main" r:embed="rId8"/>
@@ -13657,15 +13345,15 @@
         </p:spPr>
         <p:txBody>
           <a:bodyPr wrap="square" lIns="25400" tIns="25400" rIns="25400" bIns="25400" rtlCol="0" anchor="t">
-            <a:normAutofit/>
-          </a:bodyPr>
-          <a:lstStyle/>
-          <a:p>
-            <a:pPr algn="l" indent="0" marL="0">
-              <a:buNone/>
-            </a:pPr>
-            <a:r>
-              <a:rPr lang="en-US" sz="1800" b="1" spc="108" kern="0" dirty="0">
+            <a:normAutofit lnSpcReduction="10000"/>
+          </a:bodyPr>
+          <a:lstStyle/>
+          <a:p>
+            <a:pPr marL="0" indent="0" algn="l">
+              <a:buNone/>
+            </a:pPr>
+            <a:r>
+              <a:rPr lang="en-US" sz="1800" b="1" kern="0" spc="108" dirty="0">
                 <a:solidFill>
                   <a:srgbClr val="1D3A8F"/>
                 </a:solidFill>
@@ -13702,7 +13390,7 @@
           </a:bodyPr>
           <a:lstStyle/>
           <a:p>
-            <a:pPr algn="l" indent="0" marL="0">
+            <a:pPr marL="0" indent="0" algn="l">
               <a:lnSpc>
                 <a:spcPct val="85714"/>
               </a:lnSpc>
@@ -13746,7 +13434,7 @@
           </a:bodyPr>
           <a:lstStyle/>
           <a:p>
-            <a:pPr algn="l" indent="0" marL="0">
+            <a:pPr marL="0" indent="0" algn="l">
               <a:lnSpc>
                 <a:spcPct val="102273"/>
               </a:lnSpc>
@@ -13790,7 +13478,7 @@
           </a:bodyPr>
           <a:lstStyle/>
           <a:p>
-            <a:pPr algn="l" indent="0" marL="0">
+            <a:pPr marL="0" indent="0" algn="l">
               <a:lnSpc>
                 <a:spcPct val="103846"/>
               </a:lnSpc>
@@ -13813,17 +13501,17 @@
       </p:sp>
       <p:pic>
         <p:nvPicPr>
-          <p:cNvPr id="37" name="Image 4" descr="preencoded.png">    </p:cNvPr>
+          <p:cNvPr id="37" name="Image 4" descr="preencoded.png"/>
           <p:cNvPicPr>
             <a:picLocks noChangeAspect="1"/>
           </p:cNvPicPr>
           <p:nvPr/>
         </p:nvPicPr>
         <p:blipFill>
-          <a:blip r:embed="rId9">
+          <a:blip r:embed="rId5">
             <a:extLst>
               <a:ext uri="{96DAC541-7B7A-43D3-8B79-37D633B846F1}">
-                <asvg:svgBlip xmlns:asvg="http://schemas.microsoft.com/office/drawing/2016/SVG/main" r:embed="rId10"/>
+                <asvg:svgBlip xmlns:asvg="http://schemas.microsoft.com/office/drawing/2016/SVG/main" r:embed="rId9"/>
               </a:ext>
             </a:extLst>
           </a:blip>
@@ -13902,15 +13590,15 @@
         </p:spPr>
         <p:txBody>
           <a:bodyPr wrap="square" lIns="25400" tIns="25400" rIns="25400" bIns="25400" rtlCol="0" anchor="t">
-            <a:normAutofit/>
-          </a:bodyPr>
-          <a:lstStyle/>
-          <a:p>
-            <a:pPr algn="l" indent="0" marL="0">
-              <a:buNone/>
-            </a:pPr>
-            <a:r>
-              <a:rPr lang="en-US" sz="1800" b="1" spc="108" kern="0" dirty="0">
+            <a:normAutofit lnSpcReduction="10000"/>
+          </a:bodyPr>
+          <a:lstStyle/>
+          <a:p>
+            <a:pPr marL="0" indent="0" algn="l">
+              <a:buNone/>
+            </a:pPr>
+            <a:r>
+              <a:rPr lang="en-US" sz="1800" b="1" kern="0" spc="108" dirty="0">
                 <a:solidFill>
                   <a:srgbClr val="3D4757"/>
                 </a:solidFill>
@@ -13947,7 +13635,7 @@
           </a:bodyPr>
           <a:lstStyle/>
           <a:p>
-            <a:pPr algn="l" indent="0" marL="0">
+            <a:pPr marL="0" indent="0" algn="l">
               <a:lnSpc>
                 <a:spcPct val="85714"/>
               </a:lnSpc>
@@ -13991,7 +13679,7 @@
           </a:bodyPr>
           <a:lstStyle/>
           <a:p>
-            <a:pPr algn="l" indent="0" marL="0">
+            <a:pPr marL="0" indent="0" algn="l">
               <a:lnSpc>
                 <a:spcPct val="102273"/>
               </a:lnSpc>
@@ -14035,7 +13723,7 @@
           </a:bodyPr>
           <a:lstStyle/>
           <a:p>
-            <a:pPr algn="l" indent="0" marL="0">
+            <a:pPr marL="0" indent="0" algn="l">
               <a:lnSpc>
                 <a:spcPct val="103846"/>
               </a:lnSpc>
@@ -14080,17 +13768,17 @@
       </p:sp>
       <p:pic>
         <p:nvPicPr>
-          <p:cNvPr id="45" name="Image 5" descr="preencoded.png">    </p:cNvPr>
+          <p:cNvPr id="45" name="Image 5" descr="preencoded.png"/>
           <p:cNvPicPr>
             <a:picLocks noChangeAspect="1"/>
           </p:cNvPicPr>
           <p:nvPr/>
         </p:nvPicPr>
         <p:blipFill>
-          <a:blip r:embed="rId11">
+          <a:blip r:embed="rId10">
             <a:extLst>
               <a:ext uri="{96DAC541-7B7A-43D3-8B79-37D633B846F1}">
-                <asvg:svgBlip xmlns:asvg="http://schemas.microsoft.com/office/drawing/2016/SVG/main" r:embed="rId12"/>
+                <asvg:svgBlip xmlns:asvg="http://schemas.microsoft.com/office/drawing/2016/SVG/main" r:embed="rId11"/>
               </a:ext>
             </a:extLst>
           </a:blip>
@@ -14131,7 +13819,7 @@
           </a:bodyPr>
           <a:lstStyle/>
           <a:p>
-            <a:pPr algn="l" indent="0" marL="0">
+            <a:pPr marL="0" indent="0" algn="l">
               <a:lnSpc>
                 <a:spcPct val="103279"/>
               </a:lnSpc>
@@ -14168,6 +13856,7 @@
         <a:solidFill>
           <a:srgbClr val="FFFFFF"/>
         </a:solidFill>
+        <a:effectLst/>
       </p:bgPr>
     </p:bg>
     <p:spTree>
@@ -14249,7 +13938,7 @@
           </a:bodyPr>
           <a:lstStyle/>
           <a:p>
-            <a:pPr algn="l" indent="0" marL="0">
+            <a:pPr marL="0" indent="0" algn="l">
               <a:buNone/>
             </a:pPr>
             <a:r>
@@ -14290,7 +13979,7 @@
           </a:bodyPr>
           <a:lstStyle/>
           <a:p>
-            <a:pPr algn="l" indent="0" marL="0">
+            <a:pPr marL="0" indent="0" algn="l">
               <a:buNone/>
             </a:pPr>
             <a:r>
@@ -14331,7 +14020,7 @@
           </a:bodyPr>
           <a:lstStyle/>
           <a:p>
-            <a:pPr algn="l" indent="0" marL="0">
+            <a:pPr marL="0" indent="0" algn="l">
               <a:buNone/>
             </a:pPr>
             <a:r>
@@ -14351,374 +14040,7 @@
       </p:sp>
       <p:pic>
         <p:nvPicPr>
-          <p:cNvPr id="7" name="Image 0" descr="preencoded.png">    </p:cNvPr>
-          <p:cNvPicPr>
-            <a:picLocks noChangeAspect="1"/>
-          </p:cNvPicPr>
-          <p:nvPr/>
-        </p:nvPicPr>
-        <p:blipFill>
-          <a:blip r:embed="rId1">
-            <a:extLst>
-              <a:ext uri="{96DAC541-7B7A-43D3-8B79-37D633B846F1}">
-                <asvg:svgBlip xmlns:asvg="http://schemas.microsoft.com/office/drawing/2016/SVG/main" r:embed="rId2"/>
-              </a:ext>
-            </a:extLst>
-          </a:blip>
-          <a:stretch>
-            <a:fillRect/>
-          </a:stretch>
-        </p:blipFill>
-        <p:spPr>
-          <a:xfrm>
-            <a:off x="16897350" y="533400"/>
-            <a:ext cx="438150" cy="438150"/>
-          </a:xfrm>
-          <a:prstGeom prst="rect">
-            <a:avLst/>
-          </a:prstGeom>
-        </p:spPr>
-      </p:pic>
-      <p:sp>
-        <p:nvSpPr>
-          <p:cNvPr id="8" name="Text 5"/>
-          <p:cNvSpPr/>
-          <p:nvPr/>
-        </p:nvSpPr>
-        <p:spPr>
-          <a:xfrm>
-            <a:off x="952500" y="1701800"/>
-            <a:ext cx="18021300" cy="723900"/>
-          </a:xfrm>
-          <a:prstGeom prst="rect">
-            <a:avLst/>
-          </a:prstGeom>
-          <a:noFill/>
-          <a:ln/>
-        </p:spPr>
-        <p:txBody>
-          <a:bodyPr wrap="square" lIns="25400" tIns="25400" rIns="25400" bIns="25400" rtlCol="0" anchor="t">
-            <a:normAutofit/>
-          </a:bodyPr>
-          <a:lstStyle/>
-          <a:p>
-            <a:pPr algn="l" indent="0" marL="0">
-              <a:buNone/>
-            </a:pPr>
-            <a:r>
-              <a:rPr lang="en-US" sz="4500" b="1" spc="-90" kern="0" dirty="0">
-                <a:solidFill>
-                  <a:srgbClr val="10151F"/>
-                </a:solidFill>
-                <a:latin typeface="Noto Sans KR" pitchFamily="34" charset="0"/>
-                <a:ea typeface="Noto Sans KR" pitchFamily="34" charset="-122"/>
-                <a:cs typeface="Noto Sans KR" pitchFamily="34" charset="-120"/>
-              </a:rPr>
-              <a:t>전체 파이프라인 아키텍처</a:t>
-            </a:r>
-            <a:endParaRPr lang="en-US" sz="4500" dirty="0"/>
-          </a:p>
-        </p:txBody>
-      </p:sp>
-      <p:sp>
-        <p:nvSpPr>
-          <p:cNvPr id="9" name="Text 6"/>
-          <p:cNvSpPr/>
-          <p:nvPr/>
-        </p:nvSpPr>
-        <p:spPr>
-          <a:xfrm>
-            <a:off x="952500" y="2578100"/>
-            <a:ext cx="18021300" cy="495300"/>
-          </a:xfrm>
-          <a:prstGeom prst="rect">
-            <a:avLst/>
-          </a:prstGeom>
-          <a:noFill/>
-          <a:ln/>
-        </p:spPr>
-        <p:txBody>
-          <a:bodyPr wrap="square" lIns="25400" tIns="25400" rIns="25400" bIns="25400" rtlCol="0" anchor="t">
-            <a:normAutofit/>
-          </a:bodyPr>
-          <a:lstStyle/>
-          <a:p>
-            <a:pPr algn="l" indent="0" marL="0">
-              <a:lnSpc>
-                <a:spcPct val="102857"/>
-              </a:lnSpc>
-              <a:buNone/>
-            </a:pPr>
-            <a:r>
-              <a:rPr lang="en-US" sz="2400" dirty="0">
-                <a:solidFill>
-                  <a:srgbClr val="5C6675"/>
-                </a:solidFill>
-                <a:latin typeface="Noto Sans KR" pitchFamily="34" charset="0"/>
-                <a:ea typeface="Noto Sans KR" pitchFamily="34" charset="-122"/>
-                <a:cs typeface="Noto Sans KR" pitchFamily="34" charset="-120"/>
-              </a:rPr>
-              <a:t>Next.js 프레임워크와 Python 서버리스 함수를 하나의 Vercel 배포에 공존시킨 하이브리드 구조</a:t>
-            </a:r>
-            <a:endParaRPr lang="en-US" sz="2400" dirty="0"/>
-          </a:p>
-        </p:txBody>
-      </p:sp>
-      <p:sp>
-        <p:nvSpPr>
-          <p:cNvPr id="10" name="Shape 7"/>
-          <p:cNvSpPr/>
-          <p:nvPr/>
-        </p:nvSpPr>
-        <p:spPr>
-          <a:xfrm>
-            <a:off x="952500" y="3492500"/>
-            <a:ext cx="3538538" cy="4590455"/>
-          </a:xfrm>
-          <a:prstGeom prst="roundRect">
-            <a:avLst>
-              <a:gd name="adj" fmla="val 4845"/>
-            </a:avLst>
-          </a:prstGeom>
-          <a:ln w="6350">
-            <a:solidFill>
-              <a:srgbClr val="E6E9F0"/>
-            </a:solidFill>
-            <a:prstDash val="solid"/>
-          </a:ln>
-        </p:spPr>
-      </p:sp>
-      <p:sp>
-        <p:nvSpPr>
-          <p:cNvPr id="11" name="Shape 8"/>
-          <p:cNvSpPr/>
-          <p:nvPr/>
-        </p:nvSpPr>
-        <p:spPr>
-          <a:xfrm>
-            <a:off x="958850" y="3498850"/>
-            <a:ext cx="3525838" cy="1257300"/>
-          </a:xfrm>
-          <a:prstGeom prst="rect">
-            <a:avLst/>
-          </a:prstGeom>
-          <a:solidFill>
-            <a:srgbClr val="10151F"/>
-          </a:solidFill>
-          <a:ln/>
-        </p:spPr>
-      </p:sp>
-      <p:sp>
-        <p:nvSpPr>
-          <p:cNvPr id="12" name="Text 9"/>
-          <p:cNvSpPr/>
-          <p:nvPr/>
-        </p:nvSpPr>
-        <p:spPr>
-          <a:xfrm>
-            <a:off x="1225550" y="3727450"/>
-            <a:ext cx="3291681" cy="368300"/>
-          </a:xfrm>
-          <a:prstGeom prst="rect">
-            <a:avLst/>
-          </a:prstGeom>
-          <a:noFill/>
-          <a:ln/>
-        </p:spPr>
-        <p:txBody>
-          <a:bodyPr wrap="square" lIns="25400" tIns="25400" rIns="25400" bIns="25400" rtlCol="0" anchor="t">
-            <a:normAutofit/>
-          </a:bodyPr>
-          <a:lstStyle/>
-          <a:p>
-            <a:pPr algn="l" indent="0" marL="0">
-              <a:buNone/>
-            </a:pPr>
-            <a:r>
-              <a:rPr lang="en-US" sz="1800" b="1" spc="108" kern="0" dirty="0">
-                <a:solidFill>
-                  <a:srgbClr val="8F9AAD"/>
-                </a:solidFill>
-                <a:latin typeface="Noto Sans KR" pitchFamily="34" charset="0"/>
-                <a:ea typeface="Noto Sans KR" pitchFamily="34" charset="-122"/>
-                <a:cs typeface="Noto Sans KR" pitchFamily="34" charset="-120"/>
-              </a:rPr>
-              <a:t>CLIENT</a:t>
-            </a:r>
-            <a:endParaRPr lang="en-US" sz="1800" dirty="0"/>
-          </a:p>
-        </p:txBody>
-      </p:sp>
-      <p:sp>
-        <p:nvSpPr>
-          <p:cNvPr id="13" name="Text 10"/>
-          <p:cNvSpPr/>
-          <p:nvPr/>
-        </p:nvSpPr>
-        <p:spPr>
-          <a:xfrm>
-            <a:off x="1225550" y="4114800"/>
-            <a:ext cx="3291681" cy="450850"/>
-          </a:xfrm>
-          <a:prstGeom prst="rect">
-            <a:avLst/>
-          </a:prstGeom>
-          <a:noFill/>
-          <a:ln/>
-        </p:spPr>
-        <p:txBody>
-          <a:bodyPr wrap="square" lIns="25400" tIns="25400" rIns="25400" bIns="25400" rtlCol="0" anchor="t">
-            <a:normAutofit/>
-          </a:bodyPr>
-          <a:lstStyle/>
-          <a:p>
-            <a:pPr algn="l" indent="0" marL="0">
-              <a:buNone/>
-            </a:pPr>
-            <a:r>
-              <a:rPr lang="en-US" sz="2250" b="1" dirty="0">
-                <a:solidFill>
-                  <a:srgbClr val="FFFFFF"/>
-                </a:solidFill>
-                <a:latin typeface="Noto Sans KR" pitchFamily="34" charset="0"/>
-                <a:ea typeface="Noto Sans KR" pitchFamily="34" charset="-122"/>
-                <a:cs typeface="Noto Sans KR" pitchFamily="34" charset="-120"/>
-              </a:rPr>
-              <a:t>사용자 입력</a:t>
-            </a:r>
-            <a:endParaRPr lang="en-US" sz="2250" dirty="0"/>
-          </a:p>
-        </p:txBody>
-      </p:sp>
-      <p:sp>
-        <p:nvSpPr>
-          <p:cNvPr id="14" name="Text 11"/>
-          <p:cNvSpPr/>
-          <p:nvPr/>
-        </p:nvSpPr>
-        <p:spPr>
-          <a:xfrm>
-            <a:off x="1225550" y="5041900"/>
-            <a:ext cx="3291681" cy="393700"/>
-          </a:xfrm>
-          <a:prstGeom prst="rect">
-            <a:avLst/>
-          </a:prstGeom>
-          <a:noFill/>
-          <a:ln/>
-        </p:spPr>
-        <p:txBody>
-          <a:bodyPr wrap="square" lIns="25400" tIns="25400" rIns="25400" bIns="25400" rtlCol="0" anchor="t">
-            <a:normAutofit/>
-          </a:bodyPr>
-          <a:lstStyle/>
-          <a:p>
-            <a:pPr algn="l" indent="0" marL="0">
-              <a:buNone/>
-            </a:pPr>
-            <a:r>
-              <a:rPr lang="en-US" sz="1950" b="1" dirty="0">
-                <a:solidFill>
-                  <a:srgbClr val="3D4757"/>
-                </a:solidFill>
-                <a:latin typeface="Noto Sans KR" pitchFamily="34" charset="0"/>
-                <a:ea typeface="Noto Sans KR" pitchFamily="34" charset="-122"/>
-                <a:cs typeface="Noto Sans KR" pitchFamily="34" charset="-120"/>
-              </a:rPr>
-              <a:t>DisputeForm.tsx</a:t>
-            </a:r>
-            <a:endParaRPr lang="en-US" sz="1950" dirty="0"/>
-          </a:p>
-        </p:txBody>
-      </p:sp>
-      <p:sp>
-        <p:nvSpPr>
-          <p:cNvPr id="15" name="Text 12"/>
-          <p:cNvSpPr/>
-          <p:nvPr/>
-        </p:nvSpPr>
-        <p:spPr>
-          <a:xfrm>
-            <a:off x="1225550" y="5568950"/>
-            <a:ext cx="3082211" cy="752475"/>
-          </a:xfrm>
-          <a:prstGeom prst="rect">
-            <a:avLst/>
-          </a:prstGeom>
-          <a:noFill/>
-          <a:ln/>
-        </p:spPr>
-        <p:txBody>
-          <a:bodyPr wrap="square" lIns="25400" tIns="25400" rIns="25400" bIns="25400" rtlCol="0" anchor="t">
-            <a:normAutofit/>
-          </a:bodyPr>
-          <a:lstStyle/>
-          <a:p>
-            <a:pPr algn="l" indent="0" marL="0">
-              <a:lnSpc>
-                <a:spcPct val="102273"/>
-              </a:lnSpc>
-              <a:buNone/>
-            </a:pPr>
-            <a:r>
-              <a:rPr lang="en-US" sz="1875" dirty="0">
-                <a:solidFill>
-                  <a:srgbClr val="5C6675"/>
-                </a:solidFill>
-                <a:latin typeface="Noto Sans KR" pitchFamily="34" charset="0"/>
-                <a:ea typeface="Noto Sans KR" pitchFamily="34" charset="-122"/>
-                <a:cs typeface="Noto Sans KR" pitchFamily="34" charset="-120"/>
-              </a:rPr>
-              <a:t>피해 서술문 · 피해 금액 · 계약 일자 · 품목 카테고리 힌트</a:t>
-            </a:r>
-            <a:endParaRPr lang="en-US" sz="1875" dirty="0"/>
-          </a:p>
-        </p:txBody>
-      </p:sp>
-      <p:sp>
-        <p:nvSpPr>
-          <p:cNvPr id="16" name="Text 13"/>
-          <p:cNvSpPr/>
-          <p:nvPr/>
-        </p:nvSpPr>
-        <p:spPr>
-          <a:xfrm>
-            <a:off x="1225550" y="7130455"/>
-            <a:ext cx="3082211" cy="698500"/>
-          </a:xfrm>
-          <a:prstGeom prst="rect">
-            <a:avLst/>
-          </a:prstGeom>
-          <a:noFill/>
-          <a:ln/>
-        </p:spPr>
-        <p:txBody>
-          <a:bodyPr wrap="square" lIns="25400" tIns="25400" rIns="25400" bIns="25400" rtlCol="0" anchor="t">
-            <a:normAutofit/>
-          </a:bodyPr>
-          <a:lstStyle/>
-          <a:p>
-            <a:pPr algn="l" indent="0" marL="0">
-              <a:buNone/>
-            </a:pPr>
-            <a:r>
-              <a:rPr lang="en-US" sz="1800" b="1" dirty="0">
-                <a:solidFill>
-                  <a:srgbClr val="1D3A8F"/>
-                </a:solidFill>
-                <a:latin typeface="Noto Sans KR" pitchFamily="34" charset="0"/>
-                <a:ea typeface="Noto Sans KR" pitchFamily="34" charset="-122"/>
-                <a:cs typeface="Noto Sans KR" pitchFamily="34" charset="-120"/>
-              </a:rPr>
-              <a:t>React · TypeScript · Tailwind</a:t>
-            </a:r>
-            <a:endParaRPr lang="en-US" sz="1800" dirty="0"/>
-          </a:p>
-        </p:txBody>
-      </p:sp>
-      <p:pic>
-        <p:nvPicPr>
-          <p:cNvPr id="17" name="Image 1" descr="preencoded.png">    </p:cNvPr>
+          <p:cNvPr id="7" name="Image 0" descr="preencoded.png"/>
           <p:cNvPicPr>
             <a:picLocks noChangeAspect="1"/>
           </p:cNvPicPr>
@@ -14738,8 +14060,8 @@
         </p:blipFill>
         <p:spPr>
           <a:xfrm>
-            <a:off x="4719638" y="5644853"/>
-            <a:ext cx="285750" cy="285750"/>
+            <a:off x="16897350" y="533400"/>
+            <a:ext cx="438150" cy="438150"/>
           </a:xfrm>
           <a:prstGeom prst="rect">
             <a:avLst/>
@@ -14748,13 +14070,98 @@
       </p:pic>
       <p:sp>
         <p:nvSpPr>
-          <p:cNvPr id="18" name="Shape 14"/>
-          <p:cNvSpPr/>
-          <p:nvPr/>
-        </p:nvSpPr>
-        <p:spPr>
-          <a:xfrm>
-            <a:off x="5233988" y="3492500"/>
+          <p:cNvPr id="8" name="Text 5"/>
+          <p:cNvSpPr/>
+          <p:nvPr/>
+        </p:nvSpPr>
+        <p:spPr>
+          <a:xfrm>
+            <a:off x="952500" y="1701800"/>
+            <a:ext cx="18021300" cy="723900"/>
+          </a:xfrm>
+          <a:prstGeom prst="rect">
+            <a:avLst/>
+          </a:prstGeom>
+          <a:noFill/>
+          <a:ln/>
+        </p:spPr>
+        <p:txBody>
+          <a:bodyPr wrap="square" lIns="25400" tIns="25400" rIns="25400" bIns="25400" rtlCol="0" anchor="t">
+            <a:normAutofit lnSpcReduction="10000"/>
+          </a:bodyPr>
+          <a:lstStyle/>
+          <a:p>
+            <a:pPr marL="0" indent="0" algn="l">
+              <a:buNone/>
+            </a:pPr>
+            <a:r>
+              <a:rPr lang="en-US" sz="4500" b="1" kern="0" spc="-90" dirty="0">
+                <a:solidFill>
+                  <a:srgbClr val="10151F"/>
+                </a:solidFill>
+                <a:latin typeface="Noto Sans KR" pitchFamily="34" charset="0"/>
+                <a:ea typeface="Noto Sans KR" pitchFamily="34" charset="-122"/>
+                <a:cs typeface="Noto Sans KR" pitchFamily="34" charset="-120"/>
+              </a:rPr>
+              <a:t>전체 파이프라인 아키텍처</a:t>
+            </a:r>
+            <a:endParaRPr lang="en-US" sz="4500" dirty="0"/>
+          </a:p>
+        </p:txBody>
+      </p:sp>
+      <p:sp>
+        <p:nvSpPr>
+          <p:cNvPr id="9" name="Text 6"/>
+          <p:cNvSpPr/>
+          <p:nvPr/>
+        </p:nvSpPr>
+        <p:spPr>
+          <a:xfrm>
+            <a:off x="952500" y="2578100"/>
+            <a:ext cx="18021300" cy="495300"/>
+          </a:xfrm>
+          <a:prstGeom prst="rect">
+            <a:avLst/>
+          </a:prstGeom>
+          <a:noFill/>
+          <a:ln/>
+        </p:spPr>
+        <p:txBody>
+          <a:bodyPr wrap="square" lIns="25400" tIns="25400" rIns="25400" bIns="25400" rtlCol="0" anchor="t">
+            <a:normAutofit/>
+          </a:bodyPr>
+          <a:lstStyle/>
+          <a:p>
+            <a:pPr marL="0" indent="0" algn="l">
+              <a:lnSpc>
+                <a:spcPct val="102857"/>
+              </a:lnSpc>
+              <a:buNone/>
+            </a:pPr>
+            <a:r>
+              <a:rPr lang="en-US" sz="2400" dirty="0">
+                <a:solidFill>
+                  <a:srgbClr val="5C6675"/>
+                </a:solidFill>
+                <a:latin typeface="Noto Sans KR" pitchFamily="34" charset="0"/>
+                <a:ea typeface="Noto Sans KR" pitchFamily="34" charset="-122"/>
+                <a:cs typeface="Noto Sans KR" pitchFamily="34" charset="-120"/>
+              </a:rPr>
+              <a:t>Next.js 프레임워크와 Python 서버리스 함수를 하나의 Vercel 배포에 공존시킨 하이브리드 구조</a:t>
+            </a:r>
+            <a:endParaRPr lang="en-US" sz="2400" dirty="0"/>
+          </a:p>
+        </p:txBody>
+      </p:sp>
+      <p:sp>
+        <p:nvSpPr>
+          <p:cNvPr id="10" name="Shape 7"/>
+          <p:cNvSpPr/>
+          <p:nvPr/>
+        </p:nvSpPr>
+        <p:spPr>
+          <a:xfrm>
+            <a:off x="952500" y="3492500"/>
             <a:ext cx="3538538" cy="4590455"/>
           </a:xfrm>
           <a:prstGeom prst="roundRect">
@@ -14772,33 +14179,33 @@
       </p:sp>
       <p:sp>
         <p:nvSpPr>
-          <p:cNvPr id="19" name="Shape 15"/>
-          <p:cNvSpPr/>
-          <p:nvPr/>
-        </p:nvSpPr>
-        <p:spPr>
-          <a:xfrm>
-            <a:off x="5240338" y="3498850"/>
+          <p:cNvPr id="11" name="Shape 8"/>
+          <p:cNvSpPr/>
+          <p:nvPr/>
+        </p:nvSpPr>
+        <p:spPr>
+          <a:xfrm>
+            <a:off x="958850" y="3498850"/>
             <a:ext cx="3525838" cy="1257300"/>
           </a:xfrm>
           <a:prstGeom prst="rect">
             <a:avLst/>
           </a:prstGeom>
           <a:solidFill>
-            <a:srgbClr val="0F9D76"/>
+            <a:srgbClr val="10151F"/>
           </a:solidFill>
           <a:ln/>
         </p:spPr>
       </p:sp>
       <p:sp>
         <p:nvSpPr>
-          <p:cNvPr id="20" name="Text 16"/>
-          <p:cNvSpPr/>
-          <p:nvPr/>
-        </p:nvSpPr>
-        <p:spPr>
-          <a:xfrm>
-            <a:off x="5507038" y="3727450"/>
+          <p:cNvPr id="12" name="Text 9"/>
+          <p:cNvSpPr/>
+          <p:nvPr/>
+        </p:nvSpPr>
+        <p:spPr>
+          <a:xfrm>
+            <a:off x="1225550" y="3727450"/>
             <a:ext cx="3291681" cy="368300"/>
           </a:xfrm>
           <a:prstGeom prst="rect">
@@ -14813,19 +14220,19 @@
           </a:bodyPr>
           <a:lstStyle/>
           <a:p>
-            <a:pPr algn="l" indent="0" marL="0">
-              <a:buNone/>
-            </a:pPr>
-            <a:r>
-              <a:rPr lang="en-US" sz="1800" b="1" spc="108" kern="0" dirty="0">
-                <a:solidFill>
-                  <a:srgbClr val="D3F4E8"/>
-                </a:solidFill>
-                <a:latin typeface="Noto Sans KR" pitchFamily="34" charset="0"/>
-                <a:ea typeface="Noto Sans KR" pitchFamily="34" charset="-122"/>
-                <a:cs typeface="Noto Sans KR" pitchFamily="34" charset="-120"/>
-              </a:rPr>
-              <a:t>PYTHON RUNTIME</a:t>
+            <a:pPr marL="0" indent="0" algn="l">
+              <a:buNone/>
+            </a:pPr>
+            <a:r>
+              <a:rPr lang="en-US" sz="1800" b="1" kern="0" spc="108" dirty="0">
+                <a:solidFill>
+                  <a:srgbClr val="8F9AAD"/>
+                </a:solidFill>
+                <a:latin typeface="Noto Sans KR" pitchFamily="34" charset="0"/>
+                <a:ea typeface="Noto Sans KR" pitchFamily="34" charset="-122"/>
+                <a:cs typeface="Noto Sans KR" pitchFamily="34" charset="-120"/>
+              </a:rPr>
+              <a:t>CLIENT</a:t>
             </a:r>
             <a:endParaRPr lang="en-US" sz="1800" dirty="0"/>
           </a:p>
@@ -14833,13 +14240,13 @@
       </p:sp>
       <p:sp>
         <p:nvSpPr>
-          <p:cNvPr id="21" name="Text 17"/>
-          <p:cNvSpPr/>
-          <p:nvPr/>
-        </p:nvSpPr>
-        <p:spPr>
-          <a:xfrm>
-            <a:off x="5507038" y="4114800"/>
+          <p:cNvPr id="13" name="Text 10"/>
+          <p:cNvSpPr/>
+          <p:nvPr/>
+        </p:nvSpPr>
+        <p:spPr>
+          <a:xfrm>
+            <a:off x="1225550" y="4114800"/>
             <a:ext cx="3291681" cy="450850"/>
           </a:xfrm>
           <a:prstGeom prst="rect">
@@ -14854,7 +14261,7 @@
           </a:bodyPr>
           <a:lstStyle/>
           <a:p>
-            <a:pPr algn="l" indent="0" marL="0">
+            <a:pPr marL="0" indent="0" algn="l">
               <a:buNone/>
             </a:pPr>
             <a:r>
@@ -14866,7 +14273,7 @@
                 <a:ea typeface="Noto Sans KR" pitchFamily="34" charset="-122"/>
                 <a:cs typeface="Noto Sans KR" pitchFamily="34" charset="-120"/>
               </a:rPr>
-              <a:t>/api/analyze</a:t>
+              <a:t>사용자 입력</a:t>
             </a:r>
             <a:endParaRPr lang="en-US" sz="2250" dirty="0"/>
           </a:p>
@@ -14874,13 +14281,13 @@
       </p:sp>
       <p:sp>
         <p:nvSpPr>
-          <p:cNvPr id="22" name="Text 18"/>
-          <p:cNvSpPr/>
-          <p:nvPr/>
-        </p:nvSpPr>
-        <p:spPr>
-          <a:xfrm>
-            <a:off x="5507038" y="5041900"/>
+          <p:cNvPr id="14" name="Text 11"/>
+          <p:cNvSpPr/>
+          <p:nvPr/>
+        </p:nvSpPr>
+        <p:spPr>
+          <a:xfrm>
+            <a:off x="1225550" y="5041900"/>
             <a:ext cx="3291681" cy="393700"/>
           </a:xfrm>
           <a:prstGeom prst="rect">
@@ -14895,7 +14302,7 @@
           </a:bodyPr>
           <a:lstStyle/>
           <a:p>
-            <a:pPr algn="l" indent="0" marL="0">
+            <a:pPr marL="0" indent="0" algn="l">
               <a:buNone/>
             </a:pPr>
             <a:r>
@@ -14907,7 +14314,7 @@
                 <a:ea typeface="Noto Sans KR" pitchFamily="34" charset="-122"/>
                 <a:cs typeface="Noto Sans KR" pitchFamily="34" charset="-120"/>
               </a:rPr>
-              <a:t>ml_predict.py</a:t>
+              <a:t>DisputeForm.tsx</a:t>
             </a:r>
             <a:endParaRPr lang="en-US" sz="1950" dirty="0"/>
           </a:p>
@@ -14915,28 +14322,28 @@
       </p:sp>
       <p:sp>
         <p:nvSpPr>
-          <p:cNvPr id="23" name="Text 19"/>
-          <p:cNvSpPr/>
-          <p:nvPr/>
-        </p:nvSpPr>
-        <p:spPr>
-          <a:xfrm>
-            <a:off x="5507038" y="5568950"/>
-            <a:ext cx="3082211" cy="1109663"/>
-          </a:xfrm>
-          <a:prstGeom prst="rect">
-            <a:avLst/>
-          </a:prstGeom>
-          <a:noFill/>
-          <a:ln/>
-        </p:spPr>
-        <p:txBody>
-          <a:bodyPr wrap="square" lIns="25400" tIns="25400" rIns="25400" bIns="25400" rtlCol="0" anchor="t">
-            <a:normAutofit/>
-          </a:bodyPr>
-          <a:lstStyle/>
-          <a:p>
-            <a:pPr algn="l" indent="0" marL="0">
+          <p:cNvPr id="15" name="Text 12"/>
+          <p:cNvSpPr/>
+          <p:nvPr/>
+        </p:nvSpPr>
+        <p:spPr>
+          <a:xfrm>
+            <a:off x="1225550" y="5568950"/>
+            <a:ext cx="3082211" cy="752475"/>
+          </a:xfrm>
+          <a:prstGeom prst="rect">
+            <a:avLst/>
+          </a:prstGeom>
+          <a:noFill/>
+          <a:ln/>
+        </p:spPr>
+        <p:txBody>
+          <a:bodyPr wrap="square" lIns="25400" tIns="25400" rIns="25400" bIns="25400" rtlCol="0" anchor="t">
+            <a:normAutofit/>
+          </a:bodyPr>
+          <a:lstStyle/>
+          <a:p>
+            <a:pPr marL="0" indent="0" algn="l">
               <a:lnSpc>
                 <a:spcPct val="102273"/>
               </a:lnSpc>
@@ -14951,7 +14358,7 @@
                 <a:ea typeface="Noto Sans KR" pitchFamily="34" charset="-122"/>
                 <a:cs typeface="Noto Sans KR" pitchFamily="34" charset="-120"/>
               </a:rPr>
-              <a:t>cleaner.py 정제 → predictor.py 분류 · 유사사례 Top-3 · 성공확률 산출</a:t>
+              <a:t>피해 서술문 · 피해 금액 · 계약 일자 · 품목 카테고리 힌트</a:t>
             </a:r>
             <a:endParaRPr lang="en-US" sz="1875" dirty="0"/>
           </a:p>
@@ -14959,40 +14366,40 @@
       </p:sp>
       <p:sp>
         <p:nvSpPr>
-          <p:cNvPr id="24" name="Text 20"/>
-          <p:cNvSpPr/>
-          <p:nvPr/>
-        </p:nvSpPr>
-        <p:spPr>
-          <a:xfrm>
-            <a:off x="5507038" y="7460655"/>
-            <a:ext cx="3291681" cy="368300"/>
-          </a:xfrm>
-          <a:prstGeom prst="rect">
-            <a:avLst/>
-          </a:prstGeom>
-          <a:noFill/>
-          <a:ln/>
-        </p:spPr>
-        <p:txBody>
-          <a:bodyPr wrap="square" lIns="25400" tIns="25400" rIns="25400" bIns="25400" rtlCol="0" anchor="t">
-            <a:normAutofit/>
-          </a:bodyPr>
-          <a:lstStyle/>
-          <a:p>
-            <a:pPr algn="l" indent="0" marL="0">
+          <p:cNvPr id="16" name="Text 13"/>
+          <p:cNvSpPr/>
+          <p:nvPr/>
+        </p:nvSpPr>
+        <p:spPr>
+          <a:xfrm>
+            <a:off x="1225550" y="7130455"/>
+            <a:ext cx="3082211" cy="698500"/>
+          </a:xfrm>
+          <a:prstGeom prst="rect">
+            <a:avLst/>
+          </a:prstGeom>
+          <a:noFill/>
+          <a:ln/>
+        </p:spPr>
+        <p:txBody>
+          <a:bodyPr wrap="square" lIns="25400" tIns="25400" rIns="25400" bIns="25400" rtlCol="0" anchor="t">
+            <a:normAutofit/>
+          </a:bodyPr>
+          <a:lstStyle/>
+          <a:p>
+            <a:pPr marL="0" indent="0" algn="l">
               <a:buNone/>
             </a:pPr>
             <a:r>
               <a:rPr lang="en-US" sz="1800" b="1" dirty="0">
                 <a:solidFill>
-                  <a:srgbClr val="0F9D76"/>
-                </a:solidFill>
-                <a:latin typeface="Noto Sans KR" pitchFamily="34" charset="0"/>
-                <a:ea typeface="Noto Sans KR" pitchFamily="34" charset="-122"/>
-                <a:cs typeface="Noto Sans KR" pitchFamily="34" charset="-120"/>
-              </a:rPr>
-              <a:t>Scikit-learn · joblib</a:t>
+                  <a:srgbClr val="1D3A8F"/>
+                </a:solidFill>
+                <a:latin typeface="Noto Sans KR" pitchFamily="34" charset="0"/>
+                <a:ea typeface="Noto Sans KR" pitchFamily="34" charset="-122"/>
+                <a:cs typeface="Noto Sans KR" pitchFamily="34" charset="-120"/>
+              </a:rPr>
+              <a:t>React · TypeScript · Tailwind</a:t>
             </a:r>
             <a:endParaRPr lang="en-US" sz="1800" dirty="0"/>
           </a:p>
@@ -15000,7 +14407,7 @@
       </p:sp>
       <p:pic>
         <p:nvPicPr>
-          <p:cNvPr id="25" name="Image 2" descr="preencoded.png">    </p:cNvPr>
+          <p:cNvPr id="17" name="Image 1" descr="preencoded.png"/>
           <p:cNvPicPr>
             <a:picLocks noChangeAspect="1"/>
           </p:cNvPicPr>
@@ -15020,7 +14427,7 @@
         </p:blipFill>
         <p:spPr>
           <a:xfrm>
-            <a:off x="9001125" y="5644853"/>
+            <a:off x="4719638" y="5644853"/>
             <a:ext cx="285750" cy="285750"/>
           </a:xfrm>
           <a:prstGeom prst="rect">
@@ -15030,13 +14437,13 @@
       </p:pic>
       <p:sp>
         <p:nvSpPr>
-          <p:cNvPr id="26" name="Shape 21"/>
-          <p:cNvSpPr/>
-          <p:nvPr/>
-        </p:nvSpPr>
-        <p:spPr>
-          <a:xfrm>
-            <a:off x="9515475" y="3492500"/>
+          <p:cNvPr id="18" name="Shape 14"/>
+          <p:cNvSpPr/>
+          <p:nvPr/>
+        </p:nvSpPr>
+        <p:spPr>
+          <a:xfrm>
+            <a:off x="5233988" y="3492500"/>
             <a:ext cx="3538538" cy="4590455"/>
           </a:xfrm>
           <a:prstGeom prst="roundRect">
@@ -15054,6 +14461,288 @@
       </p:sp>
       <p:sp>
         <p:nvSpPr>
+          <p:cNvPr id="19" name="Shape 15"/>
+          <p:cNvSpPr/>
+          <p:nvPr/>
+        </p:nvSpPr>
+        <p:spPr>
+          <a:xfrm>
+            <a:off x="5240338" y="3498850"/>
+            <a:ext cx="3525838" cy="1257300"/>
+          </a:xfrm>
+          <a:prstGeom prst="rect">
+            <a:avLst/>
+          </a:prstGeom>
+          <a:solidFill>
+            <a:srgbClr val="0F9D76"/>
+          </a:solidFill>
+          <a:ln/>
+        </p:spPr>
+      </p:sp>
+      <p:sp>
+        <p:nvSpPr>
+          <p:cNvPr id="20" name="Text 16"/>
+          <p:cNvSpPr/>
+          <p:nvPr/>
+        </p:nvSpPr>
+        <p:spPr>
+          <a:xfrm>
+            <a:off x="5507038" y="3727450"/>
+            <a:ext cx="3291681" cy="368300"/>
+          </a:xfrm>
+          <a:prstGeom prst="rect">
+            <a:avLst/>
+          </a:prstGeom>
+          <a:noFill/>
+          <a:ln/>
+        </p:spPr>
+        <p:txBody>
+          <a:bodyPr wrap="square" lIns="25400" tIns="25400" rIns="25400" bIns="25400" rtlCol="0" anchor="t">
+            <a:normAutofit/>
+          </a:bodyPr>
+          <a:lstStyle/>
+          <a:p>
+            <a:pPr marL="0" indent="0" algn="l">
+              <a:buNone/>
+            </a:pPr>
+            <a:r>
+              <a:rPr lang="en-US" sz="1800" b="1" kern="0" spc="108" dirty="0">
+                <a:solidFill>
+                  <a:srgbClr val="D3F4E8"/>
+                </a:solidFill>
+                <a:latin typeface="Noto Sans KR" pitchFamily="34" charset="0"/>
+                <a:ea typeface="Noto Sans KR" pitchFamily="34" charset="-122"/>
+                <a:cs typeface="Noto Sans KR" pitchFamily="34" charset="-120"/>
+              </a:rPr>
+              <a:t>PYTHON RUNTIME</a:t>
+            </a:r>
+            <a:endParaRPr lang="en-US" sz="1800" dirty="0"/>
+          </a:p>
+        </p:txBody>
+      </p:sp>
+      <p:sp>
+        <p:nvSpPr>
+          <p:cNvPr id="21" name="Text 17"/>
+          <p:cNvSpPr/>
+          <p:nvPr/>
+        </p:nvSpPr>
+        <p:spPr>
+          <a:xfrm>
+            <a:off x="5507038" y="4114800"/>
+            <a:ext cx="3291681" cy="450850"/>
+          </a:xfrm>
+          <a:prstGeom prst="rect">
+            <a:avLst/>
+          </a:prstGeom>
+          <a:noFill/>
+          <a:ln/>
+        </p:spPr>
+        <p:txBody>
+          <a:bodyPr wrap="square" lIns="25400" tIns="25400" rIns="25400" bIns="25400" rtlCol="0" anchor="t">
+            <a:normAutofit/>
+          </a:bodyPr>
+          <a:lstStyle/>
+          <a:p>
+            <a:pPr marL="0" indent="0" algn="l">
+              <a:buNone/>
+            </a:pPr>
+            <a:r>
+              <a:rPr lang="en-US" sz="2250" b="1" dirty="0">
+                <a:solidFill>
+                  <a:srgbClr val="FFFFFF"/>
+                </a:solidFill>
+                <a:latin typeface="Noto Sans KR" pitchFamily="34" charset="0"/>
+                <a:ea typeface="Noto Sans KR" pitchFamily="34" charset="-122"/>
+                <a:cs typeface="Noto Sans KR" pitchFamily="34" charset="-120"/>
+              </a:rPr>
+              <a:t>/api/analyze</a:t>
+            </a:r>
+            <a:endParaRPr lang="en-US" sz="2250" dirty="0"/>
+          </a:p>
+        </p:txBody>
+      </p:sp>
+      <p:sp>
+        <p:nvSpPr>
+          <p:cNvPr id="22" name="Text 18"/>
+          <p:cNvSpPr/>
+          <p:nvPr/>
+        </p:nvSpPr>
+        <p:spPr>
+          <a:xfrm>
+            <a:off x="5507038" y="5041900"/>
+            <a:ext cx="3291681" cy="393700"/>
+          </a:xfrm>
+          <a:prstGeom prst="rect">
+            <a:avLst/>
+          </a:prstGeom>
+          <a:noFill/>
+          <a:ln/>
+        </p:spPr>
+        <p:txBody>
+          <a:bodyPr wrap="square" lIns="25400" tIns="25400" rIns="25400" bIns="25400" rtlCol="0" anchor="t">
+            <a:normAutofit/>
+          </a:bodyPr>
+          <a:lstStyle/>
+          <a:p>
+            <a:pPr marL="0" indent="0" algn="l">
+              <a:buNone/>
+            </a:pPr>
+            <a:r>
+              <a:rPr lang="en-US" sz="1950" b="1" dirty="0">
+                <a:solidFill>
+                  <a:srgbClr val="3D4757"/>
+                </a:solidFill>
+                <a:latin typeface="Noto Sans KR" pitchFamily="34" charset="0"/>
+                <a:ea typeface="Noto Sans KR" pitchFamily="34" charset="-122"/>
+                <a:cs typeface="Noto Sans KR" pitchFamily="34" charset="-120"/>
+              </a:rPr>
+              <a:t>ml_predict.py</a:t>
+            </a:r>
+            <a:endParaRPr lang="en-US" sz="1950" dirty="0"/>
+          </a:p>
+        </p:txBody>
+      </p:sp>
+      <p:sp>
+        <p:nvSpPr>
+          <p:cNvPr id="23" name="Text 19"/>
+          <p:cNvSpPr/>
+          <p:nvPr/>
+        </p:nvSpPr>
+        <p:spPr>
+          <a:xfrm>
+            <a:off x="5507038" y="5568950"/>
+            <a:ext cx="3082211" cy="1109663"/>
+          </a:xfrm>
+          <a:prstGeom prst="rect">
+            <a:avLst/>
+          </a:prstGeom>
+          <a:noFill/>
+          <a:ln/>
+        </p:spPr>
+        <p:txBody>
+          <a:bodyPr wrap="square" lIns="25400" tIns="25400" rIns="25400" bIns="25400" rtlCol="0" anchor="t">
+            <a:normAutofit/>
+          </a:bodyPr>
+          <a:lstStyle/>
+          <a:p>
+            <a:pPr marL="0" indent="0" algn="l">
+              <a:lnSpc>
+                <a:spcPct val="102273"/>
+              </a:lnSpc>
+              <a:buNone/>
+            </a:pPr>
+            <a:r>
+              <a:rPr lang="en-US" sz="1875" dirty="0">
+                <a:solidFill>
+                  <a:srgbClr val="5C6675"/>
+                </a:solidFill>
+                <a:latin typeface="Noto Sans KR" pitchFamily="34" charset="0"/>
+                <a:ea typeface="Noto Sans KR" pitchFamily="34" charset="-122"/>
+                <a:cs typeface="Noto Sans KR" pitchFamily="34" charset="-120"/>
+              </a:rPr>
+              <a:t>cleaner.py 정제 → predictor.py 분류 · 유사사례 Top-3 · 성공확률 산출</a:t>
+            </a:r>
+            <a:endParaRPr lang="en-US" sz="1875" dirty="0"/>
+          </a:p>
+        </p:txBody>
+      </p:sp>
+      <p:sp>
+        <p:nvSpPr>
+          <p:cNvPr id="24" name="Text 20"/>
+          <p:cNvSpPr/>
+          <p:nvPr/>
+        </p:nvSpPr>
+        <p:spPr>
+          <a:xfrm>
+            <a:off x="5507038" y="7460655"/>
+            <a:ext cx="3291681" cy="368300"/>
+          </a:xfrm>
+          <a:prstGeom prst="rect">
+            <a:avLst/>
+          </a:prstGeom>
+          <a:noFill/>
+          <a:ln/>
+        </p:spPr>
+        <p:txBody>
+          <a:bodyPr wrap="square" lIns="25400" tIns="25400" rIns="25400" bIns="25400" rtlCol="0" anchor="t">
+            <a:normAutofit/>
+          </a:bodyPr>
+          <a:lstStyle/>
+          <a:p>
+            <a:pPr marL="0" indent="0" algn="l">
+              <a:buNone/>
+            </a:pPr>
+            <a:r>
+              <a:rPr lang="en-US" sz="1800" b="1" dirty="0">
+                <a:solidFill>
+                  <a:srgbClr val="0F9D76"/>
+                </a:solidFill>
+                <a:latin typeface="Noto Sans KR" pitchFamily="34" charset="0"/>
+                <a:ea typeface="Noto Sans KR" pitchFamily="34" charset="-122"/>
+                <a:cs typeface="Noto Sans KR" pitchFamily="34" charset="-120"/>
+              </a:rPr>
+              <a:t>Scikit-learn · joblib</a:t>
+            </a:r>
+            <a:endParaRPr lang="en-US" sz="1800" dirty="0"/>
+          </a:p>
+        </p:txBody>
+      </p:sp>
+      <p:pic>
+        <p:nvPicPr>
+          <p:cNvPr id="25" name="Image 2" descr="preencoded.png"/>
+          <p:cNvPicPr>
+            <a:picLocks noChangeAspect="1"/>
+          </p:cNvPicPr>
+          <p:nvPr/>
+        </p:nvPicPr>
+        <p:blipFill>
+          <a:blip r:embed="rId5">
+            <a:extLst>
+              <a:ext uri="{96DAC541-7B7A-43D3-8B79-37D633B846F1}">
+                <asvg:svgBlip xmlns:asvg="http://schemas.microsoft.com/office/drawing/2016/SVG/main" r:embed="rId7"/>
+              </a:ext>
+            </a:extLst>
+          </a:blip>
+          <a:stretch>
+            <a:fillRect/>
+          </a:stretch>
+        </p:blipFill>
+        <p:spPr>
+          <a:xfrm>
+            <a:off x="9001125" y="5644853"/>
+            <a:ext cx="285750" cy="285750"/>
+          </a:xfrm>
+          <a:prstGeom prst="rect">
+            <a:avLst/>
+          </a:prstGeom>
+        </p:spPr>
+      </p:pic>
+      <p:sp>
+        <p:nvSpPr>
+          <p:cNvPr id="26" name="Shape 21"/>
+          <p:cNvSpPr/>
+          <p:nvPr/>
+        </p:nvSpPr>
+        <p:spPr>
+          <a:xfrm>
+            <a:off x="9515475" y="3492500"/>
+            <a:ext cx="3538538" cy="4590455"/>
+          </a:xfrm>
+          <a:prstGeom prst="roundRect">
+            <a:avLst>
+              <a:gd name="adj" fmla="val 4845"/>
+            </a:avLst>
+          </a:prstGeom>
+          <a:ln w="6350">
+            <a:solidFill>
+              <a:srgbClr val="E6E9F0"/>
+            </a:solidFill>
+            <a:prstDash val="solid"/>
+          </a:ln>
+        </p:spPr>
+      </p:sp>
+      <p:sp>
+        <p:nvSpPr>
           <p:cNvPr id="27" name="Shape 22"/>
           <p:cNvSpPr/>
           <p:nvPr/>
@@ -15095,11 +14784,11 @@
           </a:bodyPr>
           <a:lstStyle/>
           <a:p>
-            <a:pPr algn="l" indent="0" marL="0">
-              <a:buNone/>
-            </a:pPr>
-            <a:r>
-              <a:rPr lang="en-US" sz="1800" b="1" spc="108" kern="0" dirty="0">
+            <a:pPr marL="0" indent="0" algn="l">
+              <a:buNone/>
+            </a:pPr>
+            <a:r>
+              <a:rPr lang="en-US" sz="1800" b="1" kern="0" spc="108" dirty="0">
                 <a:solidFill>
                   <a:srgbClr val="C2D1F5"/>
                 </a:solidFill>
@@ -15136,7 +14825,7 @@
           </a:bodyPr>
           <a:lstStyle/>
           <a:p>
-            <a:pPr algn="l" indent="0" marL="0">
+            <a:pPr marL="0" indent="0" algn="l">
               <a:buNone/>
             </a:pPr>
             <a:r>
@@ -15177,7 +14866,7 @@
           </a:bodyPr>
           <a:lstStyle/>
           <a:p>
-            <a:pPr algn="l" indent="0" marL="0">
+            <a:pPr marL="0" indent="0" algn="l">
               <a:buNone/>
             </a:pPr>
             <a:r>
@@ -15218,7 +14907,7 @@
           </a:bodyPr>
           <a:lstStyle/>
           <a:p>
-            <a:pPr algn="l" indent="0" marL="0">
+            <a:pPr marL="0" indent="0" algn="l">
               <a:lnSpc>
                 <a:spcPct val="102273"/>
               </a:lnSpc>
@@ -15262,7 +14951,7 @@
           </a:bodyPr>
           <a:lstStyle/>
           <a:p>
-            <a:pPr algn="l" indent="0" marL="0">
+            <a:pPr marL="0" indent="0" algn="l">
               <a:buNone/>
             </a:pPr>
             <a:r>
@@ -15282,14 +14971,14 @@
       </p:sp>
       <p:pic>
         <p:nvPicPr>
-          <p:cNvPr id="33" name="Image 3" descr="preencoded.png">    </p:cNvPr>
+          <p:cNvPr id="33" name="Image 3" descr="preencoded.png"/>
           <p:cNvPicPr>
             <a:picLocks noChangeAspect="1"/>
           </p:cNvPicPr>
           <p:nvPr/>
         </p:nvPicPr>
         <p:blipFill>
-          <a:blip r:embed="rId7">
+          <a:blip r:embed="rId5">
             <a:extLst>
               <a:ext uri="{96DAC541-7B7A-43D3-8B79-37D633B846F1}">
                 <asvg:svgBlip xmlns:asvg="http://schemas.microsoft.com/office/drawing/2016/SVG/main" r:embed="rId8"/>
@@ -15377,11 +15066,11 @@
           </a:bodyPr>
           <a:lstStyle/>
           <a:p>
-            <a:pPr algn="l" indent="0" marL="0">
-              <a:buNone/>
-            </a:pPr>
-            <a:r>
-              <a:rPr lang="en-US" sz="1800" b="1" spc="108" kern="0" dirty="0">
+            <a:pPr marL="0" indent="0" algn="l">
+              <a:buNone/>
+            </a:pPr>
+            <a:r>
+              <a:rPr lang="en-US" sz="1800" b="1" kern="0" spc="108" dirty="0">
                 <a:solidFill>
                   <a:srgbClr val="8F9AAD"/>
                 </a:solidFill>
@@ -15418,7 +15107,7 @@
           </a:bodyPr>
           <a:lstStyle/>
           <a:p>
-            <a:pPr algn="l" indent="0" marL="0">
+            <a:pPr marL="0" indent="0" algn="l">
               <a:buNone/>
             </a:pPr>
             <a:r>
@@ -15459,7 +15148,7 @@
           </a:bodyPr>
           <a:lstStyle/>
           <a:p>
-            <a:pPr algn="l" indent="0" marL="0">
+            <a:pPr marL="0" indent="0" algn="l">
               <a:buNone/>
             </a:pPr>
             <a:r>
@@ -15500,7 +15189,7 @@
           </a:bodyPr>
           <a:lstStyle/>
           <a:p>
-            <a:pPr algn="l" indent="0" marL="0">
+            <a:pPr marL="0" indent="0" algn="l">
               <a:lnSpc>
                 <a:spcPct val="102273"/>
               </a:lnSpc>
@@ -15544,7 +15233,7 @@
           </a:bodyPr>
           <a:lstStyle/>
           <a:p>
-            <a:pPr algn="l" indent="0" marL="0">
+            <a:pPr marL="0" indent="0" algn="l">
               <a:buNone/>
             </a:pPr>
             <a:r>
@@ -15627,7 +15316,7 @@
           </a:bodyPr>
           <a:lstStyle/>
           <a:p>
-            <a:pPr algn="l" indent="0" marL="0">
+            <a:pPr marL="0" indent="0" algn="l">
               <a:lnSpc>
                 <a:spcPct val="100982"/>
               </a:lnSpc>
@@ -15713,7 +15402,7 @@
           </a:bodyPr>
           <a:lstStyle/>
           <a:p>
-            <a:pPr algn="l" indent="0" marL="0">
+            <a:pPr marL="0" indent="0" algn="l">
               <a:lnSpc>
                 <a:spcPct val="100982"/>
               </a:lnSpc>
@@ -15750,6 +15439,7 @@
         <a:solidFill>
           <a:srgbClr val="FFFFFF"/>
         </a:solidFill>
+        <a:effectLst/>
       </p:bgPr>
     </p:bg>
     <p:spTree>
@@ -15831,7 +15521,7 @@
           </a:bodyPr>
           <a:lstStyle/>
           <a:p>
-            <a:pPr algn="l" indent="0" marL="0">
+            <a:pPr marL="0" indent="0" algn="l">
               <a:buNone/>
             </a:pPr>
             <a:r>
@@ -15872,7 +15562,7 @@
           </a:bodyPr>
           <a:lstStyle/>
           <a:p>
-            <a:pPr algn="l" indent="0" marL="0">
+            <a:pPr marL="0" indent="0" algn="l">
               <a:buNone/>
             </a:pPr>
             <a:r>
@@ -15913,7 +15603,7 @@
           </a:bodyPr>
           <a:lstStyle/>
           <a:p>
-            <a:pPr algn="l" indent="0" marL="0">
+            <a:pPr marL="0" indent="0" algn="l">
               <a:buNone/>
             </a:pPr>
             <a:r>
@@ -15933,267 +15623,7 @@
       </p:sp>
       <p:pic>
         <p:nvPicPr>
-          <p:cNvPr id="7" name="Image 0" descr="preencoded.png">    </p:cNvPr>
-          <p:cNvPicPr>
-            <a:picLocks noChangeAspect="1"/>
-          </p:cNvPicPr>
-          <p:nvPr/>
-        </p:nvPicPr>
-        <p:blipFill>
-          <a:blip r:embed="rId1">
-            <a:extLst>
-              <a:ext uri="{96DAC541-7B7A-43D3-8B79-37D633B846F1}">
-                <asvg:svgBlip xmlns:asvg="http://schemas.microsoft.com/office/drawing/2016/SVG/main" r:embed="rId2"/>
-              </a:ext>
-            </a:extLst>
-          </a:blip>
-          <a:stretch>
-            <a:fillRect/>
-          </a:stretch>
-        </p:blipFill>
-        <p:spPr>
-          <a:xfrm>
-            <a:off x="16897350" y="533400"/>
-            <a:ext cx="438150" cy="438150"/>
-          </a:xfrm>
-          <a:prstGeom prst="rect">
-            <a:avLst/>
-          </a:prstGeom>
-        </p:spPr>
-      </p:pic>
-      <p:sp>
-        <p:nvSpPr>
-          <p:cNvPr id="8" name="Text 5"/>
-          <p:cNvSpPr/>
-          <p:nvPr/>
-        </p:nvSpPr>
-        <p:spPr>
-          <a:xfrm>
-            <a:off x="952500" y="1701800"/>
-            <a:ext cx="18021300" cy="723900"/>
-          </a:xfrm>
-          <a:prstGeom prst="rect">
-            <a:avLst/>
-          </a:prstGeom>
-          <a:noFill/>
-          <a:ln/>
-        </p:spPr>
-        <p:txBody>
-          <a:bodyPr wrap="square" lIns="25400" tIns="25400" rIns="25400" bIns="25400" rtlCol="0" anchor="t">
-            <a:normAutofit/>
-          </a:bodyPr>
-          <a:lstStyle/>
-          <a:p>
-            <a:pPr algn="l" indent="0" marL="0">
-              <a:buNone/>
-            </a:pPr>
-            <a:r>
-              <a:rPr lang="en-US" sz="4500" b="1" spc="-90" kern="0" dirty="0">
-                <a:solidFill>
-                  <a:srgbClr val="10151F"/>
-                </a:solidFill>
-                <a:latin typeface="Noto Sans KR" pitchFamily="34" charset="0"/>
-                <a:ea typeface="Noto Sans KR" pitchFamily="34" charset="-122"/>
-                <a:cs typeface="Noto Sans KR" pitchFamily="34" charset="-120"/>
-              </a:rPr>
-              <a:t>데이터 수집 및 전처리</a:t>
-            </a:r>
-            <a:endParaRPr lang="en-US" sz="4500" dirty="0"/>
-          </a:p>
-        </p:txBody>
-      </p:sp>
-      <p:sp>
-        <p:nvSpPr>
-          <p:cNvPr id="9" name="Text 6"/>
-          <p:cNvSpPr/>
-          <p:nvPr/>
-        </p:nvSpPr>
-        <p:spPr>
-          <a:xfrm>
-            <a:off x="952500" y="2578100"/>
-            <a:ext cx="18021300" cy="495300"/>
-          </a:xfrm>
-          <a:prstGeom prst="rect">
-            <a:avLst/>
-          </a:prstGeom>
-          <a:noFill/>
-          <a:ln/>
-        </p:spPr>
-        <p:txBody>
-          <a:bodyPr wrap="square" lIns="25400" tIns="25400" rIns="25400" bIns="25400" rtlCol="0" anchor="t">
-            <a:normAutofit/>
-          </a:bodyPr>
-          <a:lstStyle/>
-          <a:p>
-            <a:pPr algn="l" indent="0" marL="0">
-              <a:lnSpc>
-                <a:spcPct val="102857"/>
-              </a:lnSpc>
-              <a:buNone/>
-            </a:pPr>
-            <a:r>
-              <a:rPr lang="en-US" sz="2400" dirty="0">
-                <a:solidFill>
-                  <a:srgbClr val="5C6675"/>
-                </a:solidFill>
-                <a:latin typeface="Noto Sans KR" pitchFamily="34" charset="0"/>
-                <a:ea typeface="Noto Sans KR" pitchFamily="34" charset="-122"/>
-                <a:cs typeface="Noto Sans KR" pitchFamily="34" charset="-120"/>
-              </a:rPr>
-              <a:t>출처: 공정거래위원회 「소비자 민원학습데이터 — 모범상담 사례」 · 한국소비자원 공개 기준</a:t>
-            </a:r>
-            <a:endParaRPr lang="en-US" sz="2400" dirty="0"/>
-          </a:p>
-        </p:txBody>
-      </p:sp>
-      <p:sp>
-        <p:nvSpPr>
-          <p:cNvPr id="10" name="Shape 7"/>
-          <p:cNvSpPr/>
-          <p:nvPr/>
-        </p:nvSpPr>
-        <p:spPr>
-          <a:xfrm>
-            <a:off x="952500" y="3492500"/>
-            <a:ext cx="4121150" cy="2070100"/>
-          </a:xfrm>
-          <a:prstGeom prst="roundRect">
-            <a:avLst>
-              <a:gd name="adj" fmla="val 6442"/>
-            </a:avLst>
-          </a:prstGeom>
-          <a:solidFill>
-            <a:srgbClr val="F7F8FB"/>
-          </a:solidFill>
-          <a:ln/>
-        </p:spPr>
-      </p:sp>
-      <p:sp>
-        <p:nvSpPr>
-          <p:cNvPr id="11" name="Text 8"/>
-          <p:cNvSpPr/>
-          <p:nvPr/>
-        </p:nvSpPr>
-        <p:spPr>
-          <a:xfrm>
-            <a:off x="1219200" y="3740150"/>
-            <a:ext cx="3946525" cy="368300"/>
-          </a:xfrm>
-          <a:prstGeom prst="rect">
-            <a:avLst/>
-          </a:prstGeom>
-          <a:noFill/>
-          <a:ln/>
-        </p:spPr>
-        <p:txBody>
-          <a:bodyPr wrap="square" lIns="25400" tIns="25400" rIns="25400" bIns="25400" rtlCol="0" anchor="t">
-            <a:normAutofit/>
-          </a:bodyPr>
-          <a:lstStyle/>
-          <a:p>
-            <a:pPr algn="l" indent="0" marL="0">
-              <a:buNone/>
-            </a:pPr>
-            <a:r>
-              <a:rPr lang="en-US" sz="1800" b="1" dirty="0">
-                <a:solidFill>
-                  <a:srgbClr val="8F9AAD"/>
-                </a:solidFill>
-                <a:latin typeface="Noto Sans KR" pitchFamily="34" charset="0"/>
-                <a:ea typeface="Noto Sans KR" pitchFamily="34" charset="-122"/>
-                <a:cs typeface="Noto Sans KR" pitchFamily="34" charset="-120"/>
-              </a:rPr>
-              <a:t>원본 CSV</a:t>
-            </a:r>
-            <a:endParaRPr lang="en-US" sz="1800" dirty="0"/>
-          </a:p>
-        </p:txBody>
-      </p:sp>
-      <p:sp>
-        <p:nvSpPr>
-          <p:cNvPr id="12" name="Text 9"/>
-          <p:cNvSpPr/>
-          <p:nvPr/>
-        </p:nvSpPr>
-        <p:spPr>
-          <a:xfrm>
-            <a:off x="1219200" y="4146550"/>
-            <a:ext cx="3946525" cy="469900"/>
-          </a:xfrm>
-          <a:prstGeom prst="rect">
-            <a:avLst/>
-          </a:prstGeom>
-          <a:noFill/>
-          <a:ln/>
-        </p:spPr>
-        <p:txBody>
-          <a:bodyPr wrap="square" lIns="25400" tIns="25400" rIns="25400" bIns="25400" rtlCol="0" anchor="t">
-            <a:normAutofit/>
-          </a:bodyPr>
-          <a:lstStyle/>
-          <a:p>
-            <a:pPr algn="l" indent="0" marL="0">
-              <a:buNone/>
-            </a:pPr>
-            <a:r>
-              <a:rPr lang="en-US" sz="2850" b="1" spc="-57" kern="0" dirty="0">
-                <a:solidFill>
-                  <a:srgbClr val="10151F"/>
-                </a:solidFill>
-                <a:latin typeface="Noto Sans KR" pitchFamily="34" charset="0"/>
-                <a:ea typeface="Noto Sans KR" pitchFamily="34" charset="-122"/>
-                <a:cs typeface="Noto Sans KR" pitchFamily="34" charset="-120"/>
-              </a:rPr>
-              <a:t>565건</a:t>
-            </a:r>
-            <a:endParaRPr lang="en-US" sz="2850" dirty="0"/>
-          </a:p>
-        </p:txBody>
-      </p:sp>
-      <p:sp>
-        <p:nvSpPr>
-          <p:cNvPr id="13" name="Text 10"/>
-          <p:cNvSpPr/>
-          <p:nvPr/>
-        </p:nvSpPr>
-        <p:spPr>
-          <a:xfrm>
-            <a:off x="1219200" y="4654550"/>
-            <a:ext cx="3695383" cy="698500"/>
-          </a:xfrm>
-          <a:prstGeom prst="rect">
-            <a:avLst/>
-          </a:prstGeom>
-          <a:noFill/>
-          <a:ln/>
-        </p:spPr>
-        <p:txBody>
-          <a:bodyPr wrap="square" lIns="25400" tIns="25400" rIns="25400" bIns="25400" rtlCol="0" anchor="t">
-            <a:normAutofit/>
-          </a:bodyPr>
-          <a:lstStyle/>
-          <a:p>
-            <a:pPr algn="l" indent="0" marL="0">
-              <a:buNone/>
-            </a:pPr>
-            <a:r>
-              <a:rPr lang="en-US" sz="1800" dirty="0">
-                <a:solidFill>
-                  <a:srgbClr val="5C6675"/>
-                </a:solidFill>
-                <a:latin typeface="Noto Sans KR" pitchFamily="34" charset="0"/>
-                <a:ea typeface="Noto Sans KR" pitchFamily="34" charset="-122"/>
-                <a:cs typeface="Noto Sans KR" pitchFamily="34" charset="-120"/>
-              </a:rPr>
-              <a:t>사건번호 · 제목 · 내용 · 답변 (라벨 없음)</a:t>
-            </a:r>
-            <a:endParaRPr lang="en-US" sz="1800" dirty="0"/>
-          </a:p>
-        </p:txBody>
-      </p:sp>
-      <p:pic>
-        <p:nvPicPr>
-          <p:cNvPr id="14" name="Image 1" descr="preencoded.png">    </p:cNvPr>
+          <p:cNvPr id="7" name="Image 0" descr="preencoded.png"/>
           <p:cNvPicPr>
             <a:picLocks noChangeAspect="1"/>
           </p:cNvPicPr>
@@ -16213,8 +15643,8 @@
         </p:blipFill>
         <p:spPr>
           <a:xfrm>
-            <a:off x="5264150" y="4384675"/>
-            <a:ext cx="285750" cy="285750"/>
+            <a:off x="16897350" y="533400"/>
+            <a:ext cx="438150" cy="438150"/>
           </a:xfrm>
           <a:prstGeom prst="rect">
             <a:avLst/>
@@ -16223,13 +15653,98 @@
       </p:pic>
       <p:sp>
         <p:nvSpPr>
-          <p:cNvPr id="15" name="Shape 11"/>
-          <p:cNvSpPr/>
-          <p:nvPr/>
-        </p:nvSpPr>
-        <p:spPr>
-          <a:xfrm>
-            <a:off x="5740400" y="3492500"/>
+          <p:cNvPr id="8" name="Text 5"/>
+          <p:cNvSpPr/>
+          <p:nvPr/>
+        </p:nvSpPr>
+        <p:spPr>
+          <a:xfrm>
+            <a:off x="952500" y="1701800"/>
+            <a:ext cx="18021300" cy="723900"/>
+          </a:xfrm>
+          <a:prstGeom prst="rect">
+            <a:avLst/>
+          </a:prstGeom>
+          <a:noFill/>
+          <a:ln/>
+        </p:spPr>
+        <p:txBody>
+          <a:bodyPr wrap="square" lIns="25400" tIns="25400" rIns="25400" bIns="25400" rtlCol="0" anchor="t">
+            <a:normAutofit lnSpcReduction="10000"/>
+          </a:bodyPr>
+          <a:lstStyle/>
+          <a:p>
+            <a:pPr marL="0" indent="0" algn="l">
+              <a:buNone/>
+            </a:pPr>
+            <a:r>
+              <a:rPr lang="en-US" sz="4500" b="1" kern="0" spc="-90" dirty="0">
+                <a:solidFill>
+                  <a:srgbClr val="10151F"/>
+                </a:solidFill>
+                <a:latin typeface="Noto Sans KR" pitchFamily="34" charset="0"/>
+                <a:ea typeface="Noto Sans KR" pitchFamily="34" charset="-122"/>
+                <a:cs typeface="Noto Sans KR" pitchFamily="34" charset="-120"/>
+              </a:rPr>
+              <a:t>데이터 수집 및 전처리</a:t>
+            </a:r>
+            <a:endParaRPr lang="en-US" sz="4500" dirty="0"/>
+          </a:p>
+        </p:txBody>
+      </p:sp>
+      <p:sp>
+        <p:nvSpPr>
+          <p:cNvPr id="9" name="Text 6"/>
+          <p:cNvSpPr/>
+          <p:nvPr/>
+        </p:nvSpPr>
+        <p:spPr>
+          <a:xfrm>
+            <a:off x="952500" y="2578100"/>
+            <a:ext cx="18021300" cy="495300"/>
+          </a:xfrm>
+          <a:prstGeom prst="rect">
+            <a:avLst/>
+          </a:prstGeom>
+          <a:noFill/>
+          <a:ln/>
+        </p:spPr>
+        <p:txBody>
+          <a:bodyPr wrap="square" lIns="25400" tIns="25400" rIns="25400" bIns="25400" rtlCol="0" anchor="t">
+            <a:normAutofit/>
+          </a:bodyPr>
+          <a:lstStyle/>
+          <a:p>
+            <a:pPr marL="0" indent="0" algn="l">
+              <a:lnSpc>
+                <a:spcPct val="102857"/>
+              </a:lnSpc>
+              <a:buNone/>
+            </a:pPr>
+            <a:r>
+              <a:rPr lang="en-US" sz="2400" dirty="0">
+                <a:solidFill>
+                  <a:srgbClr val="5C6675"/>
+                </a:solidFill>
+                <a:latin typeface="Noto Sans KR" pitchFamily="34" charset="0"/>
+                <a:ea typeface="Noto Sans KR" pitchFamily="34" charset="-122"/>
+                <a:cs typeface="Noto Sans KR" pitchFamily="34" charset="-120"/>
+              </a:rPr>
+              <a:t>출처: 공정거래위원회 「소비자 민원학습데이터 — 모범상담 사례」 · 한국소비자원 공개 기준</a:t>
+            </a:r>
+            <a:endParaRPr lang="en-US" sz="2400" dirty="0"/>
+          </a:p>
+        </p:txBody>
+      </p:sp>
+      <p:sp>
+        <p:nvSpPr>
+          <p:cNvPr id="10" name="Shape 7"/>
+          <p:cNvSpPr/>
+          <p:nvPr/>
+        </p:nvSpPr>
+        <p:spPr>
+          <a:xfrm>
+            <a:off x="952500" y="3492500"/>
             <a:ext cx="4121150" cy="2070100"/>
           </a:xfrm>
           <a:prstGeom prst="roundRect">
@@ -16238,6 +15753,181 @@
             </a:avLst>
           </a:prstGeom>
           <a:solidFill>
+            <a:srgbClr val="F7F8FB"/>
+          </a:solidFill>
+          <a:ln/>
+        </p:spPr>
+      </p:sp>
+      <p:sp>
+        <p:nvSpPr>
+          <p:cNvPr id="11" name="Text 8"/>
+          <p:cNvSpPr/>
+          <p:nvPr/>
+        </p:nvSpPr>
+        <p:spPr>
+          <a:xfrm>
+            <a:off x="1219200" y="3740150"/>
+            <a:ext cx="3946525" cy="368300"/>
+          </a:xfrm>
+          <a:prstGeom prst="rect">
+            <a:avLst/>
+          </a:prstGeom>
+          <a:noFill/>
+          <a:ln/>
+        </p:spPr>
+        <p:txBody>
+          <a:bodyPr wrap="square" lIns="25400" tIns="25400" rIns="25400" bIns="25400" rtlCol="0" anchor="t">
+            <a:normAutofit/>
+          </a:bodyPr>
+          <a:lstStyle/>
+          <a:p>
+            <a:pPr marL="0" indent="0" algn="l">
+              <a:buNone/>
+            </a:pPr>
+            <a:r>
+              <a:rPr lang="en-US" sz="1800" b="1" dirty="0">
+                <a:solidFill>
+                  <a:srgbClr val="8F9AAD"/>
+                </a:solidFill>
+                <a:latin typeface="Noto Sans KR" pitchFamily="34" charset="0"/>
+                <a:ea typeface="Noto Sans KR" pitchFamily="34" charset="-122"/>
+                <a:cs typeface="Noto Sans KR" pitchFamily="34" charset="-120"/>
+              </a:rPr>
+              <a:t>원본 CSV</a:t>
+            </a:r>
+            <a:endParaRPr lang="en-US" sz="1800" dirty="0"/>
+          </a:p>
+        </p:txBody>
+      </p:sp>
+      <p:sp>
+        <p:nvSpPr>
+          <p:cNvPr id="12" name="Text 9"/>
+          <p:cNvSpPr/>
+          <p:nvPr/>
+        </p:nvSpPr>
+        <p:spPr>
+          <a:xfrm>
+            <a:off x="1219200" y="4146550"/>
+            <a:ext cx="3946525" cy="469900"/>
+          </a:xfrm>
+          <a:prstGeom prst="rect">
+            <a:avLst/>
+          </a:prstGeom>
+          <a:noFill/>
+          <a:ln/>
+        </p:spPr>
+        <p:txBody>
+          <a:bodyPr wrap="square" lIns="25400" tIns="25400" rIns="25400" bIns="25400" rtlCol="0" anchor="t">
+            <a:normAutofit lnSpcReduction="10000"/>
+          </a:bodyPr>
+          <a:lstStyle/>
+          <a:p>
+            <a:pPr marL="0" indent="0" algn="l">
+              <a:buNone/>
+            </a:pPr>
+            <a:r>
+              <a:rPr lang="en-US" sz="2850" b="1" kern="0" spc="-57" dirty="0">
+                <a:solidFill>
+                  <a:srgbClr val="10151F"/>
+                </a:solidFill>
+                <a:latin typeface="Noto Sans KR" pitchFamily="34" charset="0"/>
+                <a:ea typeface="Noto Sans KR" pitchFamily="34" charset="-122"/>
+                <a:cs typeface="Noto Sans KR" pitchFamily="34" charset="-120"/>
+              </a:rPr>
+              <a:t>565건</a:t>
+            </a:r>
+            <a:endParaRPr lang="en-US" sz="2850" dirty="0"/>
+          </a:p>
+        </p:txBody>
+      </p:sp>
+      <p:sp>
+        <p:nvSpPr>
+          <p:cNvPr id="13" name="Text 10"/>
+          <p:cNvSpPr/>
+          <p:nvPr/>
+        </p:nvSpPr>
+        <p:spPr>
+          <a:xfrm>
+            <a:off x="1219200" y="4654550"/>
+            <a:ext cx="3695383" cy="698500"/>
+          </a:xfrm>
+          <a:prstGeom prst="rect">
+            <a:avLst/>
+          </a:prstGeom>
+          <a:noFill/>
+          <a:ln/>
+        </p:spPr>
+        <p:txBody>
+          <a:bodyPr wrap="square" lIns="25400" tIns="25400" rIns="25400" bIns="25400" rtlCol="0" anchor="t">
+            <a:normAutofit/>
+          </a:bodyPr>
+          <a:lstStyle/>
+          <a:p>
+            <a:pPr marL="0" indent="0" algn="l">
+              <a:buNone/>
+            </a:pPr>
+            <a:r>
+              <a:rPr lang="en-US" sz="1800" dirty="0">
+                <a:solidFill>
+                  <a:srgbClr val="5C6675"/>
+                </a:solidFill>
+                <a:latin typeface="Noto Sans KR" pitchFamily="34" charset="0"/>
+                <a:ea typeface="Noto Sans KR" pitchFamily="34" charset="-122"/>
+                <a:cs typeface="Noto Sans KR" pitchFamily="34" charset="-120"/>
+              </a:rPr>
+              <a:t>사건번호 · 제목 · 내용 · 답변 (라벨 없음)</a:t>
+            </a:r>
+            <a:endParaRPr lang="en-US" sz="1800" dirty="0"/>
+          </a:p>
+        </p:txBody>
+      </p:sp>
+      <p:pic>
+        <p:nvPicPr>
+          <p:cNvPr id="14" name="Image 1" descr="preencoded.png"/>
+          <p:cNvPicPr>
+            <a:picLocks noChangeAspect="1"/>
+          </p:cNvPicPr>
+          <p:nvPr/>
+        </p:nvPicPr>
+        <p:blipFill>
+          <a:blip r:embed="rId5">
+            <a:extLst>
+              <a:ext uri="{96DAC541-7B7A-43D3-8B79-37D633B846F1}">
+                <asvg:svgBlip xmlns:asvg="http://schemas.microsoft.com/office/drawing/2016/SVG/main" r:embed="rId6"/>
+              </a:ext>
+            </a:extLst>
+          </a:blip>
+          <a:stretch>
+            <a:fillRect/>
+          </a:stretch>
+        </p:blipFill>
+        <p:spPr>
+          <a:xfrm>
+            <a:off x="5264150" y="4384675"/>
+            <a:ext cx="285750" cy="285750"/>
+          </a:xfrm>
+          <a:prstGeom prst="rect">
+            <a:avLst/>
+          </a:prstGeom>
+        </p:spPr>
+      </p:pic>
+      <p:sp>
+        <p:nvSpPr>
+          <p:cNvPr id="15" name="Shape 11"/>
+          <p:cNvSpPr/>
+          <p:nvPr/>
+        </p:nvSpPr>
+        <p:spPr>
+          <a:xfrm>
+            <a:off x="5740400" y="3492500"/>
+            <a:ext cx="4121150" cy="2070100"/>
+          </a:xfrm>
+          <a:prstGeom prst="roundRect">
+            <a:avLst>
+              <a:gd name="adj" fmla="val 6442"/>
+            </a:avLst>
+          </a:prstGeom>
+          <a:solidFill>
             <a:srgbClr val="F0F4FF"/>
           </a:solidFill>
           <a:ln/>
@@ -16266,7 +15956,7 @@
           </a:bodyPr>
           <a:lstStyle/>
           <a:p>
-            <a:pPr algn="l" indent="0" marL="0">
+            <a:pPr marL="0" indent="0" algn="l">
               <a:buNone/>
             </a:pPr>
             <a:r>
@@ -16303,15 +15993,15 @@
         </p:spPr>
         <p:txBody>
           <a:bodyPr wrap="square" lIns="25400" tIns="25400" rIns="25400" bIns="25400" rtlCol="0" anchor="t">
-            <a:normAutofit/>
-          </a:bodyPr>
-          <a:lstStyle/>
-          <a:p>
-            <a:pPr algn="l" indent="0" marL="0">
-              <a:buNone/>
-            </a:pPr>
-            <a:r>
-              <a:rPr lang="en-US" sz="2850" b="1" spc="-57" kern="0" dirty="0">
+            <a:normAutofit lnSpcReduction="10000"/>
+          </a:bodyPr>
+          <a:lstStyle/>
+          <a:p>
+            <a:pPr marL="0" indent="0" algn="l">
+              <a:buNone/>
+            </a:pPr>
+            <a:r>
+              <a:rPr lang="en-US" sz="2850" b="1" kern="0" spc="-57" dirty="0">
                 <a:solidFill>
                   <a:srgbClr val="1D3A8F"/>
                 </a:solidFill>
@@ -16348,7 +16038,7 @@
           </a:bodyPr>
           <a:lstStyle/>
           <a:p>
-            <a:pPr algn="l" indent="0" marL="0">
+            <a:pPr marL="0" indent="0" algn="l">
               <a:buNone/>
             </a:pPr>
             <a:r>
@@ -16413,7 +16103,7 @@
           </a:bodyPr>
           <a:lstStyle/>
           <a:p>
-            <a:pPr algn="l" indent="0" marL="0">
+            <a:pPr marL="0" indent="0" algn="l">
               <a:buNone/>
             </a:pPr>
             <a:r>
@@ -16476,7 +16166,7 @@
           </a:bodyPr>
           <a:lstStyle/>
           <a:p>
-            <a:pPr algn="ctr" indent="0" marL="0">
+            <a:pPr marL="0" indent="0" algn="ctr">
               <a:buNone/>
             </a:pPr>
             <a:r>
@@ -16517,7 +16207,7 @@
           </a:bodyPr>
           <a:lstStyle/>
           <a:p>
-            <a:pPr algn="l" indent="0" marL="0">
+            <a:pPr marL="0" indent="0" algn="l">
               <a:lnSpc>
                 <a:spcPct val="104464"/>
               </a:lnSpc>
@@ -16583,7 +16273,7 @@
           </a:bodyPr>
           <a:lstStyle/>
           <a:p>
-            <a:pPr algn="ctr" indent="0" marL="0">
+            <a:pPr marL="0" indent="0" algn="ctr">
               <a:buNone/>
             </a:pPr>
             <a:r>
@@ -16624,7 +16314,7 @@
           </a:bodyPr>
           <a:lstStyle/>
           <a:p>
-            <a:pPr algn="l" indent="0" marL="0">
+            <a:pPr marL="0" indent="0" algn="l">
               <a:lnSpc>
                 <a:spcPct val="104464"/>
               </a:lnSpc>
@@ -16690,7 +16380,7 @@
           </a:bodyPr>
           <a:lstStyle/>
           <a:p>
-            <a:pPr algn="ctr" indent="0" marL="0">
+            <a:pPr marL="0" indent="0" algn="ctr">
               <a:buNone/>
             </a:pPr>
             <a:r>
@@ -16731,7 +16421,7 @@
           </a:bodyPr>
           <a:lstStyle/>
           <a:p>
-            <a:pPr algn="l" indent="0" marL="0">
+            <a:pPr marL="0" indent="0" algn="l">
               <a:lnSpc>
                 <a:spcPct val="104464"/>
               </a:lnSpc>
@@ -16797,7 +16487,7 @@
           </a:bodyPr>
           <a:lstStyle/>
           <a:p>
-            <a:pPr algn="ctr" indent="0" marL="0">
+            <a:pPr marL="0" indent="0" algn="ctr">
               <a:buNone/>
             </a:pPr>
             <a:r>
@@ -16838,7 +16528,7 @@
           </a:bodyPr>
           <a:lstStyle/>
           <a:p>
-            <a:pPr algn="l" indent="0" marL="0">
+            <a:pPr marL="0" indent="0" algn="l">
               <a:lnSpc>
                 <a:spcPct val="104464"/>
               </a:lnSpc>
@@ -16906,7 +16596,7 @@
           </a:bodyPr>
           <a:lstStyle/>
           <a:p>
-            <a:pPr algn="l" indent="0" marL="0">
+            <a:pPr marL="0" indent="0" algn="l">
               <a:buNone/>
             </a:pPr>
             <a:r>
@@ -16947,7 +16637,7 @@
           </a:bodyPr>
           <a:lstStyle/>
           <a:p>
-            <a:pPr algn="l" indent="0" marL="0">
+            <a:pPr marL="0" indent="0" algn="l">
               <a:lnSpc>
                 <a:spcPct val="102273"/>
               </a:lnSpc>
@@ -16991,7 +16681,7 @@
           </a:bodyPr>
           <a:lstStyle/>
           <a:p>
-            <a:pPr algn="l" indent="0" marL="0">
+            <a:pPr marL="0" indent="0" algn="l">
               <a:buNone/>
             </a:pPr>
             <a:r>
@@ -17032,7 +16722,7 @@
           </a:bodyPr>
           <a:lstStyle/>
           <a:p>
-            <a:pPr algn="l" indent="0" marL="0">
+            <a:pPr marL="0" indent="0" algn="l">
               <a:buNone/>
             </a:pPr>
             <a:r>
@@ -17117,7 +16807,7 @@
           </a:bodyPr>
           <a:lstStyle/>
           <a:p>
-            <a:pPr algn="l" indent="0" marL="0">
+            <a:pPr marL="0" indent="0" algn="l">
               <a:buNone/>
             </a:pPr>
             <a:r>
@@ -17158,7 +16848,7 @@
           </a:bodyPr>
           <a:lstStyle/>
           <a:p>
-            <a:pPr algn="l" indent="0" marL="0">
+            <a:pPr marL="0" indent="0" algn="l">
               <a:buNone/>
             </a:pPr>
             <a:r>
@@ -17243,7 +16933,7 @@
           </a:bodyPr>
           <a:lstStyle/>
           <a:p>
-            <a:pPr algn="l" indent="0" marL="0">
+            <a:pPr marL="0" indent="0" algn="l">
               <a:buNone/>
             </a:pPr>
             <a:r>
@@ -17284,7 +16974,7 @@
           </a:bodyPr>
           <a:lstStyle/>
           <a:p>
-            <a:pPr algn="l" indent="0" marL="0">
+            <a:pPr marL="0" indent="0" algn="l">
               <a:buNone/>
             </a:pPr>
             <a:r>
@@ -17369,7 +17059,7 @@
           </a:bodyPr>
           <a:lstStyle/>
           <a:p>
-            <a:pPr algn="l" indent="0" marL="0">
+            <a:pPr marL="0" indent="0" algn="l">
               <a:buNone/>
             </a:pPr>
             <a:r>
@@ -17410,7 +17100,7 @@
           </a:bodyPr>
           <a:lstStyle/>
           <a:p>
-            <a:pPr algn="l" indent="0" marL="0">
+            <a:pPr marL="0" indent="0" algn="l">
               <a:buNone/>
             </a:pPr>
             <a:r>
@@ -17495,7 +17185,7 @@
           </a:bodyPr>
           <a:lstStyle/>
           <a:p>
-            <a:pPr algn="l" indent="0" marL="0">
+            <a:pPr marL="0" indent="0" algn="l">
               <a:lnSpc>
                 <a:spcPct val="103846"/>
               </a:lnSpc>
@@ -17532,6 +17222,7 @@
         <a:solidFill>
           <a:srgbClr val="FFFFFF"/>
         </a:solidFill>
+        <a:effectLst/>
       </p:bgPr>
     </p:bg>
     <p:spTree>
@@ -17613,7 +17304,7 @@
           </a:bodyPr>
           <a:lstStyle/>
           <a:p>
-            <a:pPr algn="l" indent="0" marL="0">
+            <a:pPr marL="0" indent="0" algn="l">
               <a:buNone/>
             </a:pPr>
             <a:r>
@@ -17654,7 +17345,7 @@
           </a:bodyPr>
           <a:lstStyle/>
           <a:p>
-            <a:pPr algn="l" indent="0" marL="0">
+            <a:pPr marL="0" indent="0" algn="l">
               <a:buNone/>
             </a:pPr>
             <a:r>
@@ -17695,7 +17386,7 @@
           </a:bodyPr>
           <a:lstStyle/>
           <a:p>
-            <a:pPr algn="l" indent="0" marL="0">
+            <a:pPr marL="0" indent="0" algn="l">
               <a:buNone/>
             </a:pPr>
             <a:r>
@@ -17715,17 +17406,17 @@
       </p:sp>
       <p:pic>
         <p:nvPicPr>
-          <p:cNvPr id="7" name="Image 0" descr="preencoded.png">    </p:cNvPr>
+          <p:cNvPr id="7" name="Image 0" descr="preencoded.png"/>
           <p:cNvPicPr>
             <a:picLocks noChangeAspect="1"/>
           </p:cNvPicPr>
           <p:nvPr/>
         </p:nvPicPr>
         <p:blipFill>
-          <a:blip r:embed="rId1">
+          <a:blip r:embed="rId3">
             <a:extLst>
               <a:ext uri="{96DAC541-7B7A-43D3-8B79-37D633B846F1}">
-                <asvg:svgBlip xmlns:asvg="http://schemas.microsoft.com/office/drawing/2016/SVG/main" r:embed="rId2"/>
+                <asvg:svgBlip xmlns:asvg="http://schemas.microsoft.com/office/drawing/2016/SVG/main" r:embed="rId4"/>
               </a:ext>
             </a:extLst>
           </a:blip>
@@ -17762,15 +17453,15 @@
         </p:spPr>
         <p:txBody>
           <a:bodyPr wrap="square" lIns="25400" tIns="25400" rIns="25400" bIns="25400" rtlCol="0" anchor="t">
-            <a:normAutofit/>
-          </a:bodyPr>
-          <a:lstStyle/>
-          <a:p>
-            <a:pPr algn="l" indent="0" marL="0">
-              <a:buNone/>
-            </a:pPr>
-            <a:r>
-              <a:rPr lang="en-US" sz="4500" b="1" spc="-90" kern="0" dirty="0">
+            <a:normAutofit lnSpcReduction="10000"/>
+          </a:bodyPr>
+          <a:lstStyle/>
+          <a:p>
+            <a:pPr marL="0" indent="0" algn="l">
+              <a:buNone/>
+            </a:pPr>
+            <a:r>
+              <a:rPr lang="en-US" sz="4500" b="1" kern="0" spc="-90" dirty="0">
                 <a:solidFill>
                   <a:srgbClr val="10151F"/>
                 </a:solidFill>
@@ -17807,7 +17498,7 @@
           </a:bodyPr>
           <a:lstStyle/>
           <a:p>
-            <a:pPr algn="l" indent="0" marL="0">
+            <a:pPr marL="0" indent="0" algn="l">
               <a:lnSpc>
                 <a:spcPct val="102857"/>
               </a:lnSpc>
@@ -17875,11 +17566,11 @@
           </a:bodyPr>
           <a:lstStyle/>
           <a:p>
-            <a:pPr algn="l" indent="0" marL="0">
-              <a:buNone/>
-            </a:pPr>
-            <a:r>
-              <a:rPr lang="en-US" sz="1800" b="1" spc="108" kern="0" dirty="0">
+            <a:pPr marL="0" indent="0" algn="l">
+              <a:buNone/>
+            </a:pPr>
+            <a:r>
+              <a:rPr lang="en-US" sz="1800" b="1" kern="0" spc="108" dirty="0">
                 <a:solidFill>
                   <a:srgbClr val="0F9D76"/>
                 </a:solidFill>
@@ -17916,7 +17607,7 @@
           </a:bodyPr>
           <a:lstStyle/>
           <a:p>
-            <a:pPr algn="l" indent="0" marL="0">
+            <a:pPr marL="0" indent="0" algn="l">
               <a:buNone/>
             </a:pPr>
             <a:r>
@@ -17957,7 +17648,7 @@
           </a:bodyPr>
           <a:lstStyle/>
           <a:p>
-            <a:pPr algn="l" indent="0" marL="0">
+            <a:pPr marL="0" indent="0" algn="l">
               <a:lnSpc>
                 <a:spcPct val="104464"/>
               </a:lnSpc>
@@ -18025,11 +17716,11 @@
           </a:bodyPr>
           <a:lstStyle/>
           <a:p>
-            <a:pPr algn="l" indent="0" marL="0">
-              <a:buNone/>
-            </a:pPr>
-            <a:r>
-              <a:rPr lang="en-US" sz="1800" b="1" spc="108" kern="0" dirty="0">
+            <a:pPr marL="0" indent="0" algn="l">
+              <a:buNone/>
+            </a:pPr>
+            <a:r>
+              <a:rPr lang="en-US" sz="1800" b="1" kern="0" spc="108" dirty="0">
                 <a:solidFill>
                   <a:srgbClr val="1D3A8F"/>
                 </a:solidFill>
@@ -18066,7 +17757,7 @@
           </a:bodyPr>
           <a:lstStyle/>
           <a:p>
-            <a:pPr algn="l" indent="0" marL="0">
+            <a:pPr marL="0" indent="0" algn="l">
               <a:buNone/>
             </a:pPr>
             <a:r>
@@ -18107,7 +17798,7 @@
           </a:bodyPr>
           <a:lstStyle/>
           <a:p>
-            <a:pPr algn="l" indent="0" marL="0">
+            <a:pPr marL="0" indent="0" algn="l">
               <a:lnSpc>
                 <a:spcPct val="104464"/>
               </a:lnSpc>
@@ -18175,11 +17866,11 @@
           </a:bodyPr>
           <a:lstStyle/>
           <a:p>
-            <a:pPr algn="l" indent="0" marL="0">
-              <a:buNone/>
-            </a:pPr>
-            <a:r>
-              <a:rPr lang="en-US" sz="1800" b="1" spc="108" kern="0" dirty="0">
+            <a:pPr marL="0" indent="0" algn="l">
+              <a:buNone/>
+            </a:pPr>
+            <a:r>
+              <a:rPr lang="en-US" sz="1800" b="1" kern="0" spc="108" dirty="0">
                 <a:solidFill>
                   <a:srgbClr val="3D4757"/>
                 </a:solidFill>
@@ -18216,7 +17907,7 @@
           </a:bodyPr>
           <a:lstStyle/>
           <a:p>
-            <a:pPr algn="l" indent="0" marL="0">
+            <a:pPr marL="0" indent="0" algn="l">
               <a:buNone/>
             </a:pPr>
             <a:r>
@@ -18257,7 +17948,7 @@
           </a:bodyPr>
           <a:lstStyle/>
           <a:p>
-            <a:pPr algn="l" indent="0" marL="0">
+            <a:pPr marL="0" indent="0" algn="l">
               <a:lnSpc>
                 <a:spcPct val="104464"/>
               </a:lnSpc>
@@ -18323,7 +18014,7 @@
           </a:bodyPr>
           <a:lstStyle/>
           <a:p>
-            <a:pPr algn="l" indent="0" marL="0">
+            <a:pPr marL="0" indent="0" algn="l">
               <a:buNone/>
             </a:pPr>
             <a:r>
@@ -18364,7 +18055,7 @@
           </a:bodyPr>
           <a:lstStyle/>
           <a:p>
-            <a:pPr algn="l" indent="0" marL="0">
+            <a:pPr marL="0" indent="0" algn="l">
               <a:buNone/>
             </a:pPr>
             <a:r>
@@ -18405,7 +18096,7 @@
           </a:bodyPr>
           <a:lstStyle/>
           <a:p>
-            <a:pPr algn="l" indent="0" marL="0">
+            <a:pPr marL="0" indent="0" algn="l">
               <a:lnSpc>
                 <a:spcPct val="100982"/>
               </a:lnSpc>
@@ -18449,7 +18140,7 @@
           </a:bodyPr>
           <a:lstStyle/>
           <a:p>
-            <a:pPr algn="l" indent="0" marL="0">
+            <a:pPr marL="0" indent="0" algn="l">
               <a:buNone/>
             </a:pPr>
             <a:r>
@@ -18490,7 +18181,7 @@
           </a:bodyPr>
           <a:lstStyle/>
           <a:p>
-            <a:pPr algn="l" indent="0" marL="0">
+            <a:pPr marL="0" indent="0" algn="l">
               <a:lnSpc>
                 <a:spcPct val="100982"/>
               </a:lnSpc>
@@ -18556,11 +18247,11 @@
           </a:bodyPr>
           <a:lstStyle/>
           <a:p>
-            <a:pPr algn="l" indent="0" marL="0">
-              <a:buNone/>
-            </a:pPr>
-            <a:r>
-              <a:rPr lang="en-US" sz="1800" b="1" spc="108" kern="0" dirty="0">
+            <a:pPr marL="0" indent="0" algn="l">
+              <a:buNone/>
+            </a:pPr>
+            <a:r>
+              <a:rPr lang="en-US" sz="1800" b="1" kern="0" spc="108" dirty="0">
                 <a:solidFill>
                   <a:srgbClr val="8F9AAD"/>
                 </a:solidFill>
@@ -18597,7 +18288,7 @@
           </a:bodyPr>
           <a:lstStyle/>
           <a:p>
-            <a:pPr algn="l" indent="0" marL="0">
+            <a:pPr marL="0" indent="0" algn="l">
               <a:lnSpc>
                 <a:spcPct val="96486"/>
               </a:lnSpc>
@@ -18634,6 +18325,7 @@
         <a:solidFill>
           <a:srgbClr val="FFFFFF"/>
         </a:solidFill>
+        <a:effectLst/>
       </p:bgPr>
     </p:bg>
     <p:spTree>
@@ -18715,7 +18407,7 @@
           </a:bodyPr>
           <a:lstStyle/>
           <a:p>
-            <a:pPr algn="l" indent="0" marL="0">
+            <a:pPr marL="0" indent="0" algn="l">
               <a:buNone/>
             </a:pPr>
             <a:r>
@@ -18756,7 +18448,7 @@
           </a:bodyPr>
           <a:lstStyle/>
           <a:p>
-            <a:pPr algn="l" indent="0" marL="0">
+            <a:pPr marL="0" indent="0" algn="l">
               <a:buNone/>
             </a:pPr>
             <a:r>
@@ -18797,7 +18489,7 @@
           </a:bodyPr>
           <a:lstStyle/>
           <a:p>
-            <a:pPr algn="l" indent="0" marL="0">
+            <a:pPr marL="0" indent="0" algn="l">
               <a:buNone/>
             </a:pPr>
             <a:r>
@@ -18817,275 +18509,7 @@
       </p:sp>
       <p:pic>
         <p:nvPicPr>
-          <p:cNvPr id="7" name="Image 0" descr="preencoded.png">    </p:cNvPr>
-          <p:cNvPicPr>
-            <a:picLocks noChangeAspect="1"/>
-          </p:cNvPicPr>
-          <p:nvPr/>
-        </p:nvPicPr>
-        <p:blipFill>
-          <a:blip r:embed="rId1">
-            <a:extLst>
-              <a:ext uri="{96DAC541-7B7A-43D3-8B79-37D633B846F1}">
-                <asvg:svgBlip xmlns:asvg="http://schemas.microsoft.com/office/drawing/2016/SVG/main" r:embed="rId2"/>
-              </a:ext>
-            </a:extLst>
-          </a:blip>
-          <a:stretch>
-            <a:fillRect/>
-          </a:stretch>
-        </p:blipFill>
-        <p:spPr>
-          <a:xfrm>
-            <a:off x="16897350" y="533400"/>
-            <a:ext cx="438150" cy="438150"/>
-          </a:xfrm>
-          <a:prstGeom prst="rect">
-            <a:avLst/>
-          </a:prstGeom>
-        </p:spPr>
-      </p:pic>
-      <p:sp>
-        <p:nvSpPr>
-          <p:cNvPr id="8" name="Text 5"/>
-          <p:cNvSpPr/>
-          <p:nvPr/>
-        </p:nvSpPr>
-        <p:spPr>
-          <a:xfrm>
-            <a:off x="952500" y="1701800"/>
-            <a:ext cx="18021300" cy="723900"/>
-          </a:xfrm>
-          <a:prstGeom prst="rect">
-            <a:avLst/>
-          </a:prstGeom>
-          <a:noFill/>
-          <a:ln/>
-        </p:spPr>
-        <p:txBody>
-          <a:bodyPr wrap="square" lIns="25400" tIns="25400" rIns="25400" bIns="25400" rtlCol="0" anchor="t">
-            <a:normAutofit/>
-          </a:bodyPr>
-          <a:lstStyle/>
-          <a:p>
-            <a:pPr algn="l" indent="0" marL="0">
-              <a:buNone/>
-            </a:pPr>
-            <a:r>
-              <a:rPr lang="en-US" sz="4500" b="1" spc="-90" kern="0" dirty="0">
-                <a:solidFill>
-                  <a:srgbClr val="10151F"/>
-                </a:solidFill>
-                <a:latin typeface="Noto Sans KR" pitchFamily="34" charset="0"/>
-                <a:ea typeface="Noto Sans KR" pitchFamily="34" charset="-122"/>
-                <a:cs typeface="Noto Sans KR" pitchFamily="34" charset="-120"/>
-              </a:rPr>
-              <a:t>RAG 법령 지식베이스</a:t>
-            </a:r>
-            <a:endParaRPr lang="en-US" sz="4500" dirty="0"/>
-          </a:p>
-        </p:txBody>
-      </p:sp>
-      <p:sp>
-        <p:nvSpPr>
-          <p:cNvPr id="9" name="Text 6"/>
-          <p:cNvSpPr/>
-          <p:nvPr/>
-        </p:nvSpPr>
-        <p:spPr>
-          <a:xfrm>
-            <a:off x="952500" y="2578100"/>
-            <a:ext cx="18021300" cy="495300"/>
-          </a:xfrm>
-          <a:prstGeom prst="rect">
-            <a:avLst/>
-          </a:prstGeom>
-          <a:noFill/>
-          <a:ln/>
-        </p:spPr>
-        <p:txBody>
-          <a:bodyPr wrap="square" lIns="25400" tIns="25400" rIns="25400" bIns="25400" rtlCol="0" anchor="t">
-            <a:normAutofit/>
-          </a:bodyPr>
-          <a:lstStyle/>
-          <a:p>
-            <a:pPr algn="l" indent="0" marL="0">
-              <a:lnSpc>
-                <a:spcPct val="102857"/>
-              </a:lnSpc>
-              <a:buNone/>
-            </a:pPr>
-            <a:r>
-              <a:rPr lang="en-US" sz="2400" dirty="0">
-                <a:solidFill>
-                  <a:srgbClr val="5C6675"/>
-                </a:solidFill>
-                <a:latin typeface="Noto Sans KR" pitchFamily="34" charset="0"/>
-                <a:ea typeface="Noto Sans KR" pitchFamily="34" charset="-122"/>
-                <a:cs typeface="Noto Sans KR" pitchFamily="34" charset="-120"/>
-              </a:rPr>
-              <a:t>14개 업종 + 공통 조항 총 42개 청크 · 사전 임베딩 후 하이브리드 검색으로 Top-2 조항 인용</a:t>
-            </a:r>
-            <a:endParaRPr lang="en-US" sz="2400" dirty="0"/>
-          </a:p>
-        </p:txBody>
-      </p:sp>
-      <p:sp>
-        <p:nvSpPr>
-          <p:cNvPr id="10" name="Shape 7"/>
-          <p:cNvSpPr/>
-          <p:nvPr/>
-        </p:nvSpPr>
-        <p:spPr>
-          <a:xfrm>
-            <a:off x="952500" y="3843338"/>
-            <a:ext cx="3382467" cy="1871663"/>
-          </a:xfrm>
-          <a:prstGeom prst="roundRect">
-            <a:avLst>
-              <a:gd name="adj" fmla="val 8142"/>
-            </a:avLst>
-          </a:prstGeom>
-          <a:ln w="6350">
-            <a:solidFill>
-              <a:srgbClr val="E6E9F0"/>
-            </a:solidFill>
-            <a:prstDash val="solid"/>
-          </a:ln>
-        </p:spPr>
-      </p:sp>
-      <p:sp>
-        <p:nvSpPr>
-          <p:cNvPr id="11" name="Text 8"/>
-          <p:cNvSpPr/>
-          <p:nvPr/>
-        </p:nvSpPr>
-        <p:spPr>
-          <a:xfrm>
-            <a:off x="1225550" y="4135438"/>
-            <a:ext cx="3120003" cy="368300"/>
-          </a:xfrm>
-          <a:prstGeom prst="rect">
-            <a:avLst/>
-          </a:prstGeom>
-          <a:noFill/>
-          <a:ln/>
-        </p:spPr>
-        <p:txBody>
-          <a:bodyPr wrap="square" lIns="25400" tIns="25400" rIns="25400" bIns="25400" rtlCol="0" anchor="t">
-            <a:normAutofit/>
-          </a:bodyPr>
-          <a:lstStyle/>
-          <a:p>
-            <a:pPr algn="l" indent="0" marL="0">
-              <a:buNone/>
-            </a:pPr>
-            <a:r>
-              <a:rPr lang="en-US" sz="1800" b="1" spc="108" kern="0" dirty="0">
-                <a:solidFill>
-                  <a:srgbClr val="8F9AAD"/>
-                </a:solidFill>
-                <a:latin typeface="Noto Sans KR" pitchFamily="34" charset="0"/>
-                <a:ea typeface="Noto Sans KR" pitchFamily="34" charset="-122"/>
-                <a:cs typeface="Noto Sans KR" pitchFamily="34" charset="-120"/>
-              </a:rPr>
-              <a:t>QUERY</a:t>
-            </a:r>
-            <a:endParaRPr lang="en-US" sz="1800" dirty="0"/>
-          </a:p>
-        </p:txBody>
-      </p:sp>
-      <p:sp>
-        <p:nvSpPr>
-          <p:cNvPr id="12" name="Text 9"/>
-          <p:cNvSpPr/>
-          <p:nvPr/>
-        </p:nvSpPr>
-        <p:spPr>
-          <a:xfrm>
-            <a:off x="1225550" y="4579938"/>
-            <a:ext cx="3120003" cy="409575"/>
-          </a:xfrm>
-          <a:prstGeom prst="rect">
-            <a:avLst/>
-          </a:prstGeom>
-          <a:noFill/>
-          <a:ln/>
-        </p:spPr>
-        <p:txBody>
-          <a:bodyPr wrap="square" lIns="25400" tIns="25400" rIns="25400" bIns="25400" rtlCol="0" anchor="t">
-            <a:normAutofit/>
-          </a:bodyPr>
-          <a:lstStyle/>
-          <a:p>
-            <a:pPr algn="l" indent="0" marL="0">
-              <a:lnSpc>
-                <a:spcPct val="90000"/>
-              </a:lnSpc>
-              <a:buNone/>
-            </a:pPr>
-            <a:r>
-              <a:rPr lang="en-US" sz="2250" b="1" dirty="0">
-                <a:solidFill>
-                  <a:srgbClr val="10151F"/>
-                </a:solidFill>
-                <a:latin typeface="Noto Sans KR" pitchFamily="34" charset="0"/>
-                <a:ea typeface="Noto Sans KR" pitchFamily="34" charset="-122"/>
-                <a:cs typeface="Noto Sans KR" pitchFamily="34" charset="-120"/>
-              </a:rPr>
-              <a:t>상담 텍스트 임베딩</a:t>
-            </a:r>
-            <a:endParaRPr lang="en-US" sz="2250" dirty="0"/>
-          </a:p>
-        </p:txBody>
-      </p:sp>
-      <p:sp>
-        <p:nvSpPr>
-          <p:cNvPr id="13" name="Text 10"/>
-          <p:cNvSpPr/>
-          <p:nvPr/>
-        </p:nvSpPr>
-        <p:spPr>
-          <a:xfrm>
-            <a:off x="1225550" y="5065713"/>
-            <a:ext cx="3120003" cy="395288"/>
-          </a:xfrm>
-          <a:prstGeom prst="rect">
-            <a:avLst/>
-          </a:prstGeom>
-          <a:noFill/>
-          <a:ln/>
-        </p:spPr>
-        <p:txBody>
-          <a:bodyPr wrap="square" lIns="25400" tIns="25400" rIns="25400" bIns="25400" rtlCol="0" anchor="t">
-            <a:normAutofit/>
-          </a:bodyPr>
-          <a:lstStyle/>
-          <a:p>
-            <a:pPr algn="l" indent="0" marL="0">
-              <a:lnSpc>
-                <a:spcPct val="102273"/>
-              </a:lnSpc>
-              <a:buNone/>
-            </a:pPr>
-            <a:r>
-              <a:rPr lang="en-US" sz="1875" dirty="0">
-                <a:solidFill>
-                  <a:srgbClr val="5C6675"/>
-                </a:solidFill>
-                <a:latin typeface="Noto Sans KR" pitchFamily="34" charset="0"/>
-                <a:ea typeface="Noto Sans KR" pitchFamily="34" charset="-122"/>
-                <a:cs typeface="Noto Sans KR" pitchFamily="34" charset="-120"/>
-              </a:rPr>
-              <a:t>text-embedding-3-small</a:t>
-            </a:r>
-            <a:endParaRPr lang="en-US" sz="1875" dirty="0"/>
-          </a:p>
-        </p:txBody>
-      </p:sp>
-      <p:pic>
-        <p:nvPicPr>
-          <p:cNvPr id="14" name="Image 1" descr="preencoded.png">    </p:cNvPr>
+          <p:cNvPr id="7" name="Image 0" descr="preencoded.png"/>
           <p:cNvPicPr>
             <a:picLocks noChangeAspect="1"/>
           </p:cNvPicPr>
@@ -19105,8 +18529,8 @@
         </p:blipFill>
         <p:spPr>
           <a:xfrm>
-            <a:off x="4525467" y="4636294"/>
-            <a:ext cx="285750" cy="285750"/>
+            <a:off x="16897350" y="533400"/>
+            <a:ext cx="438150" cy="438150"/>
           </a:xfrm>
           <a:prstGeom prst="rect">
             <a:avLst/>
@@ -19115,18 +18539,103 @@
       </p:pic>
       <p:sp>
         <p:nvSpPr>
-          <p:cNvPr id="15" name="Shape 11"/>
-          <p:cNvSpPr/>
-          <p:nvPr/>
-        </p:nvSpPr>
-        <p:spPr>
-          <a:xfrm>
-            <a:off x="5001717" y="3664744"/>
-            <a:ext cx="3409652" cy="2228850"/>
+          <p:cNvPr id="8" name="Text 5"/>
+          <p:cNvSpPr/>
+          <p:nvPr/>
+        </p:nvSpPr>
+        <p:spPr>
+          <a:xfrm>
+            <a:off x="952500" y="1701800"/>
+            <a:ext cx="18021300" cy="723900"/>
+          </a:xfrm>
+          <a:prstGeom prst="rect">
+            <a:avLst/>
+          </a:prstGeom>
+          <a:noFill/>
+          <a:ln/>
+        </p:spPr>
+        <p:txBody>
+          <a:bodyPr wrap="square" lIns="25400" tIns="25400" rIns="25400" bIns="25400" rtlCol="0" anchor="t">
+            <a:normAutofit lnSpcReduction="10000"/>
+          </a:bodyPr>
+          <a:lstStyle/>
+          <a:p>
+            <a:pPr marL="0" indent="0" algn="l">
+              <a:buNone/>
+            </a:pPr>
+            <a:r>
+              <a:rPr lang="en-US" sz="4500" b="1" kern="0" spc="-90" dirty="0">
+                <a:solidFill>
+                  <a:srgbClr val="10151F"/>
+                </a:solidFill>
+                <a:latin typeface="Noto Sans KR" pitchFamily="34" charset="0"/>
+                <a:ea typeface="Noto Sans KR" pitchFamily="34" charset="-122"/>
+                <a:cs typeface="Noto Sans KR" pitchFamily="34" charset="-120"/>
+              </a:rPr>
+              <a:t>RAG 법령 지식베이스</a:t>
+            </a:r>
+            <a:endParaRPr lang="en-US" sz="4500" dirty="0"/>
+          </a:p>
+        </p:txBody>
+      </p:sp>
+      <p:sp>
+        <p:nvSpPr>
+          <p:cNvPr id="9" name="Text 6"/>
+          <p:cNvSpPr/>
+          <p:nvPr/>
+        </p:nvSpPr>
+        <p:spPr>
+          <a:xfrm>
+            <a:off x="952500" y="2578100"/>
+            <a:ext cx="18021300" cy="495300"/>
+          </a:xfrm>
+          <a:prstGeom prst="rect">
+            <a:avLst/>
+          </a:prstGeom>
+          <a:noFill/>
+          <a:ln/>
+        </p:spPr>
+        <p:txBody>
+          <a:bodyPr wrap="square" lIns="25400" tIns="25400" rIns="25400" bIns="25400" rtlCol="0" anchor="t">
+            <a:normAutofit/>
+          </a:bodyPr>
+          <a:lstStyle/>
+          <a:p>
+            <a:pPr marL="0" indent="0" algn="l">
+              <a:lnSpc>
+                <a:spcPct val="102857"/>
+              </a:lnSpc>
+              <a:buNone/>
+            </a:pPr>
+            <a:r>
+              <a:rPr lang="en-US" sz="2400" dirty="0">
+                <a:solidFill>
+                  <a:srgbClr val="5C6675"/>
+                </a:solidFill>
+                <a:latin typeface="Noto Sans KR" pitchFamily="34" charset="0"/>
+                <a:ea typeface="Noto Sans KR" pitchFamily="34" charset="-122"/>
+                <a:cs typeface="Noto Sans KR" pitchFamily="34" charset="-120"/>
+              </a:rPr>
+              <a:t>14개 업종 + 공통 조항 총 42개 청크 · 사전 임베딩 후 하이브리드 검색으로 Top-2 조항 인용</a:t>
+            </a:r>
+            <a:endParaRPr lang="en-US" sz="2400" dirty="0"/>
+          </a:p>
+        </p:txBody>
+      </p:sp>
+      <p:sp>
+        <p:nvSpPr>
+          <p:cNvPr id="10" name="Shape 7"/>
+          <p:cNvSpPr/>
+          <p:nvPr/>
+        </p:nvSpPr>
+        <p:spPr>
+          <a:xfrm>
+            <a:off x="952500" y="3843338"/>
+            <a:ext cx="3382467" cy="1871663"/>
           </a:xfrm>
           <a:prstGeom prst="roundRect">
             <a:avLst>
-              <a:gd name="adj" fmla="val 6838"/>
+              <a:gd name="adj" fmla="val 8142"/>
             </a:avLst>
           </a:prstGeom>
           <a:ln w="6350">
@@ -19139,32 +18648,32 @@
       </p:sp>
       <p:sp>
         <p:nvSpPr>
-          <p:cNvPr id="16" name="Text 12"/>
-          <p:cNvSpPr/>
-          <p:nvPr/>
-        </p:nvSpPr>
-        <p:spPr>
-          <a:xfrm>
-            <a:off x="5274766" y="3956844"/>
-            <a:ext cx="3149908" cy="368300"/>
-          </a:xfrm>
-          <a:prstGeom prst="rect">
-            <a:avLst/>
-          </a:prstGeom>
-          <a:noFill/>
-          <a:ln/>
-        </p:spPr>
-        <p:txBody>
-          <a:bodyPr wrap="square" lIns="25400" tIns="25400" rIns="25400" bIns="25400" rtlCol="0" anchor="t">
-            <a:normAutofit/>
-          </a:bodyPr>
-          <a:lstStyle/>
-          <a:p>
-            <a:pPr algn="l" indent="0" marL="0">
-              <a:buNone/>
-            </a:pPr>
-            <a:r>
-              <a:rPr lang="en-US" sz="1800" b="1" spc="108" kern="0" dirty="0">
+          <p:cNvPr id="11" name="Text 8"/>
+          <p:cNvSpPr/>
+          <p:nvPr/>
+        </p:nvSpPr>
+        <p:spPr>
+          <a:xfrm>
+            <a:off x="1225550" y="4135438"/>
+            <a:ext cx="3120003" cy="368300"/>
+          </a:xfrm>
+          <a:prstGeom prst="rect">
+            <a:avLst/>
+          </a:prstGeom>
+          <a:noFill/>
+          <a:ln/>
+        </p:spPr>
+        <p:txBody>
+          <a:bodyPr wrap="square" lIns="25400" tIns="25400" rIns="25400" bIns="25400" rtlCol="0" anchor="t">
+            <a:normAutofit/>
+          </a:bodyPr>
+          <a:lstStyle/>
+          <a:p>
+            <a:pPr marL="0" indent="0" algn="l">
+              <a:buNone/>
+            </a:pPr>
+            <a:r>
+              <a:rPr lang="en-US" sz="1800" b="1" kern="0" spc="108" dirty="0">
                 <a:solidFill>
                   <a:srgbClr val="8F9AAD"/>
                 </a:solidFill>
@@ -19172,7 +18681,7 @@
                 <a:ea typeface="Noto Sans KR" pitchFamily="34" charset="-122"/>
                 <a:cs typeface="Noto Sans KR" pitchFamily="34" charset="-120"/>
               </a:rPr>
-              <a:t>INDEX</a:t>
+              <a:t>QUERY</a:t>
             </a:r>
             <a:endParaRPr lang="en-US" sz="1800" dirty="0"/>
           </a:p>
@@ -19180,28 +18689,28 @@
       </p:sp>
       <p:sp>
         <p:nvSpPr>
-          <p:cNvPr id="17" name="Text 13"/>
-          <p:cNvSpPr/>
-          <p:nvPr/>
-        </p:nvSpPr>
-        <p:spPr>
-          <a:xfrm>
-            <a:off x="5274766" y="4401344"/>
-            <a:ext cx="3149908" cy="409575"/>
-          </a:xfrm>
-          <a:prstGeom prst="rect">
-            <a:avLst/>
-          </a:prstGeom>
-          <a:noFill/>
-          <a:ln/>
-        </p:spPr>
-        <p:txBody>
-          <a:bodyPr wrap="square" lIns="25400" tIns="25400" rIns="25400" bIns="25400" rtlCol="0" anchor="t">
-            <a:normAutofit/>
-          </a:bodyPr>
-          <a:lstStyle/>
-          <a:p>
-            <a:pPr algn="l" indent="0" marL="0">
+          <p:cNvPr id="12" name="Text 9"/>
+          <p:cNvSpPr/>
+          <p:nvPr/>
+        </p:nvSpPr>
+        <p:spPr>
+          <a:xfrm>
+            <a:off x="1225550" y="4579938"/>
+            <a:ext cx="3120003" cy="409575"/>
+          </a:xfrm>
+          <a:prstGeom prst="rect">
+            <a:avLst/>
+          </a:prstGeom>
+          <a:noFill/>
+          <a:ln/>
+        </p:spPr>
+        <p:txBody>
+          <a:bodyPr wrap="square" lIns="25400" tIns="25400" rIns="25400" bIns="25400" rtlCol="0" anchor="t">
+            <a:normAutofit/>
+          </a:bodyPr>
+          <a:lstStyle/>
+          <a:p>
+            <a:pPr marL="0" indent="0" algn="l">
               <a:lnSpc>
                 <a:spcPct val="90000"/>
               </a:lnSpc>
@@ -19216,7 +18725,7 @@
                 <a:ea typeface="Noto Sans KR" pitchFamily="34" charset="-122"/>
                 <a:cs typeface="Noto Sans KR" pitchFamily="34" charset="-120"/>
               </a:rPr>
-              <a:t>legal_kb_embedded</a:t>
+              <a:t>상담 텍스트 임베딩</a:t>
             </a:r>
             <a:endParaRPr lang="en-US" sz="2250" dirty="0"/>
           </a:p>
@@ -19224,28 +18733,28 @@
       </p:sp>
       <p:sp>
         <p:nvSpPr>
-          <p:cNvPr id="18" name="Text 14"/>
-          <p:cNvSpPr/>
-          <p:nvPr/>
-        </p:nvSpPr>
-        <p:spPr>
-          <a:xfrm>
-            <a:off x="5274766" y="4887119"/>
-            <a:ext cx="2949459" cy="752475"/>
-          </a:xfrm>
-          <a:prstGeom prst="rect">
-            <a:avLst/>
-          </a:prstGeom>
-          <a:noFill/>
-          <a:ln/>
-        </p:spPr>
-        <p:txBody>
-          <a:bodyPr wrap="square" lIns="25400" tIns="25400" rIns="25400" bIns="25400" rtlCol="0" anchor="t">
-            <a:normAutofit/>
-          </a:bodyPr>
-          <a:lstStyle/>
-          <a:p>
-            <a:pPr algn="l" indent="0" marL="0">
+          <p:cNvPr id="13" name="Text 10"/>
+          <p:cNvSpPr/>
+          <p:nvPr/>
+        </p:nvSpPr>
+        <p:spPr>
+          <a:xfrm>
+            <a:off x="1225550" y="5065713"/>
+            <a:ext cx="3120003" cy="395288"/>
+          </a:xfrm>
+          <a:prstGeom prst="rect">
+            <a:avLst/>
+          </a:prstGeom>
+          <a:noFill/>
+          <a:ln/>
+        </p:spPr>
+        <p:txBody>
+          <a:bodyPr wrap="square" lIns="25400" tIns="25400" rIns="25400" bIns="25400" rtlCol="0" anchor="t">
+            <a:normAutofit/>
+          </a:bodyPr>
+          <a:lstStyle/>
+          <a:p>
+            <a:pPr marL="0" indent="0" algn="l">
               <a:lnSpc>
                 <a:spcPct val="102273"/>
               </a:lnSpc>
@@ -19260,7 +18769,7 @@
                 <a:ea typeface="Noto Sans KR" pitchFamily="34" charset="-122"/>
                 <a:cs typeface="Noto Sans KR" pitchFamily="34" charset="-120"/>
               </a:rPr>
-              <a:t>42개 조항 청크 (빌드 산출물)</a:t>
+              <a:t>text-embedding-3-small</a:t>
             </a:r>
             <a:endParaRPr lang="en-US" sz="1875" dirty="0"/>
           </a:p>
@@ -19268,7 +18777,7 @@
       </p:sp>
       <p:pic>
         <p:nvPicPr>
-          <p:cNvPr id="19" name="Image 2" descr="preencoded.png">    </p:cNvPr>
+          <p:cNvPr id="14" name="Image 1" descr="preencoded.png"/>
           <p:cNvPicPr>
             <a:picLocks noChangeAspect="1"/>
           </p:cNvPicPr>
@@ -19288,6 +18797,189 @@
         </p:blipFill>
         <p:spPr>
           <a:xfrm>
+            <a:off x="4525467" y="4636294"/>
+            <a:ext cx="285750" cy="285750"/>
+          </a:xfrm>
+          <a:prstGeom prst="rect">
+            <a:avLst/>
+          </a:prstGeom>
+        </p:spPr>
+      </p:pic>
+      <p:sp>
+        <p:nvSpPr>
+          <p:cNvPr id="15" name="Shape 11"/>
+          <p:cNvSpPr/>
+          <p:nvPr/>
+        </p:nvSpPr>
+        <p:spPr>
+          <a:xfrm>
+            <a:off x="5001717" y="3664744"/>
+            <a:ext cx="3409652" cy="2228850"/>
+          </a:xfrm>
+          <a:prstGeom prst="roundRect">
+            <a:avLst>
+              <a:gd name="adj" fmla="val 6838"/>
+            </a:avLst>
+          </a:prstGeom>
+          <a:ln w="6350">
+            <a:solidFill>
+              <a:srgbClr val="E6E9F0"/>
+            </a:solidFill>
+            <a:prstDash val="solid"/>
+          </a:ln>
+        </p:spPr>
+      </p:sp>
+      <p:sp>
+        <p:nvSpPr>
+          <p:cNvPr id="16" name="Text 12"/>
+          <p:cNvSpPr/>
+          <p:nvPr/>
+        </p:nvSpPr>
+        <p:spPr>
+          <a:xfrm>
+            <a:off x="5274766" y="3956844"/>
+            <a:ext cx="3149908" cy="368300"/>
+          </a:xfrm>
+          <a:prstGeom prst="rect">
+            <a:avLst/>
+          </a:prstGeom>
+          <a:noFill/>
+          <a:ln/>
+        </p:spPr>
+        <p:txBody>
+          <a:bodyPr wrap="square" lIns="25400" tIns="25400" rIns="25400" bIns="25400" rtlCol="0" anchor="t">
+            <a:normAutofit/>
+          </a:bodyPr>
+          <a:lstStyle/>
+          <a:p>
+            <a:pPr marL="0" indent="0" algn="l">
+              <a:buNone/>
+            </a:pPr>
+            <a:r>
+              <a:rPr lang="en-US" sz="1800" b="1" kern="0" spc="108" dirty="0">
+                <a:solidFill>
+                  <a:srgbClr val="8F9AAD"/>
+                </a:solidFill>
+                <a:latin typeface="Noto Sans KR" pitchFamily="34" charset="0"/>
+                <a:ea typeface="Noto Sans KR" pitchFamily="34" charset="-122"/>
+                <a:cs typeface="Noto Sans KR" pitchFamily="34" charset="-120"/>
+              </a:rPr>
+              <a:t>INDEX</a:t>
+            </a:r>
+            <a:endParaRPr lang="en-US" sz="1800" dirty="0"/>
+          </a:p>
+        </p:txBody>
+      </p:sp>
+      <p:sp>
+        <p:nvSpPr>
+          <p:cNvPr id="17" name="Text 13"/>
+          <p:cNvSpPr/>
+          <p:nvPr/>
+        </p:nvSpPr>
+        <p:spPr>
+          <a:xfrm>
+            <a:off x="5274766" y="4401344"/>
+            <a:ext cx="3149908" cy="409575"/>
+          </a:xfrm>
+          <a:prstGeom prst="rect">
+            <a:avLst/>
+          </a:prstGeom>
+          <a:noFill/>
+          <a:ln/>
+        </p:spPr>
+        <p:txBody>
+          <a:bodyPr wrap="square" lIns="25400" tIns="25400" rIns="25400" bIns="25400" rtlCol="0" anchor="t">
+            <a:normAutofit/>
+          </a:bodyPr>
+          <a:lstStyle/>
+          <a:p>
+            <a:pPr marL="0" indent="0" algn="l">
+              <a:lnSpc>
+                <a:spcPct val="90000"/>
+              </a:lnSpc>
+              <a:buNone/>
+            </a:pPr>
+            <a:r>
+              <a:rPr lang="en-US" sz="2250" b="1" dirty="0">
+                <a:solidFill>
+                  <a:srgbClr val="10151F"/>
+                </a:solidFill>
+                <a:latin typeface="Noto Sans KR" pitchFamily="34" charset="0"/>
+                <a:ea typeface="Noto Sans KR" pitchFamily="34" charset="-122"/>
+                <a:cs typeface="Noto Sans KR" pitchFamily="34" charset="-120"/>
+              </a:rPr>
+              <a:t>legal_kb_embedded</a:t>
+            </a:r>
+            <a:endParaRPr lang="en-US" sz="2250" dirty="0"/>
+          </a:p>
+        </p:txBody>
+      </p:sp>
+      <p:sp>
+        <p:nvSpPr>
+          <p:cNvPr id="18" name="Text 14"/>
+          <p:cNvSpPr/>
+          <p:nvPr/>
+        </p:nvSpPr>
+        <p:spPr>
+          <a:xfrm>
+            <a:off x="5274766" y="4887119"/>
+            <a:ext cx="2949459" cy="752475"/>
+          </a:xfrm>
+          <a:prstGeom prst="rect">
+            <a:avLst/>
+          </a:prstGeom>
+          <a:noFill/>
+          <a:ln/>
+        </p:spPr>
+        <p:txBody>
+          <a:bodyPr wrap="square" lIns="25400" tIns="25400" rIns="25400" bIns="25400" rtlCol="0" anchor="t">
+            <a:normAutofit/>
+          </a:bodyPr>
+          <a:lstStyle/>
+          <a:p>
+            <a:pPr marL="0" indent="0" algn="l">
+              <a:lnSpc>
+                <a:spcPct val="102273"/>
+              </a:lnSpc>
+              <a:buNone/>
+            </a:pPr>
+            <a:r>
+              <a:rPr lang="en-US" sz="1875" dirty="0">
+                <a:solidFill>
+                  <a:srgbClr val="5C6675"/>
+                </a:solidFill>
+                <a:latin typeface="Noto Sans KR" pitchFamily="34" charset="0"/>
+                <a:ea typeface="Noto Sans KR" pitchFamily="34" charset="-122"/>
+                <a:cs typeface="Noto Sans KR" pitchFamily="34" charset="-120"/>
+              </a:rPr>
+              <a:t>42개 조항 청크 (빌드 산출물)</a:t>
+            </a:r>
+            <a:endParaRPr lang="en-US" sz="1875" dirty="0"/>
+          </a:p>
+        </p:txBody>
+      </p:sp>
+      <p:pic>
+        <p:nvPicPr>
+          <p:cNvPr id="19" name="Image 2" descr="preencoded.png"/>
+          <p:cNvPicPr>
+            <a:picLocks noChangeAspect="1"/>
+          </p:cNvPicPr>
+          <p:nvPr/>
+        </p:nvPicPr>
+        <p:blipFill>
+          <a:blip r:embed="rId5">
+            <a:extLst>
+              <a:ext uri="{96DAC541-7B7A-43D3-8B79-37D633B846F1}">
+                <asvg:svgBlip xmlns:asvg="http://schemas.microsoft.com/office/drawing/2016/SVG/main" r:embed="rId7"/>
+              </a:ext>
+            </a:extLst>
+          </a:blip>
+          <a:stretch>
+            <a:fillRect/>
+          </a:stretch>
+        </p:blipFill>
+        <p:spPr>
+          <a:xfrm>
             <a:off x="8601869" y="4636294"/>
             <a:ext cx="285750" cy="285750"/>
           </a:xfrm>
@@ -19341,11 +19033,11 @@
           </a:bodyPr>
           <a:lstStyle/>
           <a:p>
-            <a:pPr algn="l" indent="0" marL="0">
-              <a:buNone/>
-            </a:pPr>
-            <a:r>
-              <a:rPr lang="en-US" sz="1800" b="1" spc="108" kern="0" dirty="0">
+            <a:pPr marL="0" indent="0" algn="l">
+              <a:buNone/>
+            </a:pPr>
+            <a:r>
+              <a:rPr lang="en-US" sz="1800" b="1" kern="0" spc="108" dirty="0">
                 <a:solidFill>
                   <a:srgbClr val="1D3A8F"/>
                 </a:solidFill>
@@ -19382,7 +19074,7 @@
           </a:bodyPr>
           <a:lstStyle/>
           <a:p>
-            <a:pPr algn="l" indent="0" marL="0">
+            <a:pPr marL="0" indent="0" algn="l">
               <a:lnSpc>
                 <a:spcPct val="90000"/>
               </a:lnSpc>
@@ -19426,7 +19118,7 @@
           </a:bodyPr>
           <a:lstStyle/>
           <a:p>
-            <a:pPr algn="l" indent="0" marL="0">
+            <a:pPr marL="0" indent="0" algn="l">
               <a:lnSpc>
                 <a:spcPct val="102273"/>
               </a:lnSpc>
@@ -19449,14 +19141,14 @@
       </p:sp>
       <p:pic>
         <p:nvPicPr>
-          <p:cNvPr id="24" name="Image 3" descr="preencoded.png">    </p:cNvPr>
+          <p:cNvPr id="24" name="Image 3" descr="preencoded.png"/>
           <p:cNvPicPr>
             <a:picLocks noChangeAspect="1"/>
           </p:cNvPicPr>
           <p:nvPr/>
         </p:nvPicPr>
         <p:blipFill>
-          <a:blip r:embed="rId7">
+          <a:blip r:embed="rId5">
             <a:extLst>
               <a:ext uri="{96DAC541-7B7A-43D3-8B79-37D633B846F1}">
                 <asvg:svgBlip xmlns:asvg="http://schemas.microsoft.com/office/drawing/2016/SVG/main" r:embed="rId8"/>
@@ -19522,11 +19214,11 @@
           </a:bodyPr>
           <a:lstStyle/>
           <a:p>
-            <a:pPr algn="l" indent="0" marL="0">
-              <a:buNone/>
-            </a:pPr>
-            <a:r>
-              <a:rPr lang="en-US" sz="1800" b="1" spc="108" kern="0" dirty="0">
+            <a:pPr marL="0" indent="0" algn="l">
+              <a:buNone/>
+            </a:pPr>
+            <a:r>
+              <a:rPr lang="en-US" sz="1800" b="1" kern="0" spc="108" dirty="0">
                 <a:solidFill>
                   <a:srgbClr val="8F9AAD"/>
                 </a:solidFill>
@@ -19563,7 +19255,7 @@
           </a:bodyPr>
           <a:lstStyle/>
           <a:p>
-            <a:pPr algn="l" indent="0" marL="0">
+            <a:pPr marL="0" indent="0" algn="l">
               <a:lnSpc>
                 <a:spcPct val="90000"/>
               </a:lnSpc>
@@ -19607,7 +19299,7 @@
           </a:bodyPr>
           <a:lstStyle/>
           <a:p>
-            <a:pPr algn="l" indent="0" marL="0">
+            <a:pPr marL="0" indent="0" algn="l">
               <a:lnSpc>
                 <a:spcPct val="102273"/>
               </a:lnSpc>
@@ -19675,7 +19367,7 @@
           </a:bodyPr>
           <a:lstStyle/>
           <a:p>
-            <a:pPr algn="l" indent="0" marL="0">
+            <a:pPr marL="0" indent="0" algn="l">
               <a:buNone/>
             </a:pPr>
             <a:r>
@@ -19738,7 +19430,7 @@
           </a:bodyPr>
           <a:lstStyle/>
           <a:p>
-            <a:pPr algn="l" indent="0" marL="0">
+            <a:pPr marL="0" indent="0" algn="l">
               <a:buNone/>
             </a:pPr>
             <a:r>
@@ -19801,7 +19493,7 @@
           </a:bodyPr>
           <a:lstStyle/>
           <a:p>
-            <a:pPr algn="l" indent="0" marL="0">
+            <a:pPr marL="0" indent="0" algn="l">
               <a:buNone/>
             </a:pPr>
             <a:r>
@@ -19864,7 +19556,7 @@
           </a:bodyPr>
           <a:lstStyle/>
           <a:p>
-            <a:pPr algn="l" indent="0" marL="0">
+            <a:pPr marL="0" indent="0" algn="l">
               <a:buNone/>
             </a:pPr>
             <a:r>
@@ -19923,11 +19615,11 @@
         </p:spPr>
         <p:txBody>
           <a:bodyPr wrap="square" lIns="25400" tIns="25400" rIns="25400" bIns="25400" rtlCol="0" anchor="t">
-            <a:normAutofit/>
-          </a:bodyPr>
-          <a:lstStyle/>
-          <a:p>
-            <a:pPr algn="l" indent="0" marL="0">
+            <a:normAutofit fontScale="92500"/>
+          </a:bodyPr>
+          <a:lstStyle/>
+          <a:p>
+            <a:pPr marL="0" indent="0" algn="l">
               <a:buNone/>
             </a:pPr>
             <a:r>
@@ -19986,11 +19678,11 @@
         </p:spPr>
         <p:txBody>
           <a:bodyPr wrap="square" lIns="25400" tIns="25400" rIns="25400" bIns="25400" rtlCol="0" anchor="t">
-            <a:normAutofit/>
-          </a:bodyPr>
-          <a:lstStyle/>
-          <a:p>
-            <a:pPr algn="l" indent="0" marL="0">
+            <a:normAutofit fontScale="92500"/>
+          </a:bodyPr>
+          <a:lstStyle/>
+          <a:p>
+            <a:pPr marL="0" indent="0" algn="l">
               <a:buNone/>
             </a:pPr>
             <a:r>
@@ -20053,7 +19745,7 @@
           </a:bodyPr>
           <a:lstStyle/>
           <a:p>
-            <a:pPr algn="l" indent="0" marL="0">
+            <a:pPr marL="0" indent="0" algn="l">
               <a:buNone/>
             </a:pPr>
             <a:r>
@@ -20094,7 +19786,7 @@
           </a:bodyPr>
           <a:lstStyle/>
           <a:p>
-            <a:pPr algn="l" indent="0" marL="0">
+            <a:pPr marL="0" indent="0" algn="l">
               <a:lnSpc>
                 <a:spcPct val="104464"/>
               </a:lnSpc>
@@ -20160,7 +19852,7 @@
           </a:bodyPr>
           <a:lstStyle/>
           <a:p>
-            <a:pPr algn="l" indent="0" marL="0">
+            <a:pPr marL="0" indent="0" algn="l">
               <a:buNone/>
             </a:pPr>
             <a:r>
@@ -20201,7 +19893,7 @@
           </a:bodyPr>
           <a:lstStyle/>
           <a:p>
-            <a:pPr algn="l" indent="0" marL="0">
+            <a:pPr marL="0" indent="0" algn="l">
               <a:lnSpc>
                 <a:spcPct val="104464"/>
               </a:lnSpc>
@@ -20245,7 +19937,7 @@
           </a:bodyPr>
           <a:lstStyle/>
           <a:p>
-            <a:pPr algn="l" indent="0" marL="0">
+            <a:pPr marL="0" indent="0" algn="l">
               <a:lnSpc>
                 <a:spcPct val="104464"/>
               </a:lnSpc>
@@ -20567,4 +20259,299 @@
     </a:ext>
   </a:extLst>
 </a:theme>
+</file>
+
+<file path=ppt/theme/theme2.xml><?xml version="1.0" encoding="utf-8"?>
+<a:theme xmlns:a="http://schemas.openxmlformats.org/drawingml/2006/main" name="Office 테마">
+  <a:themeElements>
+    <a:clrScheme name="Office">
+      <a:dk1>
+        <a:sysClr val="windowText" lastClr="000000"/>
+      </a:dk1>
+      <a:lt1>
+        <a:sysClr val="window" lastClr="FFFFFF"/>
+      </a:lt1>
+      <a:dk2>
+        <a:srgbClr val="44546A"/>
+      </a:dk2>
+      <a:lt2>
+        <a:srgbClr val="E7E6E6"/>
+      </a:lt2>
+      <a:accent1>
+        <a:srgbClr val="4472C4"/>
+      </a:accent1>
+      <a:accent2>
+        <a:srgbClr val="ED7D31"/>
+      </a:accent2>
+      <a:accent3>
+        <a:srgbClr val="A5A5A5"/>
+      </a:accent3>
+      <a:accent4>
+        <a:srgbClr val="FFC000"/>
+      </a:accent4>
+      <a:accent5>
+        <a:srgbClr val="5B9BD5"/>
+      </a:accent5>
+      <a:accent6>
+        <a:srgbClr val="70AD47"/>
+      </a:accent6>
+      <a:hlink>
+        <a:srgbClr val="0563C1"/>
+      </a:hlink>
+      <a:folHlink>
+        <a:srgbClr val="954F72"/>
+      </a:folHlink>
+    </a:clrScheme>
+    <a:fontScheme name="Office">
+      <a:majorFont>
+        <a:latin typeface="맑은 고딕" panose="020F0302020204030204"/>
+        <a:ea typeface=""/>
+        <a:cs typeface=""/>
+        <a:font script="Jpan" typeface="游ゴシック Light"/>
+        <a:font script="Hang" typeface="맑은 고딕"/>
+        <a:font script="Hans" typeface="等线 Light"/>
+        <a:font script="Hant" typeface="新細明體"/>
+        <a:font script="Arab" typeface="Times New Roman"/>
+        <a:font script="Hebr" typeface="Times New Roman"/>
+        <a:font script="Thai" typeface="Angsana New"/>
+        <a:font script="Ethi" typeface="Nyala"/>
+        <a:font script="Beng" typeface="Vrinda"/>
+        <a:font script="Gujr" typeface="Shruti"/>
+        <a:font script="Khmr" typeface="MoolBoran"/>
+        <a:font script="Knda" typeface="Tunga"/>
+        <a:font script="Guru" typeface="Raavi"/>
+        <a:font script="Cans" typeface="Euphemia"/>
+        <a:font script="Cher" typeface="Plantagenet Cherokee"/>
+        <a:font script="Yiii" typeface="Microsoft Yi Baiti"/>
+        <a:font script="Tibt" typeface="Microsoft Himalaya"/>
+        <a:font script="Thaa" typeface="MV Boli"/>
+        <a:font script="Deva" typeface="Mangal"/>
+        <a:font script="Telu" typeface="Gautami"/>
+        <a:font script="Taml" typeface="Latha"/>
+        <a:font script="Syrc" typeface="Estrangelo Edessa"/>
+        <a:font script="Orya" typeface="Kalinga"/>
+        <a:font script="Mlym" typeface="Kartika"/>
+        <a:font script="Laoo" typeface="DokChampa"/>
+        <a:font script="Sinh" typeface="Iskoola Pota"/>
+        <a:font script="Mong" typeface="Mongolian Baiti"/>
+        <a:font script="Viet" typeface="Times New Roman"/>
+        <a:font script="Uigh" typeface="Microsoft Uighur"/>
+        <a:font script="Geor" typeface="Sylfaen"/>
+        <a:font script="Armn" typeface="Arial"/>
+        <a:font script="Bugi" typeface="Leelawadee UI"/>
+        <a:font script="Bopo" typeface="Microsoft JhengHei"/>
+        <a:font script="Java" typeface="Javanese Text"/>
+        <a:font script="Lisu" typeface="Segoe UI"/>
+        <a:font script="Mymr" typeface="Myanmar Text"/>
+        <a:font script="Nkoo" typeface="Ebrima"/>
+        <a:font script="Olck" typeface="Nirmala UI"/>
+        <a:font script="Osma" typeface="Ebrima"/>
+        <a:font script="Phag" typeface="Phagspa"/>
+        <a:font script="Syrn" typeface="Estrangelo Edessa"/>
+        <a:font script="Syrj" typeface="Estrangelo Edessa"/>
+        <a:font script="Syre" typeface="Estrangelo Edessa"/>
+        <a:font script="Sora" typeface="Nirmala UI"/>
+        <a:font script="Tale" typeface="Microsoft Tai Le"/>
+        <a:font script="Talu" typeface="Microsoft New Tai Lue"/>
+        <a:font script="Tfng" typeface="Ebrima"/>
+      </a:majorFont>
+      <a:minorFont>
+        <a:latin typeface="맑은 고딕" panose="020F0502020204030204"/>
+        <a:ea typeface=""/>
+        <a:cs typeface=""/>
+        <a:font script="Jpan" typeface="游ゴシック"/>
+        <a:font script="Hang" typeface="맑은 고딕"/>
+        <a:font script="Hans" typeface="等线"/>
+        <a:font script="Hant" typeface="新細明體"/>
+        <a:font script="Arab" typeface="Arial"/>
+        <a:font script="Hebr" typeface="Arial"/>
+        <a:font script="Thai" typeface="Cordia New"/>
+        <a:font script="Ethi" typeface="Nyala"/>
+        <a:font script="Beng" typeface="Vrinda"/>
+        <a:font script="Gujr" typeface="Shruti"/>
+        <a:font script="Khmr" typeface="DaunPenh"/>
+        <a:font script="Knda" typeface="Tunga"/>
+        <a:font script="Guru" typeface="Raavi"/>
+        <a:font script="Cans" typeface="Euphemia"/>
+        <a:font script="Cher" typeface="Plantagenet Cherokee"/>
+        <a:font script="Yiii" typeface="Microsoft Yi Baiti"/>
+        <a:font script="Tibt" typeface="Microsoft Himalaya"/>
+        <a:font script="Thaa" typeface="MV Boli"/>
+        <a:font script="Deva" typeface="Mangal"/>
+        <a:font script="Telu" typeface="Gautami"/>
+        <a:font script="Taml" typeface="Latha"/>
+        <a:font script="Syrc" typeface="Estrangelo Edessa"/>
+        <a:font script="Orya" typeface="Kalinga"/>
+        <a:font script="Mlym" typeface="Kartika"/>
+        <a:font script="Laoo" typeface="DokChampa"/>
+        <a:font script="Sinh" typeface="Iskoola Pota"/>
+        <a:font script="Mong" typeface="Mongolian Baiti"/>
+        <a:font script="Viet" typeface="Arial"/>
+        <a:font script="Uigh" typeface="Microsoft Uighur"/>
+        <a:font script="Geor" typeface="Sylfaen"/>
+        <a:font script="Armn" typeface="Arial"/>
+        <a:font script="Bugi" typeface="Leelawadee UI"/>
+        <a:font script="Bopo" typeface="Microsoft JhengHei"/>
+        <a:font script="Java" typeface="Javanese Text"/>
+        <a:font script="Lisu" typeface="Segoe UI"/>
+        <a:font script="Mymr" typeface="Myanmar Text"/>
+        <a:font script="Nkoo" typeface="Ebrima"/>
+        <a:font script="Olck" typeface="Nirmala UI"/>
+        <a:font script="Osma" typeface="Ebrima"/>
+        <a:font script="Phag" typeface="Phagspa"/>
+        <a:font script="Syrn" typeface="Estrangelo Edessa"/>
+        <a:font script="Syrj" typeface="Estrangelo Edessa"/>
+        <a:font script="Syre" typeface="Estrangelo Edessa"/>
+        <a:font script="Sora" typeface="Nirmala UI"/>
+        <a:font script="Tale" typeface="Microsoft Tai Le"/>
+        <a:font script="Talu" typeface="Microsoft New Tai Lue"/>
+        <a:font script="Tfng" typeface="Ebrima"/>
+      </a:minorFont>
+    </a:fontScheme>
+    <a:fmtScheme name="Office">
+      <a:fillStyleLst>
+        <a:solidFill>
+          <a:schemeClr val="phClr"/>
+        </a:solidFill>
+        <a:gradFill rotWithShape="1">
+          <a:gsLst>
+            <a:gs pos="0">
+              <a:schemeClr val="phClr">
+                <a:lumMod val="110000"/>
+                <a:satMod val="105000"/>
+                <a:tint val="67000"/>
+              </a:schemeClr>
+            </a:gs>
+            <a:gs pos="50000">
+              <a:schemeClr val="phClr">
+                <a:lumMod val="105000"/>
+                <a:satMod val="103000"/>
+                <a:tint val="73000"/>
+              </a:schemeClr>
+            </a:gs>
+            <a:gs pos="100000">
+              <a:schemeClr val="phClr">
+                <a:lumMod val="105000"/>
+                <a:satMod val="109000"/>
+                <a:tint val="81000"/>
+              </a:schemeClr>
+            </a:gs>
+          </a:gsLst>
+          <a:lin ang="5400000" scaled="0"/>
+        </a:gradFill>
+        <a:gradFill rotWithShape="1">
+          <a:gsLst>
+            <a:gs pos="0">
+              <a:schemeClr val="phClr">
+                <a:satMod val="103000"/>
+                <a:lumMod val="102000"/>
+                <a:tint val="94000"/>
+              </a:schemeClr>
+            </a:gs>
+            <a:gs pos="50000">
+              <a:schemeClr val="phClr">
+                <a:satMod val="110000"/>
+                <a:lumMod val="100000"/>
+                <a:shade val="100000"/>
+              </a:schemeClr>
+            </a:gs>
+            <a:gs pos="100000">
+              <a:schemeClr val="phClr">
+                <a:lumMod val="99000"/>
+                <a:satMod val="120000"/>
+                <a:shade val="78000"/>
+              </a:schemeClr>
+            </a:gs>
+          </a:gsLst>
+          <a:lin ang="5400000" scaled="0"/>
+        </a:gradFill>
+      </a:fillStyleLst>
+      <a:lnStyleLst>
+        <a:ln w="6350" cap="flat" cmpd="sng" algn="ctr">
+          <a:solidFill>
+            <a:schemeClr val="phClr"/>
+          </a:solidFill>
+          <a:prstDash val="solid"/>
+          <a:miter lim="800000"/>
+        </a:ln>
+        <a:ln w="12700" cap="flat" cmpd="sng" algn="ctr">
+          <a:solidFill>
+            <a:schemeClr val="phClr"/>
+          </a:solidFill>
+          <a:prstDash val="solid"/>
+          <a:miter lim="800000"/>
+        </a:ln>
+        <a:ln w="19050" cap="flat" cmpd="sng" algn="ctr">
+          <a:solidFill>
+            <a:schemeClr val="phClr"/>
+          </a:solidFill>
+          <a:prstDash val="solid"/>
+          <a:miter lim="800000"/>
+        </a:ln>
+      </a:lnStyleLst>
+      <a:effectStyleLst>
+        <a:effectStyle>
+          <a:effectLst/>
+        </a:effectStyle>
+        <a:effectStyle>
+          <a:effectLst/>
+        </a:effectStyle>
+        <a:effectStyle>
+          <a:effectLst>
+            <a:outerShdw blurRad="57150" dist="19050" dir="5400000" algn="ctr" rotWithShape="0">
+              <a:srgbClr val="000000">
+                <a:alpha val="63000"/>
+              </a:srgbClr>
+            </a:outerShdw>
+          </a:effectLst>
+        </a:effectStyle>
+      </a:effectStyleLst>
+      <a:bgFillStyleLst>
+        <a:solidFill>
+          <a:schemeClr val="phClr"/>
+        </a:solidFill>
+        <a:solidFill>
+          <a:schemeClr val="phClr">
+            <a:tint val="95000"/>
+            <a:satMod val="170000"/>
+          </a:schemeClr>
+        </a:solidFill>
+        <a:gradFill rotWithShape="1">
+          <a:gsLst>
+            <a:gs pos="0">
+              <a:schemeClr val="phClr">
+                <a:tint val="93000"/>
+                <a:satMod val="150000"/>
+                <a:shade val="98000"/>
+                <a:lumMod val="102000"/>
+              </a:schemeClr>
+            </a:gs>
+            <a:gs pos="50000">
+              <a:schemeClr val="phClr">
+                <a:tint val="98000"/>
+                <a:satMod val="130000"/>
+                <a:shade val="90000"/>
+                <a:lumMod val="103000"/>
+              </a:schemeClr>
+            </a:gs>
+            <a:gs pos="100000">
+              <a:schemeClr val="phClr">
+                <a:shade val="63000"/>
+                <a:satMod val="120000"/>
+              </a:schemeClr>
+            </a:gs>
+          </a:gsLst>
+          <a:lin ang="5400000" scaled="0"/>
+        </a:gradFill>
+      </a:bgFillStyleLst>
+    </a:fmtScheme>
+  </a:themeElements>
+  <a:objectDefaults/>
+  <a:extraClrSchemeLst/>
+  <a:extLst>
+    <a:ext uri="{05A4C25C-085E-4340-85A3-A5531E510DB2}">
+      <thm15:themeFamily xmlns:thm15="http://schemas.microsoft.com/office/thememl/2012/main" name="Office Theme" id="{62F939B6-93AF-4DB8-9C6B-D6C7DFDC589F}" vid="{4A3C46E8-61CC-4603-A589-7422A47A8E4A}"/>
+    </a:ext>
+  </a:extLst>
+</a:theme>
 </file>